--- a/09_Post_Analysis/09_Post-analysis.pptx
+++ b/09_Post_Analysis/09_Post-analysis.pptx
@@ -5,16 +5,17 @@
     <p:sldMasterId id="2147483648" r:id="rId1"/>
   </p:sldMasterIdLst>
   <p:notesMasterIdLst>
-    <p:notesMasterId r:id="rId6"/>
+    <p:notesMasterId r:id="rId7"/>
   </p:notesMasterIdLst>
   <p:handoutMasterIdLst>
-    <p:handoutMasterId r:id="rId7"/>
+    <p:handoutMasterId r:id="rId8"/>
   </p:handoutMasterIdLst>
   <p:sldIdLst>
     <p:sldId id="281" r:id="rId2"/>
     <p:sldId id="297" r:id="rId3"/>
-    <p:sldId id="298" r:id="rId4"/>
-    <p:sldId id="266" r:id="rId5"/>
+    <p:sldId id="299" r:id="rId4"/>
+    <p:sldId id="298" r:id="rId5"/>
+    <p:sldId id="266" r:id="rId6"/>
   </p:sldIdLst>
   <p:sldSz cx="12192000" cy="6858000"/>
   <p:notesSz cx="9144000" cy="6858000"/>
@@ -281,7 +282,7 @@
           <a:p>
             <a:fld id="{B0DE400B-5F95-4EE3-9D17-5032615B1C24}" type="datetimeFigureOut">
               <a:rPr lang="hu-HU" smtClean="0"/>
-              <a:t>2026. 02. 26.</a:t>
+              <a:t>2026. 02. 27.</a:t>
             </a:fld>
             <a:endParaRPr lang="hu-HU"/>
           </a:p>
@@ -381,7 +382,7 @@
           <a:p>
             <a:fld id="{A4BC41BF-2966-492C-BF11-EDF0CF116384}" type="datetimeFigureOut">
               <a:rPr lang="hu-HU" smtClean="0"/>
-              <a:t>2026. 02. 26.</a:t>
+              <a:t>2026. 02. 27.</a:t>
             </a:fld>
             <a:endParaRPr lang="hu-HU"/>
           </a:p>
@@ -5061,6 +5062,1055 @@
         <p:cNvPr id="1" name="">
           <a:extLst>
             <a:ext uri="{FF2B5EF4-FFF2-40B4-BE49-F238E27FC236}">
+              <a16:creationId xmlns:a16="http://schemas.microsoft.com/office/drawing/2014/main" id="{7BAB0D0D-B5B2-FB35-EC40-3FAC9ABE7702}"/>
+            </a:ext>
+          </a:extLst>
+        </p:cNvPr>
+        <p:cNvGrpSpPr/>
+        <p:nvPr/>
+      </p:nvGrpSpPr>
+      <p:grpSpPr>
+        <a:xfrm>
+          <a:off x="0" y="0"/>
+          <a:ext cx="0" cy="0"/>
+          <a:chOff x="0" y="0"/>
+          <a:chExt cx="0" cy="0"/>
+        </a:xfrm>
+      </p:grpSpPr>
+      <p:sp>
+        <p:nvSpPr>
+          <p:cNvPr id="4" name="Marcador de Posição do Número do Diapositivo 3">
+            <a:extLst>
+              <a:ext uri="{FF2B5EF4-FFF2-40B4-BE49-F238E27FC236}">
+                <a16:creationId xmlns:a16="http://schemas.microsoft.com/office/drawing/2014/main" id="{0E9FAE5E-5899-641E-BD25-73E417016F07}"/>
+              </a:ext>
+            </a:extLst>
+          </p:cNvPr>
+          <p:cNvSpPr>
+            <a:spLocks noGrp="1"/>
+          </p:cNvSpPr>
+          <p:nvPr>
+            <p:ph type="sldNum" sz="quarter" idx="11"/>
+          </p:nvPr>
+        </p:nvSpPr>
+        <p:spPr/>
+        <p:txBody>
+          <a:bodyPr/>
+          <a:lstStyle/>
+          <a:p>
+            <a:fld id="{20B01981-BAC9-448B-9192-9C05FAA59408}" type="slidenum">
+              <a:rPr lang="en-US" noProof="0" smtClean="0"/>
+              <a:pPr/>
+              <a:t>3</a:t>
+            </a:fld>
+            <a:endParaRPr lang="en-US" noProof="0" dirty="0"/>
+          </a:p>
+        </p:txBody>
+      </p:sp>
+      <p:sp>
+        <p:nvSpPr>
+          <p:cNvPr id="7" name="Google Shape;129;p24">
+            <a:extLst>
+              <a:ext uri="{FF2B5EF4-FFF2-40B4-BE49-F238E27FC236}">
+                <a16:creationId xmlns:a16="http://schemas.microsoft.com/office/drawing/2014/main" id="{5C54AC6F-DC62-0DF5-45B1-DB8B8FEB25CA}"/>
+              </a:ext>
+            </a:extLst>
+          </p:cNvPr>
+          <p:cNvSpPr txBox="1">
+            <a:spLocks/>
+          </p:cNvSpPr>
+          <p:nvPr/>
+        </p:nvSpPr>
+        <p:spPr>
+          <a:xfrm>
+            <a:off x="450519" y="399459"/>
+            <a:ext cx="4157108" cy="643280"/>
+          </a:xfrm>
+          <a:prstGeom prst="rect">
+            <a:avLst/>
+          </a:prstGeom>
+          <a:noFill/>
+          <a:ln>
+            <a:noFill/>
+          </a:ln>
+        </p:spPr>
+        <p:txBody>
+          <a:bodyPr spcFirstLastPara="1" vert="horz" wrap="square" lIns="91433" tIns="45700" rIns="91433" bIns="45700" rtlCol="0" anchor="t" anchorCtr="0">
+            <a:normAutofit/>
+          </a:bodyPr>
+          <a:lstStyle>
+            <a:lvl1pPr marL="228600" indent="-228600" algn="l" defTabSz="914400" rtl="0" eaLnBrk="1" latinLnBrk="0" hangingPunct="1">
+              <a:lnSpc>
+                <a:spcPct val="90000"/>
+              </a:lnSpc>
+              <a:spcBef>
+                <a:spcPts val="1000"/>
+              </a:spcBef>
+              <a:buFont typeface="Arial" panose="020B0604020202020204" pitchFamily="34" charset="0"/>
+              <a:buChar char="•"/>
+              <a:defRPr sz="2800" kern="1200">
+                <a:solidFill>
+                  <a:schemeClr val="tx1"/>
+                </a:solidFill>
+                <a:latin typeface="+mn-lt"/>
+                <a:ea typeface="+mn-ea"/>
+                <a:cs typeface="+mn-cs"/>
+              </a:defRPr>
+            </a:lvl1pPr>
+            <a:lvl2pPr marL="685800" indent="-228600" algn="l" defTabSz="914400" rtl="0" eaLnBrk="1" latinLnBrk="0" hangingPunct="1">
+              <a:lnSpc>
+                <a:spcPct val="90000"/>
+              </a:lnSpc>
+              <a:spcBef>
+                <a:spcPts val="500"/>
+              </a:spcBef>
+              <a:buFont typeface="Arial" panose="020B0604020202020204" pitchFamily="34" charset="0"/>
+              <a:buChar char="•"/>
+              <a:defRPr sz="2400" kern="1200">
+                <a:solidFill>
+                  <a:schemeClr val="tx1"/>
+                </a:solidFill>
+                <a:latin typeface="+mn-lt"/>
+                <a:ea typeface="+mn-ea"/>
+                <a:cs typeface="+mn-cs"/>
+              </a:defRPr>
+            </a:lvl2pPr>
+            <a:lvl3pPr marL="1143000" indent="-228600" algn="l" defTabSz="914400" rtl="0" eaLnBrk="1" latinLnBrk="0" hangingPunct="1">
+              <a:lnSpc>
+                <a:spcPct val="90000"/>
+              </a:lnSpc>
+              <a:spcBef>
+                <a:spcPts val="500"/>
+              </a:spcBef>
+              <a:buFont typeface="Arial" panose="020B0604020202020204" pitchFamily="34" charset="0"/>
+              <a:buChar char="•"/>
+              <a:defRPr sz="2000" kern="1200">
+                <a:solidFill>
+                  <a:schemeClr val="tx1"/>
+                </a:solidFill>
+                <a:latin typeface="+mn-lt"/>
+                <a:ea typeface="+mn-ea"/>
+                <a:cs typeface="+mn-cs"/>
+              </a:defRPr>
+            </a:lvl3pPr>
+            <a:lvl4pPr marL="1600200" indent="-228600" algn="l" defTabSz="914400" rtl="0" eaLnBrk="1" latinLnBrk="0" hangingPunct="1">
+              <a:lnSpc>
+                <a:spcPct val="90000"/>
+              </a:lnSpc>
+              <a:spcBef>
+                <a:spcPts val="500"/>
+              </a:spcBef>
+              <a:buFont typeface="Arial" panose="020B0604020202020204" pitchFamily="34" charset="0"/>
+              <a:buChar char="•"/>
+              <a:defRPr sz="1800" kern="1200">
+                <a:solidFill>
+                  <a:schemeClr val="tx1"/>
+                </a:solidFill>
+                <a:latin typeface="+mn-lt"/>
+                <a:ea typeface="+mn-ea"/>
+                <a:cs typeface="+mn-cs"/>
+              </a:defRPr>
+            </a:lvl4pPr>
+            <a:lvl5pPr marL="2057400" indent="-228600" algn="l" defTabSz="914400" rtl="0" eaLnBrk="1" latinLnBrk="0" hangingPunct="1">
+              <a:lnSpc>
+                <a:spcPct val="90000"/>
+              </a:lnSpc>
+              <a:spcBef>
+                <a:spcPts val="500"/>
+              </a:spcBef>
+              <a:buFont typeface="Arial" panose="020B0604020202020204" pitchFamily="34" charset="0"/>
+              <a:buChar char="•"/>
+              <a:defRPr sz="1800" kern="1200">
+                <a:solidFill>
+                  <a:schemeClr val="tx1"/>
+                </a:solidFill>
+                <a:latin typeface="+mn-lt"/>
+                <a:ea typeface="+mn-ea"/>
+                <a:cs typeface="+mn-cs"/>
+              </a:defRPr>
+            </a:lvl5pPr>
+            <a:lvl6pPr marL="2514600" indent="-228600" algn="l" defTabSz="914400" rtl="0" eaLnBrk="1" latinLnBrk="0" hangingPunct="1">
+              <a:lnSpc>
+                <a:spcPct val="90000"/>
+              </a:lnSpc>
+              <a:spcBef>
+                <a:spcPts val="500"/>
+              </a:spcBef>
+              <a:buFont typeface="Arial" panose="020B0604020202020204" pitchFamily="34" charset="0"/>
+              <a:buChar char="•"/>
+              <a:defRPr sz="1800" kern="1200">
+                <a:solidFill>
+                  <a:schemeClr val="tx1"/>
+                </a:solidFill>
+                <a:latin typeface="+mn-lt"/>
+                <a:ea typeface="+mn-ea"/>
+                <a:cs typeface="+mn-cs"/>
+              </a:defRPr>
+            </a:lvl6pPr>
+            <a:lvl7pPr marL="2971800" indent="-228600" algn="l" defTabSz="914400" rtl="0" eaLnBrk="1" latinLnBrk="0" hangingPunct="1">
+              <a:lnSpc>
+                <a:spcPct val="90000"/>
+              </a:lnSpc>
+              <a:spcBef>
+                <a:spcPts val="500"/>
+              </a:spcBef>
+              <a:buFont typeface="Arial" panose="020B0604020202020204" pitchFamily="34" charset="0"/>
+              <a:buChar char="•"/>
+              <a:defRPr sz="1800" kern="1200">
+                <a:solidFill>
+                  <a:schemeClr val="tx1"/>
+                </a:solidFill>
+                <a:latin typeface="+mn-lt"/>
+                <a:ea typeface="+mn-ea"/>
+                <a:cs typeface="+mn-cs"/>
+              </a:defRPr>
+            </a:lvl7pPr>
+            <a:lvl8pPr marL="3429000" indent="-228600" algn="l" defTabSz="914400" rtl="0" eaLnBrk="1" latinLnBrk="0" hangingPunct="1">
+              <a:lnSpc>
+                <a:spcPct val="90000"/>
+              </a:lnSpc>
+              <a:spcBef>
+                <a:spcPts val="500"/>
+              </a:spcBef>
+              <a:buFont typeface="Arial" panose="020B0604020202020204" pitchFamily="34" charset="0"/>
+              <a:buChar char="•"/>
+              <a:defRPr sz="1800" kern="1200">
+                <a:solidFill>
+                  <a:schemeClr val="tx1"/>
+                </a:solidFill>
+                <a:latin typeface="+mn-lt"/>
+                <a:ea typeface="+mn-ea"/>
+                <a:cs typeface="+mn-cs"/>
+              </a:defRPr>
+            </a:lvl8pPr>
+            <a:lvl9pPr marL="3886200" indent="-228600" algn="l" defTabSz="914400" rtl="0" eaLnBrk="1" latinLnBrk="0" hangingPunct="1">
+              <a:lnSpc>
+                <a:spcPct val="90000"/>
+              </a:lnSpc>
+              <a:spcBef>
+                <a:spcPts val="500"/>
+              </a:spcBef>
+              <a:buFont typeface="Arial" panose="020B0604020202020204" pitchFamily="34" charset="0"/>
+              <a:buChar char="•"/>
+              <a:defRPr sz="1800" kern="1200">
+                <a:solidFill>
+                  <a:schemeClr val="tx1"/>
+                </a:solidFill>
+                <a:latin typeface="+mn-lt"/>
+                <a:ea typeface="+mn-ea"/>
+                <a:cs typeface="+mn-cs"/>
+              </a:defRPr>
+            </a:lvl9pPr>
+          </a:lstStyle>
+          <a:p>
+            <a:pPr marL="0" marR="0" lvl="0" indent="0" algn="l" defTabSz="914400" rtl="0" eaLnBrk="1" fontAlgn="auto" latinLnBrk="0" hangingPunct="1">
+              <a:lnSpc>
+                <a:spcPct val="90000"/>
+              </a:lnSpc>
+              <a:spcBef>
+                <a:spcPts val="0"/>
+              </a:spcBef>
+              <a:spcAft>
+                <a:spcPts val="0"/>
+              </a:spcAft>
+              <a:buClr>
+                <a:srgbClr val="00AAF0"/>
+              </a:buClr>
+              <a:buSzPts val="1800"/>
+              <a:buFont typeface="Arial" panose="020B0604020202020204" pitchFamily="34" charset="0"/>
+              <a:buNone/>
+              <a:tabLst/>
+              <a:defRPr/>
+            </a:pPr>
+            <a:r>
+              <a:rPr kumimoji="0" lang="en-US" sz="2400" b="1" i="0" u="none" strike="noStrike" kern="1200" cap="none" spc="0" normalizeH="0" baseline="0" noProof="0" dirty="0">
+                <a:ln>
+                  <a:noFill/>
+                </a:ln>
+                <a:solidFill>
+                  <a:srgbClr val="00AAF0"/>
+                </a:solidFill>
+                <a:effectLst/>
+                <a:uLnTx/>
+                <a:uFillTx/>
+                <a:latin typeface="Verdana"/>
+                <a:ea typeface="Verdana"/>
+                <a:sym typeface="Verdana"/>
+              </a:rPr>
+              <a:t>Question and Answers</a:t>
+            </a:r>
+          </a:p>
+          <a:p>
+            <a:pPr marL="0" indent="0">
+              <a:spcBef>
+                <a:spcPts val="0"/>
+              </a:spcBef>
+              <a:buNone/>
+            </a:pPr>
+            <a:endParaRPr lang="en-US" dirty="0"/>
+          </a:p>
+        </p:txBody>
+      </p:sp>
+      <p:sp>
+        <p:nvSpPr>
+          <p:cNvPr id="2" name="AutoShape 2" descr="preview url image">
+            <a:extLst>
+              <a:ext uri="{FF2B5EF4-FFF2-40B4-BE49-F238E27FC236}">
+                <a16:creationId xmlns:a16="http://schemas.microsoft.com/office/drawing/2014/main" id="{EE3D2BFD-6028-0672-0008-7C3D05E2C9CD}"/>
+              </a:ext>
+            </a:extLst>
+          </p:cNvPr>
+          <p:cNvSpPr>
+            <a:spLocks noChangeAspect="1" noChangeArrowheads="1"/>
+          </p:cNvSpPr>
+          <p:nvPr/>
+        </p:nvSpPr>
+        <p:spPr bwMode="auto">
+          <a:xfrm>
+            <a:off x="5943600" y="3276600"/>
+            <a:ext cx="304800" cy="304800"/>
+          </a:xfrm>
+          <a:prstGeom prst="rect">
+            <a:avLst/>
+          </a:prstGeom>
+          <a:noFill/>
+          <a:extLst>
+            <a:ext uri="{909E8E84-426E-40DD-AFC4-6F175D3DCCD1}">
+              <a14:hiddenFill xmlns:a14="http://schemas.microsoft.com/office/drawing/2010/main">
+                <a:solidFill>
+                  <a:srgbClr val="FFFFFF"/>
+                </a:solidFill>
+              </a14:hiddenFill>
+            </a:ext>
+          </a:extLst>
+        </p:spPr>
+        <p:txBody>
+          <a:bodyPr vert="horz" wrap="square" lIns="91440" tIns="45720" rIns="91440" bIns="45720" numCol="1" anchor="t" anchorCtr="0" compatLnSpc="1">
+            <a:prstTxWarp prst="textNoShape">
+              <a:avLst/>
+            </a:prstTxWarp>
+          </a:bodyPr>
+          <a:lstStyle/>
+          <a:p>
+            <a:endParaRPr lang="pt-PT"/>
+          </a:p>
+        </p:txBody>
+      </p:sp>
+      <p:pic>
+        <p:nvPicPr>
+          <p:cNvPr id="3" name="Picture 4" descr="Overview of the experimental steps in a RNAseq protocol. The cDNA... |  Download Scientific Diagram">
+            <a:extLst>
+              <a:ext uri="{FF2B5EF4-FFF2-40B4-BE49-F238E27FC236}">
+                <a16:creationId xmlns:a16="http://schemas.microsoft.com/office/drawing/2014/main" id="{2C8D00C0-8EFC-CFED-599A-C3F9E93AA66B}"/>
+              </a:ext>
+            </a:extLst>
+          </p:cNvPr>
+          <p:cNvPicPr>
+            <a:picLocks noChangeAspect="1" noChangeArrowheads="1"/>
+          </p:cNvPicPr>
+          <p:nvPr/>
+        </p:nvPicPr>
+        <p:blipFill>
+          <a:blip r:embed="rId2">
+            <a:extLst>
+              <a:ext uri="{28A0092B-C50C-407E-A947-70E740481C1C}">
+                <a14:useLocalDpi xmlns:a14="http://schemas.microsoft.com/office/drawing/2010/main" val="0"/>
+              </a:ext>
+            </a:extLst>
+          </a:blip>
+          <a:srcRect/>
+          <a:stretch>
+            <a:fillRect/>
+          </a:stretch>
+        </p:blipFill>
+        <p:spPr bwMode="auto">
+          <a:xfrm>
+            <a:off x="487934" y="2032590"/>
+            <a:ext cx="6188912" cy="2970678"/>
+          </a:xfrm>
+          <a:prstGeom prst="rect">
+            <a:avLst/>
+          </a:prstGeom>
+          <a:noFill/>
+          <a:extLst>
+            <a:ext uri="{909E8E84-426E-40DD-AFC4-6F175D3DCCD1}">
+              <a14:hiddenFill xmlns:a14="http://schemas.microsoft.com/office/drawing/2010/main">
+                <a:solidFill>
+                  <a:srgbClr val="FFFFFF"/>
+                </a:solidFill>
+              </a14:hiddenFill>
+            </a:ext>
+          </a:extLst>
+        </p:spPr>
+      </p:pic>
+      <p:sp>
+        <p:nvSpPr>
+          <p:cNvPr id="6" name="Rectangle 16">
+            <a:extLst>
+              <a:ext uri="{FF2B5EF4-FFF2-40B4-BE49-F238E27FC236}">
+                <a16:creationId xmlns:a16="http://schemas.microsoft.com/office/drawing/2014/main" id="{A307C9F4-71AB-87D8-8E52-0355BE0A838A}"/>
+              </a:ext>
+            </a:extLst>
+          </p:cNvPr>
+          <p:cNvSpPr/>
+          <p:nvPr/>
+        </p:nvSpPr>
+        <p:spPr>
+          <a:xfrm>
+            <a:off x="487933" y="3487257"/>
+            <a:ext cx="3678625" cy="1516011"/>
+          </a:xfrm>
+          <a:prstGeom prst="rect">
+            <a:avLst/>
+          </a:prstGeom>
+          <a:noFill/>
+          <a:ln w="38100">
+            <a:solidFill>
+              <a:srgbClr val="12A0CB"/>
+            </a:solidFill>
+          </a:ln>
+        </p:spPr>
+        <p:style>
+          <a:lnRef idx="2">
+            <a:schemeClr val="accent1">
+              <a:shade val="15000"/>
+            </a:schemeClr>
+          </a:lnRef>
+          <a:fillRef idx="1">
+            <a:schemeClr val="accent1"/>
+          </a:fillRef>
+          <a:effectRef idx="0">
+            <a:schemeClr val="accent1"/>
+          </a:effectRef>
+          <a:fontRef idx="minor">
+            <a:schemeClr val="lt1"/>
+          </a:fontRef>
+        </p:style>
+        <p:txBody>
+          <a:bodyPr rtlCol="0" anchor="ctr"/>
+          <a:lstStyle/>
+          <a:p>
+            <a:pPr algn="ctr"/>
+            <a:endParaRPr lang="en-GB"/>
+          </a:p>
+        </p:txBody>
+      </p:sp>
+      <p:sp>
+        <p:nvSpPr>
+          <p:cNvPr id="11" name="Arrow: Bent 5">
+            <a:extLst>
+              <a:ext uri="{FF2B5EF4-FFF2-40B4-BE49-F238E27FC236}">
+                <a16:creationId xmlns:a16="http://schemas.microsoft.com/office/drawing/2014/main" id="{4A2FA27C-9AA9-29E7-207E-2BAE672D7A6A}"/>
+              </a:ext>
+            </a:extLst>
+          </p:cNvPr>
+          <p:cNvSpPr/>
+          <p:nvPr/>
+        </p:nvSpPr>
+        <p:spPr>
+          <a:xfrm flipV="1">
+            <a:off x="1000663" y="4477108"/>
+            <a:ext cx="6909759" cy="1500995"/>
+          </a:xfrm>
+          <a:prstGeom prst="bentArrow">
+            <a:avLst>
+              <a:gd name="adj1" fmla="val 6476"/>
+              <a:gd name="adj2" fmla="val 10803"/>
+              <a:gd name="adj3" fmla="val 25000"/>
+              <a:gd name="adj4" fmla="val 43750"/>
+            </a:avLst>
+          </a:prstGeom>
+        </p:spPr>
+        <p:style>
+          <a:lnRef idx="2">
+            <a:schemeClr val="accent1">
+              <a:shade val="15000"/>
+            </a:schemeClr>
+          </a:lnRef>
+          <a:fillRef idx="1">
+            <a:schemeClr val="accent1"/>
+          </a:fillRef>
+          <a:effectRef idx="0">
+            <a:schemeClr val="accent1"/>
+          </a:effectRef>
+          <a:fontRef idx="minor">
+            <a:schemeClr val="lt1"/>
+          </a:fontRef>
+        </p:style>
+        <p:txBody>
+          <a:bodyPr rtlCol="0" anchor="ctr"/>
+          <a:lstStyle/>
+          <a:p>
+            <a:pPr algn="ctr"/>
+            <a:endParaRPr lang="en-GB">
+              <a:solidFill>
+                <a:schemeClr val="tx1"/>
+              </a:solidFill>
+            </a:endParaRPr>
+          </a:p>
+        </p:txBody>
+      </p:sp>
+      <p:sp>
+        <p:nvSpPr>
+          <p:cNvPr id="13" name="TextBox 17">
+            <a:extLst>
+              <a:ext uri="{FF2B5EF4-FFF2-40B4-BE49-F238E27FC236}">
+                <a16:creationId xmlns:a16="http://schemas.microsoft.com/office/drawing/2014/main" id="{18FD6773-176E-EF17-FC19-6FFF29E5D851}"/>
+              </a:ext>
+            </a:extLst>
+          </p:cNvPr>
+          <p:cNvSpPr txBox="1"/>
+          <p:nvPr/>
+        </p:nvSpPr>
+        <p:spPr>
+          <a:xfrm>
+            <a:off x="1226941" y="5002970"/>
+            <a:ext cx="2857064" cy="369332"/>
+          </a:xfrm>
+          <a:prstGeom prst="rect">
+            <a:avLst/>
+          </a:prstGeom>
+          <a:noFill/>
+        </p:spPr>
+        <p:txBody>
+          <a:bodyPr wrap="none" rtlCol="0">
+            <a:spAutoFit/>
+          </a:bodyPr>
+          <a:lstStyle/>
+          <a:p>
+            <a:r>
+              <a:rPr lang="en-GB" b="1" dirty="0"/>
+              <a:t>Bioinformatics data analysis</a:t>
+            </a:r>
+          </a:p>
+        </p:txBody>
+      </p:sp>
+      <p:pic>
+        <p:nvPicPr>
+          <p:cNvPr id="15" name="Imagem 14">
+            <a:extLst>
+              <a:ext uri="{FF2B5EF4-FFF2-40B4-BE49-F238E27FC236}">
+                <a16:creationId xmlns:a16="http://schemas.microsoft.com/office/drawing/2014/main" id="{B18E4D6C-1910-BA14-E589-273DFE6B3F69}"/>
+              </a:ext>
+            </a:extLst>
+          </p:cNvPr>
+          <p:cNvPicPr>
+            <a:picLocks noChangeAspect="1"/>
+          </p:cNvPicPr>
+          <p:nvPr/>
+        </p:nvPicPr>
+        <p:blipFill>
+          <a:blip r:embed="rId3">
+            <a:extLst>
+              <a:ext uri="{28A0092B-C50C-407E-A947-70E740481C1C}">
+                <a14:useLocalDpi xmlns:a14="http://schemas.microsoft.com/office/drawing/2010/main" val="0"/>
+              </a:ext>
+            </a:extLst>
+          </a:blip>
+          <a:stretch>
+            <a:fillRect/>
+          </a:stretch>
+        </p:blipFill>
+        <p:spPr>
+          <a:xfrm>
+            <a:off x="8025442" y="2658506"/>
+            <a:ext cx="3898335" cy="3637203"/>
+          </a:xfrm>
+          <a:prstGeom prst="rect">
+            <a:avLst/>
+          </a:prstGeom>
+        </p:spPr>
+      </p:pic>
+      <p:pic>
+        <p:nvPicPr>
+          <p:cNvPr id="17" name="Imagem 16">
+            <a:extLst>
+              <a:ext uri="{FF2B5EF4-FFF2-40B4-BE49-F238E27FC236}">
+                <a16:creationId xmlns:a16="http://schemas.microsoft.com/office/drawing/2014/main" id="{8FB05930-BEC4-18E6-D9B9-5AA1183F21BF}"/>
+              </a:ext>
+            </a:extLst>
+          </p:cNvPr>
+          <p:cNvPicPr>
+            <a:picLocks noChangeAspect="1"/>
+          </p:cNvPicPr>
+          <p:nvPr/>
+        </p:nvPicPr>
+        <p:blipFill>
+          <a:blip r:embed="rId4">
+            <a:extLst>
+              <a:ext uri="{28A0092B-C50C-407E-A947-70E740481C1C}">
+                <a14:useLocalDpi xmlns:a14="http://schemas.microsoft.com/office/drawing/2010/main" val="0"/>
+              </a:ext>
+            </a:extLst>
+          </a:blip>
+          <a:stretch>
+            <a:fillRect/>
+          </a:stretch>
+        </p:blipFill>
+        <p:spPr>
+          <a:xfrm>
+            <a:off x="8807638" y="18803"/>
+            <a:ext cx="3384362" cy="6858000"/>
+          </a:xfrm>
+          <a:prstGeom prst="rect">
+            <a:avLst/>
+          </a:prstGeom>
+        </p:spPr>
+      </p:pic>
+      <p:sp>
+        <p:nvSpPr>
+          <p:cNvPr id="19" name="AutoShape 2" descr="Pipeline">
+            <a:extLst>
+              <a:ext uri="{FF2B5EF4-FFF2-40B4-BE49-F238E27FC236}">
+                <a16:creationId xmlns:a16="http://schemas.microsoft.com/office/drawing/2014/main" id="{3A667708-984A-932C-ACA4-B9285891B415}"/>
+              </a:ext>
+            </a:extLst>
+          </p:cNvPr>
+          <p:cNvSpPr>
+            <a:spLocks noChangeAspect="1" noChangeArrowheads="1"/>
+          </p:cNvSpPr>
+          <p:nvPr/>
+        </p:nvSpPr>
+        <p:spPr bwMode="auto">
+          <a:xfrm>
+            <a:off x="6096000" y="3429000"/>
+            <a:ext cx="304800" cy="304800"/>
+          </a:xfrm>
+          <a:prstGeom prst="rect">
+            <a:avLst/>
+          </a:prstGeom>
+          <a:noFill/>
+          <a:extLst>
+            <a:ext uri="{909E8E84-426E-40DD-AFC4-6F175D3DCCD1}">
+              <a14:hiddenFill xmlns:a14="http://schemas.microsoft.com/office/drawing/2010/main">
+                <a:solidFill>
+                  <a:srgbClr val="FFFFFF"/>
+                </a:solidFill>
+              </a14:hiddenFill>
+            </a:ext>
+          </a:extLst>
+        </p:spPr>
+        <p:txBody>
+          <a:bodyPr vert="horz" wrap="square" lIns="91440" tIns="45720" rIns="91440" bIns="45720" numCol="1" anchor="t" anchorCtr="0" compatLnSpc="1">
+            <a:prstTxWarp prst="textNoShape">
+              <a:avLst/>
+            </a:prstTxWarp>
+          </a:bodyPr>
+          <a:lstStyle/>
+          <a:p>
+            <a:endParaRPr lang="pt-PT"/>
+          </a:p>
+        </p:txBody>
+      </p:sp>
+      <p:pic>
+        <p:nvPicPr>
+          <p:cNvPr id="21" name="Imagem 20">
+            <a:extLst>
+              <a:ext uri="{FF2B5EF4-FFF2-40B4-BE49-F238E27FC236}">
+                <a16:creationId xmlns:a16="http://schemas.microsoft.com/office/drawing/2014/main" id="{36535555-C817-471C-7854-10639254CB14}"/>
+              </a:ext>
+            </a:extLst>
+          </p:cNvPr>
+          <p:cNvPicPr>
+            <a:picLocks noChangeAspect="1"/>
+          </p:cNvPicPr>
+          <p:nvPr/>
+        </p:nvPicPr>
+        <p:blipFill>
+          <a:blip r:embed="rId5">
+            <a:extLst>
+              <a:ext uri="{28A0092B-C50C-407E-A947-70E740481C1C}">
+                <a14:useLocalDpi xmlns:a14="http://schemas.microsoft.com/office/drawing/2010/main" val="0"/>
+              </a:ext>
+            </a:extLst>
+          </a:blip>
+          <a:stretch>
+            <a:fillRect/>
+          </a:stretch>
+        </p:blipFill>
+        <p:spPr>
+          <a:xfrm>
+            <a:off x="487932" y="1042739"/>
+            <a:ext cx="5907153" cy="4960986"/>
+          </a:xfrm>
+          <a:prstGeom prst="rect">
+            <a:avLst/>
+          </a:prstGeom>
+        </p:spPr>
+      </p:pic>
+    </p:spTree>
+    <p:extLst>
+      <p:ext uri="{BB962C8B-B14F-4D97-AF65-F5344CB8AC3E}">
+        <p14:creationId xmlns:p14="http://schemas.microsoft.com/office/powerpoint/2010/main" val="1694088089"/>
+      </p:ext>
+    </p:extLst>
+  </p:cSld>
+  <p:clrMapOvr>
+    <a:masterClrMapping/>
+  </p:clrMapOvr>
+  <p:timing>
+    <p:tnLst>
+      <p:par>
+        <p:cTn id="1" dur="indefinite" restart="never" nodeType="tmRoot">
+          <p:childTnLst>
+            <p:seq concurrent="1" nextAc="seek">
+              <p:cTn id="2" dur="indefinite" nodeType="mainSeq">
+                <p:childTnLst>
+                  <p:par>
+                    <p:cTn id="3" fill="hold">
+                      <p:stCondLst>
+                        <p:cond delay="indefinite"/>
+                      </p:stCondLst>
+                      <p:childTnLst>
+                        <p:par>
+                          <p:cTn id="4" fill="hold">
+                            <p:stCondLst>
+                              <p:cond delay="0"/>
+                            </p:stCondLst>
+                            <p:childTnLst>
+                              <p:par>
+                                <p:cTn id="5" presetID="10" presetClass="entr" presetSubtype="0" fill="hold" grpId="0" nodeType="clickEffect">
+                                  <p:stCondLst>
+                                    <p:cond delay="0"/>
+                                  </p:stCondLst>
+                                  <p:childTnLst>
+                                    <p:set>
+                                      <p:cBhvr>
+                                        <p:cTn id="6" dur="1" fill="hold">
+                                          <p:stCondLst>
+                                            <p:cond delay="0"/>
+                                          </p:stCondLst>
+                                        </p:cTn>
+                                        <p:tgtEl>
+                                          <p:spTgt spid="6"/>
+                                        </p:tgtEl>
+                                        <p:attrNameLst>
+                                          <p:attrName>style.visibility</p:attrName>
+                                        </p:attrNameLst>
+                                      </p:cBhvr>
+                                      <p:to>
+                                        <p:strVal val="visible"/>
+                                      </p:to>
+                                    </p:set>
+                                    <p:animEffect transition="in" filter="fade">
+                                      <p:cBhvr>
+                                        <p:cTn id="7" dur="500"/>
+                                        <p:tgtEl>
+                                          <p:spTgt spid="6"/>
+                                        </p:tgtEl>
+                                      </p:cBhvr>
+                                    </p:animEffect>
+                                  </p:childTnLst>
+                                </p:cTn>
+                              </p:par>
+                              <p:par>
+                                <p:cTn id="8" presetID="10" presetClass="entr" presetSubtype="0" fill="hold" grpId="0" nodeType="withEffect">
+                                  <p:stCondLst>
+                                    <p:cond delay="0"/>
+                                  </p:stCondLst>
+                                  <p:childTnLst>
+                                    <p:set>
+                                      <p:cBhvr>
+                                        <p:cTn id="9" dur="1" fill="hold">
+                                          <p:stCondLst>
+                                            <p:cond delay="0"/>
+                                          </p:stCondLst>
+                                        </p:cTn>
+                                        <p:tgtEl>
+                                          <p:spTgt spid="13"/>
+                                        </p:tgtEl>
+                                        <p:attrNameLst>
+                                          <p:attrName>style.visibility</p:attrName>
+                                        </p:attrNameLst>
+                                      </p:cBhvr>
+                                      <p:to>
+                                        <p:strVal val="visible"/>
+                                      </p:to>
+                                    </p:set>
+                                    <p:animEffect transition="in" filter="fade">
+                                      <p:cBhvr>
+                                        <p:cTn id="10" dur="500"/>
+                                        <p:tgtEl>
+                                          <p:spTgt spid="13"/>
+                                        </p:tgtEl>
+                                      </p:cBhvr>
+                                    </p:animEffect>
+                                  </p:childTnLst>
+                                </p:cTn>
+                              </p:par>
+                            </p:childTnLst>
+                          </p:cTn>
+                        </p:par>
+                      </p:childTnLst>
+                    </p:cTn>
+                  </p:par>
+                  <p:par>
+                    <p:cTn id="11" fill="hold">
+                      <p:stCondLst>
+                        <p:cond delay="indefinite"/>
+                      </p:stCondLst>
+                      <p:childTnLst>
+                        <p:par>
+                          <p:cTn id="12" fill="hold">
+                            <p:stCondLst>
+                              <p:cond delay="0"/>
+                            </p:stCondLst>
+                            <p:childTnLst>
+                              <p:par>
+                                <p:cTn id="13" presetID="3" presetClass="entr" presetSubtype="10" fill="hold" nodeType="clickEffect">
+                                  <p:stCondLst>
+                                    <p:cond delay="0"/>
+                                  </p:stCondLst>
+                                  <p:childTnLst>
+                                    <p:set>
+                                      <p:cBhvr>
+                                        <p:cTn id="14" dur="1" fill="hold">
+                                          <p:stCondLst>
+                                            <p:cond delay="0"/>
+                                          </p:stCondLst>
+                                        </p:cTn>
+                                        <p:tgtEl>
+                                          <p:spTgt spid="21"/>
+                                        </p:tgtEl>
+                                        <p:attrNameLst>
+                                          <p:attrName>style.visibility</p:attrName>
+                                        </p:attrNameLst>
+                                      </p:cBhvr>
+                                      <p:to>
+                                        <p:strVal val="visible"/>
+                                      </p:to>
+                                    </p:set>
+                                    <p:animEffect transition="in" filter="blinds(horizontal)">
+                                      <p:cBhvr>
+                                        <p:cTn id="15" dur="500"/>
+                                        <p:tgtEl>
+                                          <p:spTgt spid="21"/>
+                                        </p:tgtEl>
+                                      </p:cBhvr>
+                                    </p:animEffect>
+                                  </p:childTnLst>
+                                </p:cTn>
+                              </p:par>
+                              <p:par>
+                                <p:cTn id="16" presetID="10" presetClass="entr" presetSubtype="0" fill="hold" grpId="0" nodeType="withEffect">
+                                  <p:stCondLst>
+                                    <p:cond delay="0"/>
+                                  </p:stCondLst>
+                                  <p:childTnLst>
+                                    <p:set>
+                                      <p:cBhvr>
+                                        <p:cTn id="17" dur="1" fill="hold">
+                                          <p:stCondLst>
+                                            <p:cond delay="0"/>
+                                          </p:stCondLst>
+                                        </p:cTn>
+                                        <p:tgtEl>
+                                          <p:spTgt spid="11"/>
+                                        </p:tgtEl>
+                                        <p:attrNameLst>
+                                          <p:attrName>style.visibility</p:attrName>
+                                        </p:attrNameLst>
+                                      </p:cBhvr>
+                                      <p:to>
+                                        <p:strVal val="visible"/>
+                                      </p:to>
+                                    </p:set>
+                                    <p:animEffect transition="in" filter="fade">
+                                      <p:cBhvr>
+                                        <p:cTn id="18" dur="500"/>
+                                        <p:tgtEl>
+                                          <p:spTgt spid="11"/>
+                                        </p:tgtEl>
+                                      </p:cBhvr>
+                                    </p:animEffect>
+                                  </p:childTnLst>
+                                </p:cTn>
+                              </p:par>
+                            </p:childTnLst>
+                          </p:cTn>
+                        </p:par>
+                      </p:childTnLst>
+                    </p:cTn>
+                  </p:par>
+                  <p:par>
+                    <p:cTn id="19" fill="hold">
+                      <p:stCondLst>
+                        <p:cond delay="indefinite"/>
+                      </p:stCondLst>
+                      <p:childTnLst>
+                        <p:par>
+                          <p:cTn id="20" fill="hold">
+                            <p:stCondLst>
+                              <p:cond delay="0"/>
+                            </p:stCondLst>
+                            <p:childTnLst>
+                              <p:par>
+                                <p:cTn id="21" presetID="14" presetClass="entr" presetSubtype="10" fill="hold" nodeType="clickEffect">
+                                  <p:stCondLst>
+                                    <p:cond delay="0"/>
+                                  </p:stCondLst>
+                                  <p:childTnLst>
+                                    <p:set>
+                                      <p:cBhvr>
+                                        <p:cTn id="22" dur="1" fill="hold">
+                                          <p:stCondLst>
+                                            <p:cond delay="0"/>
+                                          </p:stCondLst>
+                                        </p:cTn>
+                                        <p:tgtEl>
+                                          <p:spTgt spid="17"/>
+                                        </p:tgtEl>
+                                        <p:attrNameLst>
+                                          <p:attrName>style.visibility</p:attrName>
+                                        </p:attrNameLst>
+                                      </p:cBhvr>
+                                      <p:to>
+                                        <p:strVal val="visible"/>
+                                      </p:to>
+                                    </p:set>
+                                    <p:animEffect transition="in" filter="randombar(horizontal)">
+                                      <p:cBhvr>
+                                        <p:cTn id="23" dur="500"/>
+                                        <p:tgtEl>
+                                          <p:spTgt spid="17"/>
+                                        </p:tgtEl>
+                                      </p:cBhvr>
+                                    </p:animEffect>
+                                  </p:childTnLst>
+                                </p:cTn>
+                              </p:par>
+                            </p:childTnLst>
+                          </p:cTn>
+                        </p:par>
+                      </p:childTnLst>
+                    </p:cTn>
+                  </p:par>
+                  <p:par>
+                    <p:cTn id="24" fill="hold">
+                      <p:stCondLst>
+                        <p:cond delay="indefinite"/>
+                      </p:stCondLst>
+                      <p:childTnLst>
+                        <p:par>
+                          <p:cTn id="25" fill="hold">
+                            <p:stCondLst>
+                              <p:cond delay="0"/>
+                            </p:stCondLst>
+                            <p:childTnLst>
+                              <p:par>
+                                <p:cTn id="26" presetID="3" presetClass="exit" presetSubtype="10" fill="hold" nodeType="clickEffect">
+                                  <p:stCondLst>
+                                    <p:cond delay="0"/>
+                                  </p:stCondLst>
+                                  <p:childTnLst>
+                                    <p:animEffect transition="out" filter="blinds(horizontal)">
+                                      <p:cBhvr>
+                                        <p:cTn id="27" dur="500"/>
+                                        <p:tgtEl>
+                                          <p:spTgt spid="17"/>
+                                        </p:tgtEl>
+                                      </p:cBhvr>
+                                    </p:animEffect>
+                                    <p:set>
+                                      <p:cBhvr>
+                                        <p:cTn id="28" dur="1" fill="hold">
+                                          <p:stCondLst>
+                                            <p:cond delay="499"/>
+                                          </p:stCondLst>
+                                        </p:cTn>
+                                        <p:tgtEl>
+                                          <p:spTgt spid="17"/>
+                                        </p:tgtEl>
+                                        <p:attrNameLst>
+                                          <p:attrName>style.visibility</p:attrName>
+                                        </p:attrNameLst>
+                                      </p:cBhvr>
+                                      <p:to>
+                                        <p:strVal val="hidden"/>
+                                      </p:to>
+                                    </p:set>
+                                  </p:childTnLst>
+                                </p:cTn>
+                              </p:par>
+                              <p:par>
+                                <p:cTn id="29" presetID="3" presetClass="entr" presetSubtype="10" fill="hold" nodeType="withEffect">
+                                  <p:stCondLst>
+                                    <p:cond delay="0"/>
+                                  </p:stCondLst>
+                                  <p:childTnLst>
+                                    <p:set>
+                                      <p:cBhvr>
+                                        <p:cTn id="30" dur="1" fill="hold">
+                                          <p:stCondLst>
+                                            <p:cond delay="0"/>
+                                          </p:stCondLst>
+                                        </p:cTn>
+                                        <p:tgtEl>
+                                          <p:spTgt spid="15"/>
+                                        </p:tgtEl>
+                                        <p:attrNameLst>
+                                          <p:attrName>style.visibility</p:attrName>
+                                        </p:attrNameLst>
+                                      </p:cBhvr>
+                                      <p:to>
+                                        <p:strVal val="visible"/>
+                                      </p:to>
+                                    </p:set>
+                                    <p:animEffect transition="in" filter="blinds(horizontal)">
+                                      <p:cBhvr>
+                                        <p:cTn id="31" dur="500"/>
+                                        <p:tgtEl>
+                                          <p:spTgt spid="15"/>
+                                        </p:tgtEl>
+                                      </p:cBhvr>
+                                    </p:animEffect>
+                                  </p:childTnLst>
+                                </p:cTn>
+                              </p:par>
+                            </p:childTnLst>
+                          </p:cTn>
+                        </p:par>
+                      </p:childTnLst>
+                    </p:cTn>
+                  </p:par>
+                </p:childTnLst>
+              </p:cTn>
+              <p:prevCondLst>
+                <p:cond evt="onPrev" delay="0">
+                  <p:tgtEl>
+                    <p:sldTgt/>
+                  </p:tgtEl>
+                </p:cond>
+              </p:prevCondLst>
+              <p:nextCondLst>
+                <p:cond evt="onNext" delay="0">
+                  <p:tgtEl>
+                    <p:sldTgt/>
+                  </p:tgtEl>
+                </p:cond>
+              </p:nextCondLst>
+            </p:seq>
+          </p:childTnLst>
+        </p:cTn>
+      </p:par>
+    </p:tnLst>
+    <p:bldLst>
+      <p:bldP spid="6" grpId="0" animBg="1"/>
+      <p:bldP spid="11" grpId="0" animBg="1"/>
+      <p:bldP spid="13" grpId="0"/>
+    </p:bldLst>
+  </p:timing>
+</p:sld>
+</file>
+
+<file path=ppt/slides/slide4.xml><?xml version="1.0" encoding="utf-8"?>
+<p:sld xmlns:a="http://schemas.openxmlformats.org/drawingml/2006/main" xmlns:r="http://schemas.openxmlformats.org/officeDocument/2006/relationships" xmlns:p="http://schemas.openxmlformats.org/presentationml/2006/main">
+  <p:cSld>
+    <p:spTree>
+      <p:nvGrpSpPr>
+        <p:cNvPr id="1" name="">
+          <a:extLst>
+            <a:ext uri="{FF2B5EF4-FFF2-40B4-BE49-F238E27FC236}">
               <a16:creationId xmlns:a16="http://schemas.microsoft.com/office/drawing/2014/main" id="{5A2B4C5C-D340-5529-2845-4D4234B78AC0}"/>
             </a:ext>
           </a:extLst>
@@ -5147,7 +6197,7 @@
             <a:fld id="{20B01981-BAC9-448B-9192-9C05FAA59408}" type="slidenum">
               <a:rPr lang="en-US" noProof="0" smtClean="0"/>
               <a:pPr/>
-              <a:t>3</a:t>
+              <a:t>4</a:t>
             </a:fld>
             <a:endParaRPr lang="en-US" noProof="0" dirty="0"/>
           </a:p>
@@ -6638,7 +7688,7 @@
 </p:sld>
 </file>
 
-<file path=ppt/slides/slide4.xml><?xml version="1.0" encoding="utf-8"?>
+<file path=ppt/slides/slide5.xml><?xml version="1.0" encoding="utf-8"?>
 <p:sld xmlns:a="http://schemas.openxmlformats.org/drawingml/2006/main" xmlns:r="http://schemas.openxmlformats.org/officeDocument/2006/relationships" xmlns:p="http://schemas.openxmlformats.org/presentationml/2006/main">
   <p:cSld>
     <p:spTree>
@@ -6784,7 +7834,7 @@
                 <a:latin typeface="+mj-lt"/>
               </a:rPr>
               <a:pPr/>
-              <a:t>4</a:t>
+              <a:t>5</a:t>
             </a:fld>
             <a:endParaRPr lang="en-US" sz="1200" b="1" noProof="0" dirty="0">
               <a:solidFill>

--- a/09_Post_Analysis/09_Post-analysis.pptx
+++ b/09_Post_Analysis/09_Post-analysis.pptx
@@ -5,17 +5,21 @@
     <p:sldMasterId id="2147483648" r:id="rId1"/>
   </p:sldMasterIdLst>
   <p:notesMasterIdLst>
-    <p:notesMasterId r:id="rId7"/>
+    <p:notesMasterId r:id="rId11"/>
   </p:notesMasterIdLst>
   <p:handoutMasterIdLst>
-    <p:handoutMasterId r:id="rId8"/>
+    <p:handoutMasterId r:id="rId12"/>
   </p:handoutMasterIdLst>
   <p:sldIdLst>
     <p:sldId id="281" r:id="rId2"/>
-    <p:sldId id="297" r:id="rId3"/>
-    <p:sldId id="299" r:id="rId4"/>
-    <p:sldId id="298" r:id="rId5"/>
-    <p:sldId id="266" r:id="rId6"/>
+    <p:sldId id="301" r:id="rId3"/>
+    <p:sldId id="297" r:id="rId4"/>
+    <p:sldId id="303" r:id="rId5"/>
+    <p:sldId id="302" r:id="rId6"/>
+    <p:sldId id="304" r:id="rId7"/>
+    <p:sldId id="299" r:id="rId8"/>
+    <p:sldId id="298" r:id="rId9"/>
+    <p:sldId id="266" r:id="rId10"/>
   </p:sldIdLst>
   <p:sldSz cx="12192000" cy="6858000"/>
   <p:notesSz cx="9144000" cy="6858000"/>
@@ -204,7 +208,7 @@
           <a:p>
             <a:fld id="{81BC11C0-8907-429F-A3F4-8C35EF8784CB}" type="slidenum">
               <a:rPr lang="hu-HU" smtClean="0"/>
-              <a:t>‹nº›</a:t>
+              <a:t>‹#›</a:t>
             </a:fld>
             <a:endParaRPr lang="hu-HU" dirty="0"/>
           </a:p>
@@ -541,7 +545,7 @@
           <a:p>
             <a:fld id="{B0186CAE-03F7-4637-AB83-737E9CC5D862}" type="slidenum">
               <a:rPr lang="hu-HU" smtClean="0"/>
-              <a:t>‹nº›</a:t>
+              <a:t>‹#›</a:t>
             </a:fld>
             <a:endParaRPr lang="hu-HU"/>
           </a:p>
@@ -651,6 +655,483 @@
 </p:notesMaster>
 </file>
 
+<file path=ppt/notesSlides/notesSlide1.xml><?xml version="1.0" encoding="utf-8"?>
+<p:notes xmlns:a="http://schemas.openxmlformats.org/drawingml/2006/main" xmlns:r="http://schemas.openxmlformats.org/officeDocument/2006/relationships" xmlns:p="http://schemas.openxmlformats.org/presentationml/2006/main">
+  <p:cSld>
+    <p:spTree>
+      <p:nvGrpSpPr>
+        <p:cNvPr id="1" name="">
+          <a:extLst>
+            <a:ext uri="{FF2B5EF4-FFF2-40B4-BE49-F238E27FC236}">
+              <a16:creationId xmlns:a16="http://schemas.microsoft.com/office/drawing/2014/main" id="{8FE44CA9-4163-4FB5-B101-0BC651011F8A}"/>
+            </a:ext>
+          </a:extLst>
+        </p:cNvPr>
+        <p:cNvGrpSpPr/>
+        <p:nvPr/>
+      </p:nvGrpSpPr>
+      <p:grpSpPr>
+        <a:xfrm>
+          <a:off x="0" y="0"/>
+          <a:ext cx="0" cy="0"/>
+          <a:chOff x="0" y="0"/>
+          <a:chExt cx="0" cy="0"/>
+        </a:xfrm>
+      </p:grpSpPr>
+      <p:sp>
+        <p:nvSpPr>
+          <p:cNvPr id="2" name="Slide Image Placeholder 1">
+            <a:extLst>
+              <a:ext uri="{FF2B5EF4-FFF2-40B4-BE49-F238E27FC236}">
+                <a16:creationId xmlns:a16="http://schemas.microsoft.com/office/drawing/2014/main" id="{02BF09AA-EF3A-481F-E9FE-DEBC7D03AD7C}"/>
+              </a:ext>
+            </a:extLst>
+          </p:cNvPr>
+          <p:cNvSpPr>
+            <a:spLocks noGrp="1" noRot="1" noChangeAspect="1"/>
+          </p:cNvSpPr>
+          <p:nvPr>
+            <p:ph type="sldImg"/>
+          </p:nvPr>
+        </p:nvSpPr>
+        <p:spPr/>
+      </p:sp>
+      <p:sp>
+        <p:nvSpPr>
+          <p:cNvPr id="3" name="Notes Placeholder 2">
+            <a:extLst>
+              <a:ext uri="{FF2B5EF4-FFF2-40B4-BE49-F238E27FC236}">
+                <a16:creationId xmlns:a16="http://schemas.microsoft.com/office/drawing/2014/main" id="{4D273653-9571-A951-F41B-184C85FF46C8}"/>
+              </a:ext>
+            </a:extLst>
+          </p:cNvPr>
+          <p:cNvSpPr>
+            <a:spLocks noGrp="1"/>
+          </p:cNvSpPr>
+          <p:nvPr>
+            <p:ph type="body" idx="1"/>
+          </p:nvPr>
+        </p:nvSpPr>
+        <p:spPr/>
+        <p:txBody>
+          <a:bodyPr/>
+          <a:lstStyle/>
+          <a:p>
+            <a:r>
+              <a:rPr lang="en-GB" dirty="0"/>
+              <a:t>You can say:</a:t>
+            </a:r>
+          </a:p>
+          <a:p>
+            <a:r>
+              <a:rPr lang="en-GB" dirty="0"/>
+              <a:t>Glucocorticoids are anti-inflammatory steroid hormones used to treat asthma. They work by entering airway smooth muscle cells and changing gene expression. Our RNA-</a:t>
+            </a:r>
+            <a:r>
+              <a:rPr lang="en-GB" dirty="0" err="1"/>
+              <a:t>seq</a:t>
+            </a:r>
+            <a:r>
+              <a:rPr lang="en-GB" dirty="0"/>
+              <a:t> analysis shows how dexamethasone reprograms these cells at the transcriptional level, inducing anti-inflammatory genes like CRISPLD2.</a:t>
+            </a:r>
+          </a:p>
+          <a:p>
+            <a:endParaRPr lang="en-GB" dirty="0"/>
+          </a:p>
+        </p:txBody>
+      </p:sp>
+    </p:spTree>
+    <p:extLst>
+      <p:ext uri="{BB962C8B-B14F-4D97-AF65-F5344CB8AC3E}">
+        <p14:creationId xmlns:p14="http://schemas.microsoft.com/office/powerpoint/2010/main" val="1673110580"/>
+      </p:ext>
+    </p:extLst>
+  </p:cSld>
+  <p:clrMapOvr>
+    <a:masterClrMapping/>
+  </p:clrMapOvr>
+</p:notes>
+</file>
+
+<file path=ppt/notesSlides/notesSlide2.xml><?xml version="1.0" encoding="utf-8"?>
+<p:notes xmlns:a="http://schemas.openxmlformats.org/drawingml/2006/main" xmlns:r="http://schemas.openxmlformats.org/officeDocument/2006/relationships" xmlns:p="http://schemas.openxmlformats.org/presentationml/2006/main">
+  <p:cSld>
+    <p:spTree>
+      <p:nvGrpSpPr>
+        <p:cNvPr id="1" name=""/>
+        <p:cNvGrpSpPr/>
+        <p:nvPr/>
+      </p:nvGrpSpPr>
+      <p:grpSpPr>
+        <a:xfrm>
+          <a:off x="0" y="0"/>
+          <a:ext cx="0" cy="0"/>
+          <a:chOff x="0" y="0"/>
+          <a:chExt cx="0" cy="0"/>
+        </a:xfrm>
+      </p:grpSpPr>
+      <p:sp>
+        <p:nvSpPr>
+          <p:cNvPr id="2" name="Slide Image Placeholder 1"/>
+          <p:cNvSpPr>
+            <a:spLocks noGrp="1" noRot="1" noChangeAspect="1"/>
+          </p:cNvSpPr>
+          <p:nvPr>
+            <p:ph type="sldImg"/>
+          </p:nvPr>
+        </p:nvSpPr>
+        <p:spPr/>
+      </p:sp>
+      <p:sp>
+        <p:nvSpPr>
+          <p:cNvPr id="3" name="Notes Placeholder 2"/>
+          <p:cNvSpPr>
+            <a:spLocks noGrp="1"/>
+          </p:cNvSpPr>
+          <p:nvPr>
+            <p:ph type="body" idx="1"/>
+          </p:nvPr>
+        </p:nvSpPr>
+        <p:spPr/>
+        <p:txBody>
+          <a:bodyPr/>
+          <a:lstStyle/>
+          <a:p>
+            <a:r>
+              <a:rPr lang="en-GB" dirty="0"/>
+              <a:t>You can say:</a:t>
+            </a:r>
+          </a:p>
+          <a:p>
+            <a:r>
+              <a:rPr lang="en-GB" dirty="0"/>
+              <a:t>Glucocorticoids are anti-inflammatory steroid hormones used to treat asthma. They work by entering airway smooth muscle cells and changing gene expression. Our RNA-</a:t>
+            </a:r>
+            <a:r>
+              <a:rPr lang="en-GB" dirty="0" err="1"/>
+              <a:t>seq</a:t>
+            </a:r>
+            <a:r>
+              <a:rPr lang="en-GB" dirty="0"/>
+              <a:t> analysis shows how dexamethasone reprograms these cells at the transcriptional level, inducing anti-inflammatory genes like CRISPLD2.</a:t>
+            </a:r>
+          </a:p>
+          <a:p>
+            <a:endParaRPr lang="en-GB" dirty="0"/>
+          </a:p>
+        </p:txBody>
+      </p:sp>
+    </p:spTree>
+    <p:extLst>
+      <p:ext uri="{BB962C8B-B14F-4D97-AF65-F5344CB8AC3E}">
+        <p14:creationId xmlns:p14="http://schemas.microsoft.com/office/powerpoint/2010/main" val="2586816270"/>
+      </p:ext>
+    </p:extLst>
+  </p:cSld>
+  <p:clrMapOvr>
+    <a:masterClrMapping/>
+  </p:clrMapOvr>
+</p:notes>
+</file>
+
+<file path=ppt/notesSlides/notesSlide3.xml><?xml version="1.0" encoding="utf-8"?>
+<p:notes xmlns:a="http://schemas.openxmlformats.org/drawingml/2006/main" xmlns:r="http://schemas.openxmlformats.org/officeDocument/2006/relationships" xmlns:p="http://schemas.openxmlformats.org/presentationml/2006/main">
+  <p:cSld>
+    <p:spTree>
+      <p:nvGrpSpPr>
+        <p:cNvPr id="1" name="">
+          <a:extLst>
+            <a:ext uri="{FF2B5EF4-FFF2-40B4-BE49-F238E27FC236}">
+              <a16:creationId xmlns:a16="http://schemas.microsoft.com/office/drawing/2014/main" id="{16B1BB26-E870-6E69-030A-A56A3C246879}"/>
+            </a:ext>
+          </a:extLst>
+        </p:cNvPr>
+        <p:cNvGrpSpPr/>
+        <p:nvPr/>
+      </p:nvGrpSpPr>
+      <p:grpSpPr>
+        <a:xfrm>
+          <a:off x="0" y="0"/>
+          <a:ext cx="0" cy="0"/>
+          <a:chOff x="0" y="0"/>
+          <a:chExt cx="0" cy="0"/>
+        </a:xfrm>
+      </p:grpSpPr>
+      <p:sp>
+        <p:nvSpPr>
+          <p:cNvPr id="2" name="Slide Image Placeholder 1">
+            <a:extLst>
+              <a:ext uri="{FF2B5EF4-FFF2-40B4-BE49-F238E27FC236}">
+                <a16:creationId xmlns:a16="http://schemas.microsoft.com/office/drawing/2014/main" id="{6418650C-A354-1168-71B2-DC6012617AB5}"/>
+              </a:ext>
+            </a:extLst>
+          </p:cNvPr>
+          <p:cNvSpPr>
+            <a:spLocks noGrp="1" noRot="1" noChangeAspect="1"/>
+          </p:cNvSpPr>
+          <p:nvPr>
+            <p:ph type="sldImg"/>
+          </p:nvPr>
+        </p:nvSpPr>
+        <p:spPr/>
+      </p:sp>
+      <p:sp>
+        <p:nvSpPr>
+          <p:cNvPr id="3" name="Notes Placeholder 2">
+            <a:extLst>
+              <a:ext uri="{FF2B5EF4-FFF2-40B4-BE49-F238E27FC236}">
+                <a16:creationId xmlns:a16="http://schemas.microsoft.com/office/drawing/2014/main" id="{1C694F88-84A3-E9AC-F6E3-8262F6D7377D}"/>
+              </a:ext>
+            </a:extLst>
+          </p:cNvPr>
+          <p:cNvSpPr>
+            <a:spLocks noGrp="1"/>
+          </p:cNvSpPr>
+          <p:nvPr>
+            <p:ph type="body" idx="1"/>
+          </p:nvPr>
+        </p:nvSpPr>
+        <p:spPr/>
+        <p:txBody>
+          <a:bodyPr/>
+          <a:lstStyle/>
+          <a:p>
+            <a:r>
+              <a:rPr lang="en-GB" dirty="0"/>
+              <a:t>You can say:</a:t>
+            </a:r>
+          </a:p>
+          <a:p>
+            <a:r>
+              <a:rPr lang="en-GB" dirty="0"/>
+              <a:t>Glucocorticoids are anti-inflammatory steroid hormones used to treat asthma. They work by entering airway smooth muscle cells and changing gene expression. Our RNA-</a:t>
+            </a:r>
+            <a:r>
+              <a:rPr lang="en-GB" dirty="0" err="1"/>
+              <a:t>seq</a:t>
+            </a:r>
+            <a:r>
+              <a:rPr lang="en-GB" dirty="0"/>
+              <a:t> analysis shows how dexamethasone reprograms these cells at the transcriptional level, inducing anti-inflammatory genes like CRISPLD2.</a:t>
+            </a:r>
+          </a:p>
+          <a:p>
+            <a:endParaRPr lang="en-GB" dirty="0"/>
+          </a:p>
+        </p:txBody>
+      </p:sp>
+    </p:spTree>
+    <p:extLst>
+      <p:ext uri="{BB962C8B-B14F-4D97-AF65-F5344CB8AC3E}">
+        <p14:creationId xmlns:p14="http://schemas.microsoft.com/office/powerpoint/2010/main" val="766758425"/>
+      </p:ext>
+    </p:extLst>
+  </p:cSld>
+  <p:clrMapOvr>
+    <a:masterClrMapping/>
+  </p:clrMapOvr>
+</p:notes>
+</file>
+
+<file path=ppt/notesSlides/notesSlide4.xml><?xml version="1.0" encoding="utf-8"?>
+<p:notes xmlns:a="http://schemas.openxmlformats.org/drawingml/2006/main" xmlns:r="http://schemas.openxmlformats.org/officeDocument/2006/relationships" xmlns:p="http://schemas.openxmlformats.org/presentationml/2006/main">
+  <p:cSld>
+    <p:spTree>
+      <p:nvGrpSpPr>
+        <p:cNvPr id="1" name="">
+          <a:extLst>
+            <a:ext uri="{FF2B5EF4-FFF2-40B4-BE49-F238E27FC236}">
+              <a16:creationId xmlns:a16="http://schemas.microsoft.com/office/drawing/2014/main" id="{78B195B5-77E9-2F2C-79D9-6913A022974F}"/>
+            </a:ext>
+          </a:extLst>
+        </p:cNvPr>
+        <p:cNvGrpSpPr/>
+        <p:nvPr/>
+      </p:nvGrpSpPr>
+      <p:grpSpPr>
+        <a:xfrm>
+          <a:off x="0" y="0"/>
+          <a:ext cx="0" cy="0"/>
+          <a:chOff x="0" y="0"/>
+          <a:chExt cx="0" cy="0"/>
+        </a:xfrm>
+      </p:grpSpPr>
+      <p:sp>
+        <p:nvSpPr>
+          <p:cNvPr id="2" name="Slide Image Placeholder 1">
+            <a:extLst>
+              <a:ext uri="{FF2B5EF4-FFF2-40B4-BE49-F238E27FC236}">
+                <a16:creationId xmlns:a16="http://schemas.microsoft.com/office/drawing/2014/main" id="{57A541A5-666F-0FB9-2E42-E41376845176}"/>
+              </a:ext>
+            </a:extLst>
+          </p:cNvPr>
+          <p:cNvSpPr>
+            <a:spLocks noGrp="1" noRot="1" noChangeAspect="1"/>
+          </p:cNvSpPr>
+          <p:nvPr>
+            <p:ph type="sldImg"/>
+          </p:nvPr>
+        </p:nvSpPr>
+        <p:spPr/>
+      </p:sp>
+      <p:sp>
+        <p:nvSpPr>
+          <p:cNvPr id="3" name="Notes Placeholder 2">
+            <a:extLst>
+              <a:ext uri="{FF2B5EF4-FFF2-40B4-BE49-F238E27FC236}">
+                <a16:creationId xmlns:a16="http://schemas.microsoft.com/office/drawing/2014/main" id="{3774177D-B856-5C5F-578C-DF200552855C}"/>
+              </a:ext>
+            </a:extLst>
+          </p:cNvPr>
+          <p:cNvSpPr>
+            <a:spLocks noGrp="1"/>
+          </p:cNvSpPr>
+          <p:nvPr>
+            <p:ph type="body" idx="1"/>
+          </p:nvPr>
+        </p:nvSpPr>
+        <p:spPr/>
+        <p:txBody>
+          <a:bodyPr/>
+          <a:lstStyle/>
+          <a:p>
+            <a:r>
+              <a:rPr lang="en-GB" dirty="0"/>
+              <a:t>You can say:</a:t>
+            </a:r>
+          </a:p>
+          <a:p>
+            <a:r>
+              <a:rPr lang="en-GB" dirty="0"/>
+              <a:t>Glucocorticoids are anti-inflammatory steroid hormones used to treat asthma. They work by entering airway smooth muscle cells and changing gene expression. Our RNA-</a:t>
+            </a:r>
+            <a:r>
+              <a:rPr lang="en-GB" dirty="0" err="1"/>
+              <a:t>seq</a:t>
+            </a:r>
+            <a:r>
+              <a:rPr lang="en-GB" dirty="0"/>
+              <a:t> analysis shows how dexamethasone reprograms these cells at the transcriptional level, inducing anti-inflammatory genes like CRISPLD2.</a:t>
+            </a:r>
+          </a:p>
+          <a:p>
+            <a:endParaRPr lang="en-GB" dirty="0"/>
+          </a:p>
+        </p:txBody>
+      </p:sp>
+    </p:spTree>
+    <p:extLst>
+      <p:ext uri="{BB962C8B-B14F-4D97-AF65-F5344CB8AC3E}">
+        <p14:creationId xmlns:p14="http://schemas.microsoft.com/office/powerpoint/2010/main" val="3104978627"/>
+      </p:ext>
+    </p:extLst>
+  </p:cSld>
+  <p:clrMapOvr>
+    <a:masterClrMapping/>
+  </p:clrMapOvr>
+</p:notes>
+</file>
+
+<file path=ppt/notesSlides/notesSlide5.xml><?xml version="1.0" encoding="utf-8"?>
+<p:notes xmlns:a="http://schemas.openxmlformats.org/drawingml/2006/main" xmlns:r="http://schemas.openxmlformats.org/officeDocument/2006/relationships" xmlns:p="http://schemas.openxmlformats.org/presentationml/2006/main">
+  <p:cSld>
+    <p:spTree>
+      <p:nvGrpSpPr>
+        <p:cNvPr id="1" name="">
+          <a:extLst>
+            <a:ext uri="{FF2B5EF4-FFF2-40B4-BE49-F238E27FC236}">
+              <a16:creationId xmlns:a16="http://schemas.microsoft.com/office/drawing/2014/main" id="{65D95116-1A0F-99EE-BFEB-7997C058FF50}"/>
+            </a:ext>
+          </a:extLst>
+        </p:cNvPr>
+        <p:cNvGrpSpPr/>
+        <p:nvPr/>
+      </p:nvGrpSpPr>
+      <p:grpSpPr>
+        <a:xfrm>
+          <a:off x="0" y="0"/>
+          <a:ext cx="0" cy="0"/>
+          <a:chOff x="0" y="0"/>
+          <a:chExt cx="0" cy="0"/>
+        </a:xfrm>
+      </p:grpSpPr>
+      <p:sp>
+        <p:nvSpPr>
+          <p:cNvPr id="2" name="Slide Image Placeholder 1">
+            <a:extLst>
+              <a:ext uri="{FF2B5EF4-FFF2-40B4-BE49-F238E27FC236}">
+                <a16:creationId xmlns:a16="http://schemas.microsoft.com/office/drawing/2014/main" id="{5A0A9BC1-165F-B113-93F9-2AD73F71D01D}"/>
+              </a:ext>
+            </a:extLst>
+          </p:cNvPr>
+          <p:cNvSpPr>
+            <a:spLocks noGrp="1" noRot="1" noChangeAspect="1"/>
+          </p:cNvSpPr>
+          <p:nvPr>
+            <p:ph type="sldImg"/>
+          </p:nvPr>
+        </p:nvSpPr>
+        <p:spPr/>
+      </p:sp>
+      <p:sp>
+        <p:nvSpPr>
+          <p:cNvPr id="3" name="Notes Placeholder 2">
+            <a:extLst>
+              <a:ext uri="{FF2B5EF4-FFF2-40B4-BE49-F238E27FC236}">
+                <a16:creationId xmlns:a16="http://schemas.microsoft.com/office/drawing/2014/main" id="{62E33EA8-5F7F-E3BC-C4D4-BAD0938E44E8}"/>
+              </a:ext>
+            </a:extLst>
+          </p:cNvPr>
+          <p:cNvSpPr>
+            <a:spLocks noGrp="1"/>
+          </p:cNvSpPr>
+          <p:nvPr>
+            <p:ph type="body" idx="1"/>
+          </p:nvPr>
+        </p:nvSpPr>
+        <p:spPr/>
+        <p:txBody>
+          <a:bodyPr/>
+          <a:lstStyle/>
+          <a:p>
+            <a:r>
+              <a:rPr lang="en-GB" dirty="0"/>
+              <a:t>You can say:</a:t>
+            </a:r>
+          </a:p>
+          <a:p>
+            <a:r>
+              <a:rPr lang="en-GB" dirty="0"/>
+              <a:t>Glucocorticoids are anti-inflammatory steroid hormones used to treat asthma. They work by entering airway smooth muscle cells and changing gene expression. Our RNA-</a:t>
+            </a:r>
+            <a:r>
+              <a:rPr lang="en-GB" dirty="0" err="1"/>
+              <a:t>seq</a:t>
+            </a:r>
+            <a:r>
+              <a:rPr lang="en-GB" dirty="0"/>
+              <a:t> analysis shows how dexamethasone reprograms these cells at the transcriptional level, inducing anti-inflammatory genes like CRISPLD2.</a:t>
+            </a:r>
+          </a:p>
+          <a:p>
+            <a:endParaRPr lang="en-GB" dirty="0"/>
+          </a:p>
+        </p:txBody>
+      </p:sp>
+    </p:spTree>
+    <p:extLst>
+      <p:ext uri="{BB962C8B-B14F-4D97-AF65-F5344CB8AC3E}">
+        <p14:creationId xmlns:p14="http://schemas.microsoft.com/office/powerpoint/2010/main" val="2281875169"/>
+      </p:ext>
+    </p:extLst>
+  </p:cSld>
+  <p:clrMapOvr>
+    <a:masterClrMapping/>
+  </p:clrMapOvr>
+</p:notes>
+</file>
+
 <file path=ppt/slideLayouts/slideLayout1.xml><?xml version="1.0" encoding="utf-8"?>
 <p:sldLayout xmlns:a="http://schemas.openxmlformats.org/drawingml/2006/main" xmlns:r="http://schemas.openxmlformats.org/officeDocument/2006/relationships" xmlns:p="http://schemas.openxmlformats.org/presentationml/2006/main" preserve="1" userDrawn="1">
   <p:cSld name="01_COVER">
@@ -1185,7 +1666,7 @@
           <a:lstStyle/>
           <a:p>
             <a:fld id="{86CB4B4D-7CA3-9044-876B-883B54F8677D}" type="slidenum">
-              <a:t>‹nº›</a:t>
+              <a:t>‹#›</a:t>
             </a:fld>
             <a:endParaRPr/>
           </a:p>
@@ -1666,7 +2147,7 @@
             <a:fld id="{20B01981-BAC9-448B-9192-9C05FAA59408}" type="slidenum">
               <a:rPr lang="hu-HU" smtClean="0"/>
               <a:pPr/>
-              <a:t>‹nº›</a:t>
+              <a:t>‹#›</a:t>
             </a:fld>
             <a:endParaRPr lang="hu-HU" dirty="0"/>
           </a:p>
@@ -1991,7 +2472,7 @@
             <a:fld id="{20B01981-BAC9-448B-9192-9C05FAA59408}" type="slidenum">
               <a:rPr lang="hu-HU" smtClean="0"/>
               <a:pPr/>
-              <a:t>‹nº›</a:t>
+              <a:t>‹#›</a:t>
             </a:fld>
             <a:endParaRPr lang="hu-HU" dirty="0"/>
           </a:p>
@@ -2534,7 +3015,7 @@
             <a:fld id="{20B01981-BAC9-448B-9192-9C05FAA59408}" type="slidenum">
               <a:rPr lang="hu-HU" smtClean="0"/>
               <a:pPr/>
-              <a:t>‹nº›</a:t>
+              <a:t>‹#›</a:t>
             </a:fld>
             <a:endParaRPr lang="hu-HU" dirty="0"/>
           </a:p>
@@ -2845,7 +3326,7 @@
             <a:fld id="{20B01981-BAC9-448B-9192-9C05FAA59408}" type="slidenum">
               <a:rPr lang="hu-HU" smtClean="0"/>
               <a:pPr/>
-              <a:t>‹nº›</a:t>
+              <a:t>‹#›</a:t>
             </a:fld>
             <a:endParaRPr lang="hu-HU" dirty="0"/>
           </a:p>
@@ -3188,7 +3669,7 @@
             <a:fld id="{20B01981-BAC9-448B-9192-9C05FAA59408}" type="slidenum">
               <a:rPr lang="hu-HU" smtClean="0"/>
               <a:pPr/>
-              <a:t>‹nº›</a:t>
+              <a:t>‹#›</a:t>
             </a:fld>
             <a:endParaRPr lang="hu-HU" dirty="0"/>
           </a:p>
@@ -3415,7 +3896,7 @@
             <a:fld id="{20B01981-BAC9-448B-9192-9C05FAA59408}" type="slidenum">
               <a:rPr lang="hu-HU" smtClean="0"/>
               <a:pPr/>
-              <a:t>‹nº›</a:t>
+              <a:t>‹#›</a:t>
             </a:fld>
             <a:endParaRPr lang="hu-HU" dirty="0"/>
           </a:p>
@@ -3645,7 +4126,7 @@
             <a:fld id="{20B01981-BAC9-448B-9192-9C05FAA59408}" type="slidenum">
               <a:rPr lang="hu-HU" smtClean="0"/>
               <a:pPr/>
-              <a:t>‹nº›</a:t>
+              <a:t>‹#›</a:t>
             </a:fld>
             <a:endParaRPr lang="hu-HU" dirty="0"/>
           </a:p>
@@ -3824,7 +4305,7 @@
             <a:fld id="{20B01981-BAC9-448B-9192-9C05FAA59408}" type="slidenum">
               <a:rPr lang="hu-HU" smtClean="0"/>
               <a:pPr/>
-              <a:t>‹nº›</a:t>
+              <a:t>‹#›</a:t>
             </a:fld>
             <a:endParaRPr lang="hu-HU" dirty="0"/>
           </a:p>
@@ -4062,7 +4543,7 @@
             <a:fld id="{20B01981-BAC9-448B-9192-9C05FAA59408}" type="slidenum">
               <a:rPr lang="hu-HU" smtClean="0"/>
               <a:pPr/>
-              <a:t>‹nº›</a:t>
+              <a:t>‹#›</a:t>
             </a:fld>
             <a:endParaRPr lang="hu-HU" dirty="0"/>
           </a:p>
@@ -4567,6 +5048,915 @@
   <p:cSld>
     <p:spTree>
       <p:nvGrpSpPr>
+        <p:cNvPr id="1" name="">
+          <a:extLst>
+            <a:ext uri="{FF2B5EF4-FFF2-40B4-BE49-F238E27FC236}">
+              <a16:creationId xmlns:a16="http://schemas.microsoft.com/office/drawing/2014/main" id="{BBA0DD87-614E-FCF1-B309-6DD912B5DEA3}"/>
+            </a:ext>
+          </a:extLst>
+        </p:cNvPr>
+        <p:cNvGrpSpPr/>
+        <p:nvPr/>
+      </p:nvGrpSpPr>
+      <p:grpSpPr>
+        <a:xfrm>
+          <a:off x="0" y="0"/>
+          <a:ext cx="0" cy="0"/>
+          <a:chOff x="0" y="0"/>
+          <a:chExt cx="0" cy="0"/>
+        </a:xfrm>
+      </p:grpSpPr>
+      <p:sp>
+        <p:nvSpPr>
+          <p:cNvPr id="4" name="Marcador de Posição do Número do Diapositivo 3">
+            <a:extLst>
+              <a:ext uri="{FF2B5EF4-FFF2-40B4-BE49-F238E27FC236}">
+                <a16:creationId xmlns:a16="http://schemas.microsoft.com/office/drawing/2014/main" id="{52CBF77E-85AA-EE81-85C5-0462E0C60D32}"/>
+              </a:ext>
+            </a:extLst>
+          </p:cNvPr>
+          <p:cNvSpPr>
+            <a:spLocks noGrp="1"/>
+          </p:cNvSpPr>
+          <p:nvPr>
+            <p:ph type="sldNum" sz="quarter" idx="11"/>
+          </p:nvPr>
+        </p:nvSpPr>
+        <p:spPr/>
+        <p:txBody>
+          <a:bodyPr/>
+          <a:lstStyle/>
+          <a:p>
+            <a:fld id="{20B01981-BAC9-448B-9192-9C05FAA59408}" type="slidenum">
+              <a:rPr lang="en-US" noProof="0" smtClean="0"/>
+              <a:pPr/>
+              <a:t>2</a:t>
+            </a:fld>
+            <a:endParaRPr lang="en-US" noProof="0" dirty="0"/>
+          </a:p>
+        </p:txBody>
+      </p:sp>
+      <p:sp>
+        <p:nvSpPr>
+          <p:cNvPr id="7" name="Google Shape;129;p24">
+            <a:extLst>
+              <a:ext uri="{FF2B5EF4-FFF2-40B4-BE49-F238E27FC236}">
+                <a16:creationId xmlns:a16="http://schemas.microsoft.com/office/drawing/2014/main" id="{63C2912F-85D9-B51B-216E-30D38899C479}"/>
+              </a:ext>
+            </a:extLst>
+          </p:cNvPr>
+          <p:cNvSpPr txBox="1">
+            <a:spLocks/>
+          </p:cNvSpPr>
+          <p:nvPr/>
+        </p:nvSpPr>
+        <p:spPr>
+          <a:xfrm>
+            <a:off x="243484" y="287140"/>
+            <a:ext cx="10841459" cy="954888"/>
+          </a:xfrm>
+          <a:prstGeom prst="rect">
+            <a:avLst/>
+          </a:prstGeom>
+          <a:noFill/>
+          <a:ln>
+            <a:noFill/>
+          </a:ln>
+        </p:spPr>
+        <p:txBody>
+          <a:bodyPr spcFirstLastPara="1" vert="horz" wrap="square" lIns="91433" tIns="45700" rIns="91433" bIns="45700" rtlCol="0" anchor="t" anchorCtr="0">
+            <a:normAutofit fontScale="92500" lnSpcReduction="10000"/>
+          </a:bodyPr>
+          <a:lstStyle>
+            <a:lvl1pPr marL="228600" indent="-228600" algn="l" defTabSz="914400" rtl="0" eaLnBrk="1" latinLnBrk="0" hangingPunct="1">
+              <a:lnSpc>
+                <a:spcPct val="90000"/>
+              </a:lnSpc>
+              <a:spcBef>
+                <a:spcPts val="1000"/>
+              </a:spcBef>
+              <a:buFont typeface="Arial" panose="020B0604020202020204" pitchFamily="34" charset="0"/>
+              <a:buChar char="•"/>
+              <a:defRPr sz="2800" kern="1200">
+                <a:solidFill>
+                  <a:schemeClr val="tx1"/>
+                </a:solidFill>
+                <a:latin typeface="+mn-lt"/>
+                <a:ea typeface="+mn-ea"/>
+                <a:cs typeface="+mn-cs"/>
+              </a:defRPr>
+            </a:lvl1pPr>
+            <a:lvl2pPr marL="685800" indent="-228600" algn="l" defTabSz="914400" rtl="0" eaLnBrk="1" latinLnBrk="0" hangingPunct="1">
+              <a:lnSpc>
+                <a:spcPct val="90000"/>
+              </a:lnSpc>
+              <a:spcBef>
+                <a:spcPts val="500"/>
+              </a:spcBef>
+              <a:buFont typeface="Arial" panose="020B0604020202020204" pitchFamily="34" charset="0"/>
+              <a:buChar char="•"/>
+              <a:defRPr sz="2400" kern="1200">
+                <a:solidFill>
+                  <a:schemeClr val="tx1"/>
+                </a:solidFill>
+                <a:latin typeface="+mn-lt"/>
+                <a:ea typeface="+mn-ea"/>
+                <a:cs typeface="+mn-cs"/>
+              </a:defRPr>
+            </a:lvl2pPr>
+            <a:lvl3pPr marL="1143000" indent="-228600" algn="l" defTabSz="914400" rtl="0" eaLnBrk="1" latinLnBrk="0" hangingPunct="1">
+              <a:lnSpc>
+                <a:spcPct val="90000"/>
+              </a:lnSpc>
+              <a:spcBef>
+                <a:spcPts val="500"/>
+              </a:spcBef>
+              <a:buFont typeface="Arial" panose="020B0604020202020204" pitchFamily="34" charset="0"/>
+              <a:buChar char="•"/>
+              <a:defRPr sz="2000" kern="1200">
+                <a:solidFill>
+                  <a:schemeClr val="tx1"/>
+                </a:solidFill>
+                <a:latin typeface="+mn-lt"/>
+                <a:ea typeface="+mn-ea"/>
+                <a:cs typeface="+mn-cs"/>
+              </a:defRPr>
+            </a:lvl3pPr>
+            <a:lvl4pPr marL="1600200" indent="-228600" algn="l" defTabSz="914400" rtl="0" eaLnBrk="1" latinLnBrk="0" hangingPunct="1">
+              <a:lnSpc>
+                <a:spcPct val="90000"/>
+              </a:lnSpc>
+              <a:spcBef>
+                <a:spcPts val="500"/>
+              </a:spcBef>
+              <a:buFont typeface="Arial" panose="020B0604020202020204" pitchFamily="34" charset="0"/>
+              <a:buChar char="•"/>
+              <a:defRPr sz="1800" kern="1200">
+                <a:solidFill>
+                  <a:schemeClr val="tx1"/>
+                </a:solidFill>
+                <a:latin typeface="+mn-lt"/>
+                <a:ea typeface="+mn-ea"/>
+                <a:cs typeface="+mn-cs"/>
+              </a:defRPr>
+            </a:lvl4pPr>
+            <a:lvl5pPr marL="2057400" indent="-228600" algn="l" defTabSz="914400" rtl="0" eaLnBrk="1" latinLnBrk="0" hangingPunct="1">
+              <a:lnSpc>
+                <a:spcPct val="90000"/>
+              </a:lnSpc>
+              <a:spcBef>
+                <a:spcPts val="500"/>
+              </a:spcBef>
+              <a:buFont typeface="Arial" panose="020B0604020202020204" pitchFamily="34" charset="0"/>
+              <a:buChar char="•"/>
+              <a:defRPr sz="1800" kern="1200">
+                <a:solidFill>
+                  <a:schemeClr val="tx1"/>
+                </a:solidFill>
+                <a:latin typeface="+mn-lt"/>
+                <a:ea typeface="+mn-ea"/>
+                <a:cs typeface="+mn-cs"/>
+              </a:defRPr>
+            </a:lvl5pPr>
+            <a:lvl6pPr marL="2514600" indent="-228600" algn="l" defTabSz="914400" rtl="0" eaLnBrk="1" latinLnBrk="0" hangingPunct="1">
+              <a:lnSpc>
+                <a:spcPct val="90000"/>
+              </a:lnSpc>
+              <a:spcBef>
+                <a:spcPts val="500"/>
+              </a:spcBef>
+              <a:buFont typeface="Arial" panose="020B0604020202020204" pitchFamily="34" charset="0"/>
+              <a:buChar char="•"/>
+              <a:defRPr sz="1800" kern="1200">
+                <a:solidFill>
+                  <a:schemeClr val="tx1"/>
+                </a:solidFill>
+                <a:latin typeface="+mn-lt"/>
+                <a:ea typeface="+mn-ea"/>
+                <a:cs typeface="+mn-cs"/>
+              </a:defRPr>
+            </a:lvl6pPr>
+            <a:lvl7pPr marL="2971800" indent="-228600" algn="l" defTabSz="914400" rtl="0" eaLnBrk="1" latinLnBrk="0" hangingPunct="1">
+              <a:lnSpc>
+                <a:spcPct val="90000"/>
+              </a:lnSpc>
+              <a:spcBef>
+                <a:spcPts val="500"/>
+              </a:spcBef>
+              <a:buFont typeface="Arial" panose="020B0604020202020204" pitchFamily="34" charset="0"/>
+              <a:buChar char="•"/>
+              <a:defRPr sz="1800" kern="1200">
+                <a:solidFill>
+                  <a:schemeClr val="tx1"/>
+                </a:solidFill>
+                <a:latin typeface="+mn-lt"/>
+                <a:ea typeface="+mn-ea"/>
+                <a:cs typeface="+mn-cs"/>
+              </a:defRPr>
+            </a:lvl7pPr>
+            <a:lvl8pPr marL="3429000" indent="-228600" algn="l" defTabSz="914400" rtl="0" eaLnBrk="1" latinLnBrk="0" hangingPunct="1">
+              <a:lnSpc>
+                <a:spcPct val="90000"/>
+              </a:lnSpc>
+              <a:spcBef>
+                <a:spcPts val="500"/>
+              </a:spcBef>
+              <a:buFont typeface="Arial" panose="020B0604020202020204" pitchFamily="34" charset="0"/>
+              <a:buChar char="•"/>
+              <a:defRPr sz="1800" kern="1200">
+                <a:solidFill>
+                  <a:schemeClr val="tx1"/>
+                </a:solidFill>
+                <a:latin typeface="+mn-lt"/>
+                <a:ea typeface="+mn-ea"/>
+                <a:cs typeface="+mn-cs"/>
+              </a:defRPr>
+            </a:lvl8pPr>
+            <a:lvl9pPr marL="3886200" indent="-228600" algn="l" defTabSz="914400" rtl="0" eaLnBrk="1" latinLnBrk="0" hangingPunct="1">
+              <a:lnSpc>
+                <a:spcPct val="90000"/>
+              </a:lnSpc>
+              <a:spcBef>
+                <a:spcPts val="500"/>
+              </a:spcBef>
+              <a:buFont typeface="Arial" panose="020B0604020202020204" pitchFamily="34" charset="0"/>
+              <a:buChar char="•"/>
+              <a:defRPr sz="1800" kern="1200">
+                <a:solidFill>
+                  <a:schemeClr val="tx1"/>
+                </a:solidFill>
+                <a:latin typeface="+mn-lt"/>
+                <a:ea typeface="+mn-ea"/>
+                <a:cs typeface="+mn-cs"/>
+              </a:defRPr>
+            </a:lvl9pPr>
+          </a:lstStyle>
+          <a:p>
+            <a:pPr marL="0" marR="0" lvl="0" indent="0" algn="l" defTabSz="914400" rtl="0" eaLnBrk="1" fontAlgn="auto" latinLnBrk="0" hangingPunct="1">
+              <a:lnSpc>
+                <a:spcPct val="90000"/>
+              </a:lnSpc>
+              <a:spcBef>
+                <a:spcPts val="0"/>
+              </a:spcBef>
+              <a:spcAft>
+                <a:spcPts val="0"/>
+              </a:spcAft>
+              <a:buClr>
+                <a:srgbClr val="00AAF0"/>
+              </a:buClr>
+              <a:buSzPts val="1800"/>
+              <a:buFont typeface="Arial" panose="020B0604020202020204" pitchFamily="34" charset="0"/>
+              <a:buNone/>
+              <a:tabLst/>
+              <a:defRPr/>
+            </a:pPr>
+            <a:r>
+              <a:rPr kumimoji="0" lang="en-GB" sz="2400" b="1" i="0" u="none" strike="noStrike" kern="1200" cap="none" spc="0" normalizeH="0" baseline="0" noProof="0" dirty="0">
+                <a:ln>
+                  <a:noFill/>
+                </a:ln>
+                <a:solidFill>
+                  <a:srgbClr val="00AAF0"/>
+                </a:solidFill>
+                <a:effectLst/>
+                <a:uLnTx/>
+                <a:uFillTx/>
+                <a:latin typeface="Verdana"/>
+                <a:ea typeface="Verdana"/>
+                <a:sym typeface="Verdana"/>
+              </a:rPr>
+              <a:t>Global Differential Expression</a:t>
+            </a:r>
+            <a:r>
+              <a:rPr kumimoji="0" lang="hu-HU" sz="2400" b="1" i="0" u="none" strike="noStrike" kern="1200" cap="none" spc="0" normalizeH="0" baseline="0" noProof="0" dirty="0">
+                <a:ln>
+                  <a:noFill/>
+                </a:ln>
+                <a:solidFill>
+                  <a:srgbClr val="00AAF0"/>
+                </a:solidFill>
+                <a:effectLst/>
+                <a:uLnTx/>
+                <a:uFillTx/>
+                <a:latin typeface="Verdana"/>
+                <a:ea typeface="Verdana"/>
+                <a:sym typeface="Verdana"/>
+              </a:rPr>
+              <a:t> (DE)</a:t>
+            </a:r>
+            <a:r>
+              <a:rPr kumimoji="0" lang="en-GB" sz="2400" b="1" i="0" u="none" strike="noStrike" kern="1200" cap="none" spc="0" normalizeH="0" baseline="0" noProof="0" dirty="0">
+                <a:ln>
+                  <a:noFill/>
+                </a:ln>
+                <a:solidFill>
+                  <a:srgbClr val="00AAF0"/>
+                </a:solidFill>
+                <a:effectLst/>
+                <a:uLnTx/>
+                <a:uFillTx/>
+                <a:latin typeface="Verdana"/>
+                <a:ea typeface="Verdana"/>
+                <a:sym typeface="Verdana"/>
+              </a:rPr>
+              <a:t> Response to Dexamethasone</a:t>
+            </a:r>
+            <a:endParaRPr kumimoji="0" lang="hu-HU" sz="2400" b="1" i="0" u="none" strike="noStrike" kern="1200" cap="none" spc="0" normalizeH="0" baseline="0" noProof="0" dirty="0">
+              <a:ln>
+                <a:noFill/>
+              </a:ln>
+              <a:solidFill>
+                <a:srgbClr val="00AAF0"/>
+              </a:solidFill>
+              <a:effectLst/>
+              <a:uLnTx/>
+              <a:uFillTx/>
+              <a:latin typeface="Verdana"/>
+              <a:ea typeface="Verdana"/>
+              <a:sym typeface="Verdana"/>
+            </a:endParaRPr>
+          </a:p>
+          <a:p>
+            <a:pPr marL="0" marR="0" lvl="0" indent="0" algn="l" defTabSz="914400" rtl="0" eaLnBrk="1" fontAlgn="auto" latinLnBrk="0" hangingPunct="1">
+              <a:lnSpc>
+                <a:spcPct val="90000"/>
+              </a:lnSpc>
+              <a:spcBef>
+                <a:spcPts val="0"/>
+              </a:spcBef>
+              <a:spcAft>
+                <a:spcPts val="0"/>
+              </a:spcAft>
+              <a:buClr>
+                <a:srgbClr val="00AAF0"/>
+              </a:buClr>
+              <a:buSzPts val="1800"/>
+              <a:buFont typeface="Arial" panose="020B0604020202020204" pitchFamily="34" charset="0"/>
+              <a:buNone/>
+              <a:tabLst/>
+              <a:defRPr/>
+            </a:pPr>
+            <a:endParaRPr kumimoji="0" lang="hu-HU" sz="2400" b="1" i="0" u="none" strike="noStrike" kern="1200" cap="none" spc="0" normalizeH="0" baseline="0" noProof="0" dirty="0">
+              <a:ln>
+                <a:noFill/>
+              </a:ln>
+              <a:solidFill>
+                <a:srgbClr val="00AAF0"/>
+              </a:solidFill>
+              <a:effectLst/>
+              <a:uLnTx/>
+              <a:uFillTx/>
+              <a:latin typeface="Verdana"/>
+              <a:ea typeface="Verdana"/>
+              <a:sym typeface="Verdana"/>
+            </a:endParaRPr>
+          </a:p>
+          <a:p>
+            <a:pPr marL="0" marR="0" lvl="0" indent="0" algn="l" defTabSz="914400" rtl="0" eaLnBrk="1" fontAlgn="auto" latinLnBrk="0" hangingPunct="1">
+              <a:lnSpc>
+                <a:spcPct val="90000"/>
+              </a:lnSpc>
+              <a:spcBef>
+                <a:spcPts val="0"/>
+              </a:spcBef>
+              <a:spcAft>
+                <a:spcPts val="0"/>
+              </a:spcAft>
+              <a:buClr>
+                <a:srgbClr val="00AAF0"/>
+              </a:buClr>
+              <a:buSzPts val="1800"/>
+              <a:buFont typeface="Arial" panose="020B0604020202020204" pitchFamily="34" charset="0"/>
+              <a:buNone/>
+              <a:tabLst/>
+              <a:defRPr/>
+            </a:pPr>
+            <a:r>
+              <a:rPr kumimoji="0" lang="en-US" sz="2400" b="1" i="0" u="none" strike="noStrike" kern="1200" cap="none" spc="0" normalizeH="0" baseline="0" noProof="0" dirty="0">
+                <a:ln>
+                  <a:noFill/>
+                </a:ln>
+                <a:solidFill>
+                  <a:srgbClr val="00AAF0"/>
+                </a:solidFill>
+                <a:effectLst/>
+                <a:uLnTx/>
+                <a:uFillTx/>
+                <a:latin typeface="Verdana"/>
+                <a:ea typeface="Verdana"/>
+                <a:sym typeface="Verdana"/>
+              </a:rPr>
+              <a:t>Results interpretation</a:t>
+            </a:r>
+          </a:p>
+          <a:p>
+            <a:pPr marL="0" indent="0">
+              <a:spcBef>
+                <a:spcPts val="0"/>
+              </a:spcBef>
+              <a:buNone/>
+            </a:pPr>
+            <a:endParaRPr lang="en-US" dirty="0"/>
+          </a:p>
+        </p:txBody>
+      </p:sp>
+      <p:sp>
+        <p:nvSpPr>
+          <p:cNvPr id="2" name="AutoShape 2" descr="preview url image">
+            <a:extLst>
+              <a:ext uri="{FF2B5EF4-FFF2-40B4-BE49-F238E27FC236}">
+                <a16:creationId xmlns:a16="http://schemas.microsoft.com/office/drawing/2014/main" id="{C98591A5-667D-0B93-0F9E-8361ED4353AC}"/>
+              </a:ext>
+            </a:extLst>
+          </p:cNvPr>
+          <p:cNvSpPr>
+            <a:spLocks noChangeAspect="1" noChangeArrowheads="1"/>
+          </p:cNvSpPr>
+          <p:nvPr/>
+        </p:nvSpPr>
+        <p:spPr bwMode="auto">
+          <a:xfrm>
+            <a:off x="5943600" y="3276600"/>
+            <a:ext cx="304800" cy="304800"/>
+          </a:xfrm>
+          <a:prstGeom prst="rect">
+            <a:avLst/>
+          </a:prstGeom>
+          <a:noFill/>
+          <a:extLst>
+            <a:ext uri="{909E8E84-426E-40DD-AFC4-6F175D3DCCD1}">
+              <a14:hiddenFill xmlns:a14="http://schemas.microsoft.com/office/drawing/2010/main">
+                <a:solidFill>
+                  <a:srgbClr val="FFFFFF"/>
+                </a:solidFill>
+              </a14:hiddenFill>
+            </a:ext>
+          </a:extLst>
+        </p:spPr>
+        <p:txBody>
+          <a:bodyPr vert="horz" wrap="square" lIns="91440" tIns="45720" rIns="91440" bIns="45720" numCol="1" anchor="t" anchorCtr="0" compatLnSpc="1">
+            <a:prstTxWarp prst="textNoShape">
+              <a:avLst/>
+            </a:prstTxWarp>
+          </a:bodyPr>
+          <a:lstStyle/>
+          <a:p>
+            <a:endParaRPr lang="pt-PT"/>
+          </a:p>
+        </p:txBody>
+      </p:sp>
+      <p:sp>
+        <p:nvSpPr>
+          <p:cNvPr id="3" name="TextBox 2">
+            <a:extLst>
+              <a:ext uri="{FF2B5EF4-FFF2-40B4-BE49-F238E27FC236}">
+                <a16:creationId xmlns:a16="http://schemas.microsoft.com/office/drawing/2014/main" id="{0208ADF9-D724-460A-901B-6E55DDC4FDC0}"/>
+              </a:ext>
+            </a:extLst>
+          </p:cNvPr>
+          <p:cNvSpPr txBox="1"/>
+          <p:nvPr/>
+        </p:nvSpPr>
+        <p:spPr>
+          <a:xfrm>
+            <a:off x="352490" y="1414732"/>
+            <a:ext cx="5438709" cy="2916439"/>
+          </a:xfrm>
+          <a:prstGeom prst="rect">
+            <a:avLst/>
+          </a:prstGeom>
+          <a:noFill/>
+        </p:spPr>
+        <p:txBody>
+          <a:bodyPr wrap="square" rtlCol="0">
+            <a:spAutoFit/>
+          </a:bodyPr>
+          <a:lstStyle/>
+          <a:p>
+            <a:pPr>
+              <a:lnSpc>
+                <a:spcPct val="114000"/>
+              </a:lnSpc>
+            </a:pPr>
+            <a:r>
+              <a:rPr lang="en-GB" b="1" dirty="0"/>
+              <a:t>Glucocorticoid</a:t>
+            </a:r>
+            <a:r>
+              <a:rPr lang="hu-HU" b="1" dirty="0"/>
+              <a:t> (</a:t>
+            </a:r>
+            <a:r>
+              <a:rPr lang="hu-HU" b="1" i="1" dirty="0" err="1"/>
+              <a:t>steroid</a:t>
+            </a:r>
+            <a:r>
+              <a:rPr lang="hu-HU" b="1" i="1" dirty="0"/>
+              <a:t> </a:t>
+            </a:r>
+            <a:r>
+              <a:rPr lang="hu-HU" b="1" i="1" dirty="0" err="1"/>
+              <a:t>hormones</a:t>
+            </a:r>
+            <a:r>
+              <a:rPr lang="hu-HU" b="1" dirty="0"/>
+              <a:t>)</a:t>
+            </a:r>
+            <a:r>
+              <a:rPr lang="en-GB" b="1" dirty="0"/>
+              <a:t> Treatment Drives Strong Transcriptomic Changes</a:t>
+            </a:r>
+            <a:endParaRPr lang="hu-HU" b="1" dirty="0"/>
+          </a:p>
+          <a:p>
+            <a:pPr>
+              <a:lnSpc>
+                <a:spcPct val="114000"/>
+              </a:lnSpc>
+            </a:pPr>
+            <a:endParaRPr lang="hu-HU" b="1" dirty="0"/>
+          </a:p>
+          <a:p>
+            <a:pPr marL="285750" indent="-285750">
+              <a:lnSpc>
+                <a:spcPct val="114000"/>
+              </a:lnSpc>
+              <a:buFont typeface="Arial" panose="020B0604020202020204" pitchFamily="34" charset="0"/>
+              <a:buChar char="•"/>
+            </a:pPr>
+            <a:r>
+              <a:rPr lang="hu-HU" dirty="0"/>
+              <a:t>S</a:t>
+            </a:r>
+            <a:r>
+              <a:rPr lang="en-GB" dirty="0" err="1"/>
+              <a:t>eparation</a:t>
+            </a:r>
+            <a:r>
+              <a:rPr lang="en-GB" dirty="0"/>
+              <a:t> between </a:t>
+            </a:r>
+            <a:r>
+              <a:rPr lang="en-GB" b="1" dirty="0"/>
+              <a:t>Control</a:t>
+            </a:r>
+            <a:r>
+              <a:rPr lang="en-GB" dirty="0"/>
+              <a:t> and </a:t>
+            </a:r>
+            <a:r>
+              <a:rPr lang="en-GB" b="1" dirty="0"/>
+              <a:t>Dex</a:t>
+            </a:r>
+            <a:r>
+              <a:rPr lang="hu-HU" b="1" dirty="0" err="1"/>
+              <a:t>amethasone</a:t>
+            </a:r>
+            <a:r>
+              <a:rPr lang="en-GB" b="1" dirty="0"/>
+              <a:t>-treated</a:t>
+            </a:r>
+            <a:r>
+              <a:rPr lang="en-GB" dirty="0"/>
+              <a:t> samples (PCA result)</a:t>
+            </a:r>
+            <a:endParaRPr lang="hu-HU" dirty="0"/>
+          </a:p>
+          <a:p>
+            <a:pPr marL="285750" indent="-285750">
+              <a:lnSpc>
+                <a:spcPct val="114000"/>
+              </a:lnSpc>
+              <a:buFont typeface="Arial" panose="020B0604020202020204" pitchFamily="34" charset="0"/>
+              <a:buChar char="•"/>
+            </a:pPr>
+            <a:r>
+              <a:rPr lang="hu-HU" dirty="0" err="1"/>
+              <a:t>Heatmap</a:t>
+            </a:r>
+            <a:r>
+              <a:rPr lang="hu-HU" dirty="0"/>
+              <a:t> of top 50 DE </a:t>
+            </a:r>
+            <a:r>
+              <a:rPr lang="hu-HU" dirty="0" err="1"/>
+              <a:t>genes</a:t>
+            </a:r>
+            <a:r>
+              <a:rPr lang="hu-HU" dirty="0"/>
+              <a:t> shows s</a:t>
+            </a:r>
+            <a:r>
+              <a:rPr lang="en-GB" dirty="0" err="1"/>
+              <a:t>trong</a:t>
+            </a:r>
+            <a:r>
+              <a:rPr lang="en-GB" dirty="0"/>
+              <a:t> clustering by treatment group</a:t>
+            </a:r>
+            <a:endParaRPr lang="hu-HU" dirty="0"/>
+          </a:p>
+          <a:p>
+            <a:pPr marL="285750" indent="-285750">
+              <a:lnSpc>
+                <a:spcPct val="114000"/>
+              </a:lnSpc>
+              <a:buFont typeface="Arial" panose="020B0604020202020204" pitchFamily="34" charset="0"/>
+              <a:buChar char="•"/>
+            </a:pPr>
+            <a:r>
+              <a:rPr lang="hu-HU" dirty="0" err="1"/>
+              <a:t>Large</a:t>
+            </a:r>
+            <a:r>
+              <a:rPr lang="hu-HU" dirty="0"/>
+              <a:t> </a:t>
+            </a:r>
+            <a:r>
+              <a:rPr lang="hu-HU" dirty="0" err="1"/>
+              <a:t>number</a:t>
+            </a:r>
+            <a:r>
+              <a:rPr lang="hu-HU" dirty="0"/>
+              <a:t> of </a:t>
+            </a:r>
+            <a:r>
+              <a:rPr lang="hu-HU" dirty="0" err="1"/>
+              <a:t>significantly</a:t>
+            </a:r>
+            <a:r>
+              <a:rPr lang="hu-HU" dirty="0"/>
+              <a:t> </a:t>
+            </a:r>
+            <a:r>
+              <a:rPr lang="hu-HU" dirty="0" err="1"/>
+              <a:t>changed</a:t>
+            </a:r>
+            <a:r>
+              <a:rPr lang="hu-HU" dirty="0"/>
+              <a:t> (</a:t>
+            </a:r>
+            <a:r>
+              <a:rPr lang="hu-HU" dirty="0" err="1"/>
+              <a:t>adj.p</a:t>
+            </a:r>
+            <a:r>
+              <a:rPr lang="hu-HU" dirty="0"/>
+              <a:t> &lt; 0.05) </a:t>
+            </a:r>
+            <a:r>
+              <a:rPr lang="hu-HU" dirty="0" err="1"/>
+              <a:t>genes</a:t>
+            </a:r>
+            <a:endParaRPr lang="en-GB" dirty="0"/>
+          </a:p>
+        </p:txBody>
+      </p:sp>
+      <p:pic>
+        <p:nvPicPr>
+          <p:cNvPr id="6" name="Picture 5">
+            <a:extLst>
+              <a:ext uri="{FF2B5EF4-FFF2-40B4-BE49-F238E27FC236}">
+                <a16:creationId xmlns:a16="http://schemas.microsoft.com/office/drawing/2014/main" id="{AEF5B7BF-7B46-7A15-9FBA-D9A3D24FAF2E}"/>
+              </a:ext>
+            </a:extLst>
+          </p:cNvPr>
+          <p:cNvPicPr>
+            <a:picLocks noChangeAspect="1"/>
+          </p:cNvPicPr>
+          <p:nvPr/>
+        </p:nvPicPr>
+        <p:blipFill>
+          <a:blip r:embed="rId3"/>
+          <a:stretch>
+            <a:fillRect/>
+          </a:stretch>
+        </p:blipFill>
+        <p:spPr>
+          <a:xfrm>
+            <a:off x="7970328" y="764584"/>
+            <a:ext cx="3582533" cy="3566587"/>
+          </a:xfrm>
+          <a:prstGeom prst="rect">
+            <a:avLst/>
+          </a:prstGeom>
+          <a:ln>
+            <a:solidFill>
+              <a:srgbClr val="00AAF0"/>
+            </a:solidFill>
+          </a:ln>
+        </p:spPr>
+      </p:pic>
+      <p:pic>
+        <p:nvPicPr>
+          <p:cNvPr id="9" name="Picture 8">
+            <a:extLst>
+              <a:ext uri="{FF2B5EF4-FFF2-40B4-BE49-F238E27FC236}">
+                <a16:creationId xmlns:a16="http://schemas.microsoft.com/office/drawing/2014/main" id="{F7B0F4D4-CF47-841E-6A9B-B3ED1A09D92B}"/>
+              </a:ext>
+            </a:extLst>
+          </p:cNvPr>
+          <p:cNvPicPr>
+            <a:picLocks noChangeAspect="1"/>
+          </p:cNvPicPr>
+          <p:nvPr/>
+        </p:nvPicPr>
+        <p:blipFill>
+          <a:blip r:embed="rId4"/>
+          <a:stretch>
+            <a:fillRect/>
+          </a:stretch>
+        </p:blipFill>
+        <p:spPr>
+          <a:xfrm>
+            <a:off x="4812038" y="4101190"/>
+            <a:ext cx="2684156" cy="2684156"/>
+          </a:xfrm>
+          <a:prstGeom prst="rect">
+            <a:avLst/>
+          </a:prstGeom>
+        </p:spPr>
+      </p:pic>
+      <p:sp>
+        <p:nvSpPr>
+          <p:cNvPr id="11" name="TextBox 10">
+            <a:extLst>
+              <a:ext uri="{FF2B5EF4-FFF2-40B4-BE49-F238E27FC236}">
+                <a16:creationId xmlns:a16="http://schemas.microsoft.com/office/drawing/2014/main" id="{F84AD592-D9A4-4B62-24B4-E1C27D75325D}"/>
+              </a:ext>
+            </a:extLst>
+          </p:cNvPr>
+          <p:cNvSpPr txBox="1"/>
+          <p:nvPr/>
+        </p:nvSpPr>
+        <p:spPr>
+          <a:xfrm>
+            <a:off x="7970328" y="6262126"/>
+            <a:ext cx="6118578" cy="523220"/>
+          </a:xfrm>
+          <a:prstGeom prst="rect">
+            <a:avLst/>
+          </a:prstGeom>
+          <a:noFill/>
+        </p:spPr>
+        <p:txBody>
+          <a:bodyPr wrap="square">
+            <a:spAutoFit/>
+          </a:bodyPr>
+          <a:lstStyle/>
+          <a:p>
+            <a:r>
+              <a:rPr lang="hu-HU" sz="1400" b="0" i="0" dirty="0" err="1">
+                <a:solidFill>
+                  <a:srgbClr val="5B616B"/>
+                </a:solidFill>
+                <a:effectLst/>
+                <a:latin typeface="BlinkMacSystemFont"/>
+              </a:rPr>
+              <a:t>Himes</a:t>
+            </a:r>
+            <a:r>
+              <a:rPr lang="hu-HU" sz="1400" b="0" i="0" dirty="0">
+                <a:solidFill>
+                  <a:srgbClr val="5B616B"/>
+                </a:solidFill>
+                <a:effectLst/>
+                <a:latin typeface="BlinkMacSystemFont"/>
+              </a:rPr>
+              <a:t> </a:t>
+            </a:r>
+            <a:r>
+              <a:rPr lang="hu-HU" sz="1400" b="0" i="0" dirty="0" err="1">
+                <a:solidFill>
+                  <a:srgbClr val="5B616B"/>
+                </a:solidFill>
+                <a:effectLst/>
+                <a:latin typeface="BlinkMacSystemFont"/>
+              </a:rPr>
+              <a:t>et</a:t>
+            </a:r>
+            <a:r>
+              <a:rPr lang="hu-HU" sz="1400" b="0" i="0" dirty="0">
+                <a:solidFill>
+                  <a:srgbClr val="5B616B"/>
+                </a:solidFill>
+                <a:effectLst/>
+                <a:latin typeface="BlinkMacSystemFont"/>
+              </a:rPr>
+              <a:t> </a:t>
+            </a:r>
+            <a:r>
+              <a:rPr lang="hu-HU" sz="1400" b="0" i="0" dirty="0" err="1">
+                <a:solidFill>
+                  <a:srgbClr val="5B616B"/>
+                </a:solidFill>
+                <a:effectLst/>
+                <a:latin typeface="BlinkMacSystemFont"/>
+              </a:rPr>
+              <a:t>al</a:t>
+            </a:r>
+            <a:r>
+              <a:rPr lang="hu-HU" sz="1400" b="0" i="0" dirty="0">
+                <a:solidFill>
+                  <a:srgbClr val="5B616B"/>
+                </a:solidFill>
+                <a:effectLst/>
+                <a:latin typeface="BlinkMacSystemFont"/>
+              </a:rPr>
+              <a:t>., 2014, </a:t>
+            </a:r>
+            <a:br>
+              <a:rPr lang="hu-HU" sz="1400" b="0" i="0" dirty="0">
+                <a:solidFill>
+                  <a:srgbClr val="5B616B"/>
+                </a:solidFill>
+                <a:effectLst/>
+                <a:latin typeface="BlinkMacSystemFont"/>
+              </a:rPr>
+            </a:br>
+            <a:r>
+              <a:rPr lang="hu-HU" sz="1400" b="0" i="0" dirty="0" err="1">
+                <a:solidFill>
+                  <a:srgbClr val="5B616B"/>
+                </a:solidFill>
+                <a:effectLst/>
+                <a:latin typeface="BlinkMacSystemFont"/>
+              </a:rPr>
+              <a:t>doi</a:t>
+            </a:r>
+            <a:r>
+              <a:rPr lang="hu-HU" sz="1400" b="0" i="0" dirty="0">
+                <a:solidFill>
+                  <a:srgbClr val="5B616B"/>
+                </a:solidFill>
+                <a:effectLst/>
+                <a:latin typeface="BlinkMacSystemFont"/>
+              </a:rPr>
+              <a:t>:</a:t>
+            </a:r>
+            <a:r>
+              <a:rPr lang="en-GB" sz="1400" b="0" i="0" dirty="0">
+                <a:solidFill>
+                  <a:srgbClr val="5B616B"/>
+                </a:solidFill>
+                <a:effectLst/>
+                <a:latin typeface="BlinkMacSystemFont"/>
+              </a:rPr>
+              <a:t>10.1371/journal.pone.0099625.</a:t>
+            </a:r>
+            <a:r>
+              <a:rPr lang="en-GB" sz="1400" b="0" i="0" dirty="0">
+                <a:solidFill>
+                  <a:srgbClr val="212121"/>
+                </a:solidFill>
+                <a:effectLst/>
+                <a:latin typeface="BlinkMacSystemFont"/>
+              </a:rPr>
+              <a:t> </a:t>
+            </a:r>
+            <a:r>
+              <a:rPr lang="en-GB" sz="1400" b="0" i="0" dirty="0" err="1">
+                <a:solidFill>
+                  <a:srgbClr val="5B616B"/>
+                </a:solidFill>
+                <a:effectLst/>
+                <a:latin typeface="BlinkMacSystemFont"/>
+              </a:rPr>
+              <a:t>eCollection</a:t>
+            </a:r>
+            <a:r>
+              <a:rPr lang="en-GB" sz="1400" b="0" i="0" dirty="0">
+                <a:solidFill>
+                  <a:srgbClr val="5B616B"/>
+                </a:solidFill>
+                <a:effectLst/>
+                <a:latin typeface="BlinkMacSystemFont"/>
+              </a:rPr>
+              <a:t> 2014.</a:t>
+            </a:r>
+            <a:endParaRPr lang="en-GB" sz="1400" dirty="0"/>
+          </a:p>
+        </p:txBody>
+      </p:sp>
+    </p:spTree>
+    <p:extLst>
+      <p:ext uri="{BB962C8B-B14F-4D97-AF65-F5344CB8AC3E}">
+        <p14:creationId xmlns:p14="http://schemas.microsoft.com/office/powerpoint/2010/main" val="1373837004"/>
+      </p:ext>
+    </p:extLst>
+  </p:cSld>
+  <p:clrMapOvr>
+    <a:masterClrMapping/>
+  </p:clrMapOvr>
+</p:sld>
+</file>
+
+<file path=ppt/slides/slide3.xml><?xml version="1.0" encoding="utf-8"?>
+<p:sld xmlns:a="http://schemas.openxmlformats.org/drawingml/2006/main" xmlns:r="http://schemas.openxmlformats.org/officeDocument/2006/relationships" xmlns:p="http://schemas.openxmlformats.org/presentationml/2006/main">
+  <p:cSld>
+    <p:spTree>
+      <p:nvGrpSpPr>
         <p:cNvPr id="1" name=""/>
         <p:cNvGrpSpPr/>
         <p:nvPr/>
@@ -4603,7 +5993,7 @@
             <a:fld id="{20B01981-BAC9-448B-9192-9C05FAA59408}" type="slidenum">
               <a:rPr lang="en-US" noProof="0" smtClean="0"/>
               <a:pPr/>
-              <a:t>2</a:t>
+              <a:t>3</a:t>
             </a:fld>
             <a:endParaRPr lang="en-US" noProof="0" dirty="0"/>
           </a:p>
@@ -4625,8 +6015,8 @@
         </p:nvSpPr>
         <p:spPr>
           <a:xfrm>
-            <a:off x="450518" y="399459"/>
-            <a:ext cx="9987631" cy="643280"/>
+            <a:off x="243484" y="287140"/>
+            <a:ext cx="10841459" cy="954888"/>
           </a:xfrm>
           <a:prstGeom prst="rect">
             <a:avLst/>
@@ -4638,7 +6028,7 @@
         </p:spPr>
         <p:txBody>
           <a:bodyPr spcFirstLastPara="1" vert="horz" wrap="square" lIns="91433" tIns="45700" rIns="91433" bIns="45700" rtlCol="0" anchor="t" anchorCtr="0">
-            <a:normAutofit/>
+            <a:normAutofit fontScale="92500" lnSpcReduction="10000"/>
           </a:bodyPr>
           <a:lstStyle>
             <a:lvl1pPr marL="228600" indent="-228600" algn="l" defTabSz="914400" rtl="0" eaLnBrk="1" latinLnBrk="0" hangingPunct="1">
@@ -4825,6 +6215,127 @@
               <a:defRPr/>
             </a:pPr>
             <a:r>
+              <a:rPr kumimoji="0" lang="en-GB" sz="2400" b="1" i="0" u="none" strike="noStrike" kern="1200" cap="none" spc="0" normalizeH="0" baseline="0" noProof="0" dirty="0">
+                <a:ln>
+                  <a:noFill/>
+                </a:ln>
+                <a:solidFill>
+                  <a:srgbClr val="00AAF0"/>
+                </a:solidFill>
+                <a:effectLst/>
+                <a:uLnTx/>
+                <a:uFillTx/>
+                <a:latin typeface="Verdana"/>
+                <a:ea typeface="Verdana"/>
+                <a:sym typeface="Verdana"/>
+              </a:rPr>
+              <a:t>Global Differential Expression</a:t>
+            </a:r>
+            <a:r>
+              <a:rPr kumimoji="0" lang="hu-HU" sz="2400" b="1" i="0" u="none" strike="noStrike" kern="1200" cap="none" spc="0" normalizeH="0" baseline="0" noProof="0" dirty="0">
+                <a:ln>
+                  <a:noFill/>
+                </a:ln>
+                <a:solidFill>
+                  <a:srgbClr val="00AAF0"/>
+                </a:solidFill>
+                <a:effectLst/>
+                <a:uLnTx/>
+                <a:uFillTx/>
+                <a:latin typeface="Verdana"/>
+                <a:ea typeface="Verdana"/>
+                <a:sym typeface="Verdana"/>
+              </a:rPr>
+              <a:t> (DE)</a:t>
+            </a:r>
+            <a:r>
+              <a:rPr kumimoji="0" lang="en-GB" sz="2400" b="1" i="0" u="none" strike="noStrike" kern="1200" cap="none" spc="0" normalizeH="0" baseline="0" noProof="0" dirty="0">
+                <a:ln>
+                  <a:noFill/>
+                </a:ln>
+                <a:solidFill>
+                  <a:srgbClr val="00AAF0"/>
+                </a:solidFill>
+                <a:effectLst/>
+                <a:uLnTx/>
+                <a:uFillTx/>
+                <a:latin typeface="Verdana"/>
+                <a:ea typeface="Verdana"/>
+                <a:sym typeface="Verdana"/>
+              </a:rPr>
+              <a:t> Response to Dexamethasone</a:t>
+            </a:r>
+            <a:endParaRPr kumimoji="0" lang="hu-HU" sz="2400" b="1" i="0" u="none" strike="noStrike" kern="1200" cap="none" spc="0" normalizeH="0" baseline="0" noProof="0" dirty="0">
+              <a:ln>
+                <a:noFill/>
+              </a:ln>
+              <a:solidFill>
+                <a:srgbClr val="00AAF0"/>
+              </a:solidFill>
+              <a:effectLst/>
+              <a:uLnTx/>
+              <a:uFillTx/>
+              <a:latin typeface="Verdana"/>
+              <a:ea typeface="Verdana"/>
+              <a:sym typeface="Verdana"/>
+            </a:endParaRPr>
+          </a:p>
+          <a:p>
+            <a:pPr marL="0" marR="0" lvl="0" indent="0" algn="l" defTabSz="914400" rtl="0" eaLnBrk="1" fontAlgn="auto" latinLnBrk="0" hangingPunct="1">
+              <a:lnSpc>
+                <a:spcPct val="90000"/>
+              </a:lnSpc>
+              <a:spcBef>
+                <a:spcPts val="0"/>
+              </a:spcBef>
+              <a:spcAft>
+                <a:spcPts val="0"/>
+              </a:spcAft>
+              <a:buClr>
+                <a:srgbClr val="00AAF0"/>
+              </a:buClr>
+              <a:buSzPts val="1800"/>
+              <a:buFont typeface="Arial" panose="020B0604020202020204" pitchFamily="34" charset="0"/>
+              <a:buNone/>
+              <a:tabLst/>
+              <a:defRPr/>
+            </a:pPr>
+            <a:endParaRPr kumimoji="0" lang="hu-HU" sz="2400" b="1" i="0" u="none" strike="noStrike" kern="1200" cap="none" spc="0" normalizeH="0" baseline="0" noProof="0" dirty="0">
+              <a:ln>
+                <a:noFill/>
+              </a:ln>
+              <a:solidFill>
+                <a:srgbClr val="00AAF0"/>
+              </a:solidFill>
+              <a:effectLst/>
+              <a:uLnTx/>
+              <a:uFillTx/>
+              <a:latin typeface="Verdana"/>
+              <a:ea typeface="Verdana"/>
+              <a:sym typeface="Verdana"/>
+            </a:endParaRPr>
+          </a:p>
+          <a:p>
+            <a:pPr marL="0" marR="0" lvl="0" indent="0" algn="l" defTabSz="914400" rtl="0" eaLnBrk="1" fontAlgn="auto" latinLnBrk="0" hangingPunct="1">
+              <a:lnSpc>
+                <a:spcPct val="90000"/>
+              </a:lnSpc>
+              <a:spcBef>
+                <a:spcPts val="0"/>
+              </a:spcBef>
+              <a:spcAft>
+                <a:spcPts val="0"/>
+              </a:spcAft>
+              <a:buClr>
+                <a:srgbClr val="00AAF0"/>
+              </a:buClr>
+              <a:buSzPts val="1800"/>
+              <a:buFont typeface="Arial" panose="020B0604020202020204" pitchFamily="34" charset="0"/>
+              <a:buNone/>
+              <a:tabLst/>
+              <a:defRPr/>
+            </a:pPr>
+            <a:r>
               <a:rPr kumimoji="0" lang="en-US" sz="2400" b="1" i="0" u="none" strike="noStrike" kern="1200" cap="none" spc="0" normalizeH="0" baseline="0" noProof="0" dirty="0">
                 <a:ln>
                   <a:noFill/>
@@ -4900,10 +6411,10 @@
       </p:sp>
       <p:pic>
         <p:nvPicPr>
-          <p:cNvPr id="5" name="Imagem 4">
-            <a:extLst>
-              <a:ext uri="{FF2B5EF4-FFF2-40B4-BE49-F238E27FC236}">
-                <a16:creationId xmlns:a16="http://schemas.microsoft.com/office/drawing/2014/main" id="{F1E5AD44-2B1A-BEEF-FE0B-C12630927A81}"/>
+          <p:cNvPr id="8" name="Picture 7">
+            <a:extLst>
+              <a:ext uri="{FF2B5EF4-FFF2-40B4-BE49-F238E27FC236}">
+                <a16:creationId xmlns:a16="http://schemas.microsoft.com/office/drawing/2014/main" id="{9D6B7025-22D7-19A3-11F1-BEC9F75DDB9D}"/>
               </a:ext>
             </a:extLst>
           </p:cNvPr>
@@ -4913,21 +6424,15 @@
           <p:nvPr/>
         </p:nvPicPr>
         <p:blipFill>
-          <a:blip r:embed="rId2">
-            <a:extLst>
-              <a:ext uri="{28A0092B-C50C-407E-A947-70E740481C1C}">
-                <a14:useLocalDpi xmlns:a14="http://schemas.microsoft.com/office/drawing/2010/main" val="0"/>
-              </a:ext>
-            </a:extLst>
-          </a:blip>
+          <a:blip r:embed="rId3"/>
           <a:stretch>
             <a:fillRect/>
           </a:stretch>
         </p:blipFill>
         <p:spPr>
           <a:xfrm>
-            <a:off x="6715305" y="285007"/>
-            <a:ext cx="5026177" cy="4350723"/>
+            <a:off x="8082515" y="689423"/>
+            <a:ext cx="3978889" cy="3972889"/>
           </a:xfrm>
           <a:prstGeom prst="rect">
             <a:avLst/>
@@ -4936,10 +6441,10 @@
       </p:pic>
       <p:pic>
         <p:nvPicPr>
-          <p:cNvPr id="9" name="Imagem 8">
-            <a:extLst>
-              <a:ext uri="{FF2B5EF4-FFF2-40B4-BE49-F238E27FC236}">
-                <a16:creationId xmlns:a16="http://schemas.microsoft.com/office/drawing/2014/main" id="{79B679EF-05C2-525A-E609-5362521B8A9E}"/>
+          <p:cNvPr id="12" name="Picture 11">
+            <a:extLst>
+              <a:ext uri="{FF2B5EF4-FFF2-40B4-BE49-F238E27FC236}">
+                <a16:creationId xmlns:a16="http://schemas.microsoft.com/office/drawing/2014/main" id="{95BFD4F4-1817-164C-2D92-22E5B845F827}"/>
               </a:ext>
             </a:extLst>
           </p:cNvPr>
@@ -4949,21 +6454,15 @@
           <p:nvPr/>
         </p:nvPicPr>
         <p:blipFill>
-          <a:blip r:embed="rId3">
-            <a:extLst>
-              <a:ext uri="{28A0092B-C50C-407E-A947-70E740481C1C}">
-                <a14:useLocalDpi xmlns:a14="http://schemas.microsoft.com/office/drawing/2010/main" val="0"/>
-              </a:ext>
-            </a:extLst>
-          </a:blip>
+          <a:blip r:embed="rId4"/>
           <a:stretch>
             <a:fillRect/>
           </a:stretch>
         </p:blipFill>
         <p:spPr>
           <a:xfrm>
-            <a:off x="450518" y="1816677"/>
-            <a:ext cx="5303391" cy="4040305"/>
+            <a:off x="4707998" y="3895760"/>
+            <a:ext cx="3256650" cy="2867796"/>
           </a:xfrm>
           <a:prstGeom prst="rect">
             <a:avLst/>
@@ -4972,10 +6471,10 @@
       </p:pic>
       <p:sp>
         <p:nvSpPr>
-          <p:cNvPr id="10" name="CaixaDeTexto 9">
-            <a:extLst>
-              <a:ext uri="{FF2B5EF4-FFF2-40B4-BE49-F238E27FC236}">
-                <a16:creationId xmlns:a16="http://schemas.microsoft.com/office/drawing/2014/main" id="{B68A24A4-F6B8-5B36-8C33-CE140DE24ADB}"/>
+          <p:cNvPr id="13" name="TextBox 12">
+            <a:extLst>
+              <a:ext uri="{FF2B5EF4-FFF2-40B4-BE49-F238E27FC236}">
+                <a16:creationId xmlns:a16="http://schemas.microsoft.com/office/drawing/2014/main" id="{C53E1CAD-E4CB-EF5E-7180-4090073FB3D9}"/>
               </a:ext>
             </a:extLst>
           </p:cNvPr>
@@ -4984,8 +6483,8 @@
         </p:nvSpPr>
         <p:spPr>
           <a:xfrm>
-            <a:off x="1478463" y="1157191"/>
-            <a:ext cx="3335593" cy="369332"/>
+            <a:off x="352490" y="1414732"/>
+            <a:ext cx="7504577" cy="2284856"/>
           </a:xfrm>
           <a:prstGeom prst="rect">
             <a:avLst/>
@@ -4993,51 +6492,187 @@
           <a:noFill/>
         </p:spPr>
         <p:txBody>
-          <a:bodyPr wrap="none" rtlCol="0">
+          <a:bodyPr wrap="square" rtlCol="0">
             <a:spAutoFit/>
           </a:bodyPr>
           <a:lstStyle/>
           <a:p>
-            <a:r>
-              <a:rPr lang="pt-PT" dirty="0" err="1"/>
-              <a:t>Limma</a:t>
-            </a:r>
-            <a:r>
-              <a:rPr lang="pt-PT" dirty="0"/>
+            <a:pPr>
+              <a:lnSpc>
+                <a:spcPct val="114000"/>
+              </a:lnSpc>
+            </a:pPr>
+            <a:r>
+              <a:rPr lang="en-GB" b="1" dirty="0"/>
+              <a:t>Glucocorticoid</a:t>
+            </a:r>
+            <a:r>
+              <a:rPr lang="hu-HU" b="1" dirty="0"/>
+              <a:t> (</a:t>
+            </a:r>
+            <a:r>
+              <a:rPr lang="hu-HU" b="1" i="1" dirty="0" err="1"/>
+              <a:t>steroid</a:t>
+            </a:r>
+            <a:r>
+              <a:rPr lang="hu-HU" b="1" i="1" dirty="0"/>
               <a:t> </a:t>
             </a:r>
             <a:r>
-              <a:rPr lang="pt-PT" dirty="0" err="1"/>
-              <a:t>results</a:t>
-            </a:r>
-            <a:r>
-              <a:rPr lang="pt-PT" dirty="0"/>
+              <a:rPr lang="hu-HU" b="1" i="1" dirty="0" err="1"/>
+              <a:t>hormones</a:t>
+            </a:r>
+            <a:r>
+              <a:rPr lang="hu-HU" b="1" dirty="0"/>
+              <a:t>)</a:t>
+            </a:r>
+            <a:r>
+              <a:rPr lang="en-GB" b="1" dirty="0"/>
+              <a:t> Treatment Drives Strong Transcriptomic Changes</a:t>
+            </a:r>
+            <a:endParaRPr lang="hu-HU" b="1" dirty="0"/>
+          </a:p>
+          <a:p>
+            <a:pPr>
+              <a:lnSpc>
+                <a:spcPct val="114000"/>
+              </a:lnSpc>
+            </a:pPr>
+            <a:endParaRPr lang="hu-HU" b="1" dirty="0"/>
+          </a:p>
+          <a:p>
+            <a:pPr marL="285750" indent="-285750">
+              <a:lnSpc>
+                <a:spcPct val="114000"/>
+              </a:lnSpc>
+              <a:buFont typeface="Arial" panose="020B0604020202020204" pitchFamily="34" charset="0"/>
+              <a:buChar char="•"/>
+            </a:pPr>
+            <a:r>
+              <a:rPr lang="hu-HU" dirty="0"/>
+              <a:t>S</a:t>
+            </a:r>
+            <a:r>
+              <a:rPr lang="en-GB" dirty="0" err="1"/>
+              <a:t>eparation</a:t>
+            </a:r>
+            <a:r>
+              <a:rPr lang="en-GB" dirty="0"/>
+              <a:t> between </a:t>
+            </a:r>
+            <a:r>
+              <a:rPr lang="en-GB" b="1" dirty="0"/>
+              <a:t>Control</a:t>
+            </a:r>
+            <a:r>
+              <a:rPr lang="en-GB" dirty="0"/>
+              <a:t> and </a:t>
+            </a:r>
+            <a:r>
+              <a:rPr lang="en-GB" b="1" dirty="0"/>
+              <a:t>Dex</a:t>
+            </a:r>
+            <a:r>
+              <a:rPr lang="hu-HU" b="1" dirty="0" err="1"/>
+              <a:t>amethasone</a:t>
+            </a:r>
+            <a:r>
+              <a:rPr lang="en-GB" b="1" dirty="0"/>
+              <a:t>-treated</a:t>
+            </a:r>
+            <a:r>
+              <a:rPr lang="en-GB" dirty="0"/>
+              <a:t> samples (PCA result)</a:t>
+            </a:r>
+            <a:endParaRPr lang="hu-HU" dirty="0"/>
+          </a:p>
+          <a:p>
+            <a:pPr marL="285750" indent="-285750">
+              <a:lnSpc>
+                <a:spcPct val="114000"/>
+              </a:lnSpc>
+              <a:buFont typeface="Arial" panose="020B0604020202020204" pitchFamily="34" charset="0"/>
+              <a:buChar char="•"/>
+            </a:pPr>
+            <a:r>
+              <a:rPr lang="hu-HU" dirty="0" err="1"/>
+              <a:t>Heatmap</a:t>
+            </a:r>
+            <a:r>
+              <a:rPr lang="hu-HU" dirty="0"/>
+              <a:t> of top 50 DE </a:t>
+            </a:r>
+            <a:r>
+              <a:rPr lang="hu-HU" dirty="0" err="1"/>
+              <a:t>genes</a:t>
+            </a:r>
+            <a:r>
+              <a:rPr lang="hu-HU" dirty="0"/>
+              <a:t> shows s</a:t>
+            </a:r>
+            <a:r>
+              <a:rPr lang="en-GB" dirty="0" err="1"/>
+              <a:t>trong</a:t>
+            </a:r>
+            <a:r>
+              <a:rPr lang="en-GB" dirty="0"/>
+              <a:t> clustering by treatment group</a:t>
+            </a:r>
+            <a:endParaRPr lang="hu-HU" dirty="0"/>
+          </a:p>
+          <a:p>
+            <a:pPr marL="285750" indent="-285750">
+              <a:lnSpc>
+                <a:spcPct val="114000"/>
+              </a:lnSpc>
+              <a:buFont typeface="Arial" panose="020B0604020202020204" pitchFamily="34" charset="0"/>
+              <a:buChar char="•"/>
+            </a:pPr>
+            <a:r>
+              <a:rPr lang="hu-HU" dirty="0" err="1"/>
+              <a:t>Large</a:t>
+            </a:r>
+            <a:r>
+              <a:rPr lang="hu-HU" dirty="0"/>
               <a:t> </a:t>
             </a:r>
             <a:r>
-              <a:rPr lang="pt-PT" dirty="0" err="1"/>
-              <a:t>aligned</a:t>
-            </a:r>
-            <a:r>
-              <a:rPr lang="pt-PT" dirty="0"/>
+              <a:rPr lang="hu-HU" dirty="0" err="1"/>
+              <a:t>number</a:t>
+            </a:r>
+            <a:r>
+              <a:rPr lang="hu-HU" dirty="0"/>
+              <a:t> of </a:t>
+            </a:r>
+            <a:r>
+              <a:rPr lang="hu-HU" dirty="0" err="1"/>
+              <a:t>significantly</a:t>
+            </a:r>
+            <a:r>
+              <a:rPr lang="hu-HU" dirty="0"/>
               <a:t> </a:t>
             </a:r>
             <a:r>
-              <a:rPr lang="pt-PT" dirty="0" err="1"/>
-              <a:t>with</a:t>
-            </a:r>
-            <a:r>
-              <a:rPr lang="pt-PT" dirty="0"/>
-              <a:t> </a:t>
-            </a:r>
-            <a:r>
-              <a:rPr lang="pt-PT" dirty="0" err="1"/>
-              <a:t>paper</a:t>
-            </a:r>
-            <a:r>
-              <a:rPr lang="pt-PT" dirty="0"/>
-              <a:t>.</a:t>
-            </a:r>
+              <a:rPr lang="hu-HU" dirty="0" err="1"/>
+              <a:t>changed</a:t>
+            </a:r>
+            <a:r>
+              <a:rPr lang="hu-HU" dirty="0"/>
+              <a:t> (</a:t>
+            </a:r>
+            <a:r>
+              <a:rPr lang="hu-HU" dirty="0" err="1"/>
+              <a:t>adj.p</a:t>
+            </a:r>
+            <a:r>
+              <a:rPr lang="hu-HU" dirty="0"/>
+              <a:t> &lt; 0.05) </a:t>
+            </a:r>
+            <a:r>
+              <a:rPr lang="hu-HU" dirty="0" err="1"/>
+              <a:t>genes</a:t>
+            </a:r>
+            <a:endParaRPr lang="en-GB" dirty="0"/>
           </a:p>
         </p:txBody>
       </p:sp>
@@ -5054,7 +6689,2413 @@
 </p:sld>
 </file>
 
-<file path=ppt/slides/slide3.xml><?xml version="1.0" encoding="utf-8"?>
+<file path=ppt/slides/slide4.xml><?xml version="1.0" encoding="utf-8"?>
+<p:sld xmlns:a="http://schemas.openxmlformats.org/drawingml/2006/main" xmlns:r="http://schemas.openxmlformats.org/officeDocument/2006/relationships" xmlns:p="http://schemas.openxmlformats.org/presentationml/2006/main">
+  <p:cSld>
+    <p:spTree>
+      <p:nvGrpSpPr>
+        <p:cNvPr id="1" name="">
+          <a:extLst>
+            <a:ext uri="{FF2B5EF4-FFF2-40B4-BE49-F238E27FC236}">
+              <a16:creationId xmlns:a16="http://schemas.microsoft.com/office/drawing/2014/main" id="{032CE7BD-78C5-1398-32D8-0FCE1FE1A76B}"/>
+            </a:ext>
+          </a:extLst>
+        </p:cNvPr>
+        <p:cNvGrpSpPr/>
+        <p:nvPr/>
+      </p:nvGrpSpPr>
+      <p:grpSpPr>
+        <a:xfrm>
+          <a:off x="0" y="0"/>
+          <a:ext cx="0" cy="0"/>
+          <a:chOff x="0" y="0"/>
+          <a:chExt cx="0" cy="0"/>
+        </a:xfrm>
+      </p:grpSpPr>
+      <p:sp>
+        <p:nvSpPr>
+          <p:cNvPr id="4" name="Marcador de Posição do Número do Diapositivo 3">
+            <a:extLst>
+              <a:ext uri="{FF2B5EF4-FFF2-40B4-BE49-F238E27FC236}">
+                <a16:creationId xmlns:a16="http://schemas.microsoft.com/office/drawing/2014/main" id="{170CF68B-F912-EB8E-13BB-762E9DA8220B}"/>
+              </a:ext>
+            </a:extLst>
+          </p:cNvPr>
+          <p:cNvSpPr>
+            <a:spLocks noGrp="1"/>
+          </p:cNvSpPr>
+          <p:nvPr>
+            <p:ph type="sldNum" sz="quarter" idx="11"/>
+          </p:nvPr>
+        </p:nvSpPr>
+        <p:spPr/>
+        <p:txBody>
+          <a:bodyPr/>
+          <a:lstStyle/>
+          <a:p>
+            <a:fld id="{20B01981-BAC9-448B-9192-9C05FAA59408}" type="slidenum">
+              <a:rPr lang="en-US" noProof="0" smtClean="0"/>
+              <a:pPr/>
+              <a:t>4</a:t>
+            </a:fld>
+            <a:endParaRPr lang="en-US" noProof="0" dirty="0"/>
+          </a:p>
+        </p:txBody>
+      </p:sp>
+      <p:sp>
+        <p:nvSpPr>
+          <p:cNvPr id="7" name="Google Shape;129;p24">
+            <a:extLst>
+              <a:ext uri="{FF2B5EF4-FFF2-40B4-BE49-F238E27FC236}">
+                <a16:creationId xmlns:a16="http://schemas.microsoft.com/office/drawing/2014/main" id="{82F944ED-60C2-536C-E132-88B1C5EFADBF}"/>
+              </a:ext>
+            </a:extLst>
+          </p:cNvPr>
+          <p:cNvSpPr txBox="1">
+            <a:spLocks/>
+          </p:cNvSpPr>
+          <p:nvPr/>
+        </p:nvSpPr>
+        <p:spPr>
+          <a:xfrm>
+            <a:off x="243484" y="287140"/>
+            <a:ext cx="11361494" cy="954888"/>
+          </a:xfrm>
+          <a:prstGeom prst="rect">
+            <a:avLst/>
+          </a:prstGeom>
+          <a:noFill/>
+          <a:ln>
+            <a:noFill/>
+          </a:ln>
+        </p:spPr>
+        <p:txBody>
+          <a:bodyPr spcFirstLastPara="1" vert="horz" wrap="square" lIns="91433" tIns="45700" rIns="91433" bIns="45700" rtlCol="0" anchor="t" anchorCtr="0">
+            <a:normAutofit/>
+          </a:bodyPr>
+          <a:lstStyle>
+            <a:lvl1pPr marL="228600" indent="-228600" algn="l" defTabSz="914400" rtl="0" eaLnBrk="1" latinLnBrk="0" hangingPunct="1">
+              <a:lnSpc>
+                <a:spcPct val="90000"/>
+              </a:lnSpc>
+              <a:spcBef>
+                <a:spcPts val="1000"/>
+              </a:spcBef>
+              <a:buFont typeface="Arial" panose="020B0604020202020204" pitchFamily="34" charset="0"/>
+              <a:buChar char="•"/>
+              <a:defRPr sz="2800" kern="1200">
+                <a:solidFill>
+                  <a:schemeClr val="tx1"/>
+                </a:solidFill>
+                <a:latin typeface="+mn-lt"/>
+                <a:ea typeface="+mn-ea"/>
+                <a:cs typeface="+mn-cs"/>
+              </a:defRPr>
+            </a:lvl1pPr>
+            <a:lvl2pPr marL="685800" indent="-228600" algn="l" defTabSz="914400" rtl="0" eaLnBrk="1" latinLnBrk="0" hangingPunct="1">
+              <a:lnSpc>
+                <a:spcPct val="90000"/>
+              </a:lnSpc>
+              <a:spcBef>
+                <a:spcPts val="500"/>
+              </a:spcBef>
+              <a:buFont typeface="Arial" panose="020B0604020202020204" pitchFamily="34" charset="0"/>
+              <a:buChar char="•"/>
+              <a:defRPr sz="2400" kern="1200">
+                <a:solidFill>
+                  <a:schemeClr val="tx1"/>
+                </a:solidFill>
+                <a:latin typeface="+mn-lt"/>
+                <a:ea typeface="+mn-ea"/>
+                <a:cs typeface="+mn-cs"/>
+              </a:defRPr>
+            </a:lvl2pPr>
+            <a:lvl3pPr marL="1143000" indent="-228600" algn="l" defTabSz="914400" rtl="0" eaLnBrk="1" latinLnBrk="0" hangingPunct="1">
+              <a:lnSpc>
+                <a:spcPct val="90000"/>
+              </a:lnSpc>
+              <a:spcBef>
+                <a:spcPts val="500"/>
+              </a:spcBef>
+              <a:buFont typeface="Arial" panose="020B0604020202020204" pitchFamily="34" charset="0"/>
+              <a:buChar char="•"/>
+              <a:defRPr sz="2000" kern="1200">
+                <a:solidFill>
+                  <a:schemeClr val="tx1"/>
+                </a:solidFill>
+                <a:latin typeface="+mn-lt"/>
+                <a:ea typeface="+mn-ea"/>
+                <a:cs typeface="+mn-cs"/>
+              </a:defRPr>
+            </a:lvl3pPr>
+            <a:lvl4pPr marL="1600200" indent="-228600" algn="l" defTabSz="914400" rtl="0" eaLnBrk="1" latinLnBrk="0" hangingPunct="1">
+              <a:lnSpc>
+                <a:spcPct val="90000"/>
+              </a:lnSpc>
+              <a:spcBef>
+                <a:spcPts val="500"/>
+              </a:spcBef>
+              <a:buFont typeface="Arial" panose="020B0604020202020204" pitchFamily="34" charset="0"/>
+              <a:buChar char="•"/>
+              <a:defRPr sz="1800" kern="1200">
+                <a:solidFill>
+                  <a:schemeClr val="tx1"/>
+                </a:solidFill>
+                <a:latin typeface="+mn-lt"/>
+                <a:ea typeface="+mn-ea"/>
+                <a:cs typeface="+mn-cs"/>
+              </a:defRPr>
+            </a:lvl4pPr>
+            <a:lvl5pPr marL="2057400" indent="-228600" algn="l" defTabSz="914400" rtl="0" eaLnBrk="1" latinLnBrk="0" hangingPunct="1">
+              <a:lnSpc>
+                <a:spcPct val="90000"/>
+              </a:lnSpc>
+              <a:spcBef>
+                <a:spcPts val="500"/>
+              </a:spcBef>
+              <a:buFont typeface="Arial" panose="020B0604020202020204" pitchFamily="34" charset="0"/>
+              <a:buChar char="•"/>
+              <a:defRPr sz="1800" kern="1200">
+                <a:solidFill>
+                  <a:schemeClr val="tx1"/>
+                </a:solidFill>
+                <a:latin typeface="+mn-lt"/>
+                <a:ea typeface="+mn-ea"/>
+                <a:cs typeface="+mn-cs"/>
+              </a:defRPr>
+            </a:lvl5pPr>
+            <a:lvl6pPr marL="2514600" indent="-228600" algn="l" defTabSz="914400" rtl="0" eaLnBrk="1" latinLnBrk="0" hangingPunct="1">
+              <a:lnSpc>
+                <a:spcPct val="90000"/>
+              </a:lnSpc>
+              <a:spcBef>
+                <a:spcPts val="500"/>
+              </a:spcBef>
+              <a:buFont typeface="Arial" panose="020B0604020202020204" pitchFamily="34" charset="0"/>
+              <a:buChar char="•"/>
+              <a:defRPr sz="1800" kern="1200">
+                <a:solidFill>
+                  <a:schemeClr val="tx1"/>
+                </a:solidFill>
+                <a:latin typeface="+mn-lt"/>
+                <a:ea typeface="+mn-ea"/>
+                <a:cs typeface="+mn-cs"/>
+              </a:defRPr>
+            </a:lvl6pPr>
+            <a:lvl7pPr marL="2971800" indent="-228600" algn="l" defTabSz="914400" rtl="0" eaLnBrk="1" latinLnBrk="0" hangingPunct="1">
+              <a:lnSpc>
+                <a:spcPct val="90000"/>
+              </a:lnSpc>
+              <a:spcBef>
+                <a:spcPts val="500"/>
+              </a:spcBef>
+              <a:buFont typeface="Arial" panose="020B0604020202020204" pitchFamily="34" charset="0"/>
+              <a:buChar char="•"/>
+              <a:defRPr sz="1800" kern="1200">
+                <a:solidFill>
+                  <a:schemeClr val="tx1"/>
+                </a:solidFill>
+                <a:latin typeface="+mn-lt"/>
+                <a:ea typeface="+mn-ea"/>
+                <a:cs typeface="+mn-cs"/>
+              </a:defRPr>
+            </a:lvl7pPr>
+            <a:lvl8pPr marL="3429000" indent="-228600" algn="l" defTabSz="914400" rtl="0" eaLnBrk="1" latinLnBrk="0" hangingPunct="1">
+              <a:lnSpc>
+                <a:spcPct val="90000"/>
+              </a:lnSpc>
+              <a:spcBef>
+                <a:spcPts val="500"/>
+              </a:spcBef>
+              <a:buFont typeface="Arial" panose="020B0604020202020204" pitchFamily="34" charset="0"/>
+              <a:buChar char="•"/>
+              <a:defRPr sz="1800" kern="1200">
+                <a:solidFill>
+                  <a:schemeClr val="tx1"/>
+                </a:solidFill>
+                <a:latin typeface="+mn-lt"/>
+                <a:ea typeface="+mn-ea"/>
+                <a:cs typeface="+mn-cs"/>
+              </a:defRPr>
+            </a:lvl8pPr>
+            <a:lvl9pPr marL="3886200" indent="-228600" algn="l" defTabSz="914400" rtl="0" eaLnBrk="1" latinLnBrk="0" hangingPunct="1">
+              <a:lnSpc>
+                <a:spcPct val="90000"/>
+              </a:lnSpc>
+              <a:spcBef>
+                <a:spcPts val="500"/>
+              </a:spcBef>
+              <a:buFont typeface="Arial" panose="020B0604020202020204" pitchFamily="34" charset="0"/>
+              <a:buChar char="•"/>
+              <a:defRPr sz="1800" kern="1200">
+                <a:solidFill>
+                  <a:schemeClr val="tx1"/>
+                </a:solidFill>
+                <a:latin typeface="+mn-lt"/>
+                <a:ea typeface="+mn-ea"/>
+                <a:cs typeface="+mn-cs"/>
+              </a:defRPr>
+            </a:lvl9pPr>
+          </a:lstStyle>
+          <a:p>
+            <a:pPr marL="0" marR="0" lvl="0" indent="0" algn="l" defTabSz="914400" rtl="0" eaLnBrk="1" fontAlgn="auto" latinLnBrk="0" hangingPunct="1">
+              <a:lnSpc>
+                <a:spcPct val="90000"/>
+              </a:lnSpc>
+              <a:spcBef>
+                <a:spcPts val="0"/>
+              </a:spcBef>
+              <a:spcAft>
+                <a:spcPts val="0"/>
+              </a:spcAft>
+              <a:buClr>
+                <a:srgbClr val="00AAF0"/>
+              </a:buClr>
+              <a:buSzPts val="1800"/>
+              <a:buFont typeface="Arial" panose="020B0604020202020204" pitchFamily="34" charset="0"/>
+              <a:buNone/>
+              <a:tabLst/>
+              <a:defRPr/>
+            </a:pPr>
+            <a:r>
+              <a:rPr kumimoji="0" lang="en-GB" sz="2400" b="1" i="0" u="none" strike="noStrike" kern="1200" cap="none" spc="0" normalizeH="0" baseline="0" noProof="0" dirty="0">
+                <a:ln>
+                  <a:noFill/>
+                </a:ln>
+                <a:solidFill>
+                  <a:srgbClr val="00AAF0"/>
+                </a:solidFill>
+                <a:effectLst/>
+                <a:uLnTx/>
+                <a:uFillTx/>
+                <a:latin typeface="Verdana"/>
+                <a:ea typeface="Verdana"/>
+                <a:sym typeface="Verdana"/>
+              </a:rPr>
+              <a:t>Global Differential Expression</a:t>
+            </a:r>
+            <a:r>
+              <a:rPr kumimoji="0" lang="hu-HU" sz="2400" b="1" i="0" u="none" strike="noStrike" kern="1200" cap="none" spc="0" normalizeH="0" baseline="0" noProof="0" dirty="0">
+                <a:ln>
+                  <a:noFill/>
+                </a:ln>
+                <a:solidFill>
+                  <a:srgbClr val="00AAF0"/>
+                </a:solidFill>
+                <a:effectLst/>
+                <a:uLnTx/>
+                <a:uFillTx/>
+                <a:latin typeface="Verdana"/>
+                <a:ea typeface="Verdana"/>
+                <a:sym typeface="Verdana"/>
+              </a:rPr>
+              <a:t> (DE)</a:t>
+            </a:r>
+            <a:r>
+              <a:rPr kumimoji="0" lang="en-GB" sz="2400" b="1" i="0" u="none" strike="noStrike" kern="1200" cap="none" spc="0" normalizeH="0" baseline="0" noProof="0" dirty="0">
+                <a:ln>
+                  <a:noFill/>
+                </a:ln>
+                <a:solidFill>
+                  <a:srgbClr val="00AAF0"/>
+                </a:solidFill>
+                <a:effectLst/>
+                <a:uLnTx/>
+                <a:uFillTx/>
+                <a:latin typeface="Verdana"/>
+                <a:ea typeface="Verdana"/>
+                <a:sym typeface="Verdana"/>
+              </a:rPr>
+              <a:t> Response to Dexamethasone</a:t>
+            </a:r>
+            <a:endParaRPr kumimoji="0" lang="hu-HU" sz="2400" b="1" i="0" u="none" strike="noStrike" kern="1200" cap="none" spc="0" normalizeH="0" baseline="0" noProof="0" dirty="0">
+              <a:ln>
+                <a:noFill/>
+              </a:ln>
+              <a:solidFill>
+                <a:srgbClr val="00AAF0"/>
+              </a:solidFill>
+              <a:effectLst/>
+              <a:uLnTx/>
+              <a:uFillTx/>
+              <a:latin typeface="Verdana"/>
+              <a:ea typeface="Verdana"/>
+              <a:sym typeface="Verdana"/>
+            </a:endParaRPr>
+          </a:p>
+          <a:p>
+            <a:pPr marL="0" marR="0" lvl="0" indent="0" algn="l" defTabSz="914400" rtl="0" eaLnBrk="1" fontAlgn="auto" latinLnBrk="0" hangingPunct="1">
+              <a:lnSpc>
+                <a:spcPct val="90000"/>
+              </a:lnSpc>
+              <a:spcBef>
+                <a:spcPts val="0"/>
+              </a:spcBef>
+              <a:spcAft>
+                <a:spcPts val="0"/>
+              </a:spcAft>
+              <a:buClr>
+                <a:srgbClr val="00AAF0"/>
+              </a:buClr>
+              <a:buSzPts val="1800"/>
+              <a:buFont typeface="Arial" panose="020B0604020202020204" pitchFamily="34" charset="0"/>
+              <a:buNone/>
+              <a:tabLst/>
+              <a:defRPr/>
+            </a:pPr>
+            <a:endParaRPr kumimoji="0" lang="hu-HU" sz="2400" b="1" i="0" u="none" strike="noStrike" kern="1200" cap="none" spc="0" normalizeH="0" baseline="0" noProof="0" dirty="0">
+              <a:ln>
+                <a:noFill/>
+              </a:ln>
+              <a:solidFill>
+                <a:srgbClr val="00AAF0"/>
+              </a:solidFill>
+              <a:effectLst/>
+              <a:uLnTx/>
+              <a:uFillTx/>
+              <a:latin typeface="Verdana"/>
+              <a:ea typeface="Verdana"/>
+              <a:sym typeface="Verdana"/>
+            </a:endParaRPr>
+          </a:p>
+          <a:p>
+            <a:pPr marL="0" indent="0">
+              <a:spcBef>
+                <a:spcPts val="0"/>
+              </a:spcBef>
+              <a:buNone/>
+            </a:pPr>
+            <a:endParaRPr lang="en-US" dirty="0"/>
+          </a:p>
+        </p:txBody>
+      </p:sp>
+      <p:sp>
+        <p:nvSpPr>
+          <p:cNvPr id="2" name="AutoShape 2" descr="preview url image">
+            <a:extLst>
+              <a:ext uri="{FF2B5EF4-FFF2-40B4-BE49-F238E27FC236}">
+                <a16:creationId xmlns:a16="http://schemas.microsoft.com/office/drawing/2014/main" id="{9792E9D4-BE62-B7E8-42D8-7F378ED47C2E}"/>
+              </a:ext>
+            </a:extLst>
+          </p:cNvPr>
+          <p:cNvSpPr>
+            <a:spLocks noChangeAspect="1" noChangeArrowheads="1"/>
+          </p:cNvSpPr>
+          <p:nvPr/>
+        </p:nvSpPr>
+        <p:spPr bwMode="auto">
+          <a:xfrm>
+            <a:off x="5943600" y="3276600"/>
+            <a:ext cx="304800" cy="304800"/>
+          </a:xfrm>
+          <a:prstGeom prst="rect">
+            <a:avLst/>
+          </a:prstGeom>
+          <a:noFill/>
+          <a:extLst>
+            <a:ext uri="{909E8E84-426E-40DD-AFC4-6F175D3DCCD1}">
+              <a14:hiddenFill xmlns:a14="http://schemas.microsoft.com/office/drawing/2010/main">
+                <a:solidFill>
+                  <a:srgbClr val="FFFFFF"/>
+                </a:solidFill>
+              </a14:hiddenFill>
+            </a:ext>
+          </a:extLst>
+        </p:spPr>
+        <p:txBody>
+          <a:bodyPr vert="horz" wrap="square" lIns="91440" tIns="45720" rIns="91440" bIns="45720" numCol="1" anchor="t" anchorCtr="0" compatLnSpc="1">
+            <a:prstTxWarp prst="textNoShape">
+              <a:avLst/>
+            </a:prstTxWarp>
+          </a:bodyPr>
+          <a:lstStyle/>
+          <a:p>
+            <a:endParaRPr lang="pt-PT"/>
+          </a:p>
+        </p:txBody>
+      </p:sp>
+      <p:pic>
+        <p:nvPicPr>
+          <p:cNvPr id="8" name="Picture 7">
+            <a:extLst>
+              <a:ext uri="{FF2B5EF4-FFF2-40B4-BE49-F238E27FC236}">
+                <a16:creationId xmlns:a16="http://schemas.microsoft.com/office/drawing/2014/main" id="{9649B0BB-08BD-0224-3EF7-9ADA58715704}"/>
+              </a:ext>
+            </a:extLst>
+          </p:cNvPr>
+          <p:cNvPicPr>
+            <a:picLocks noChangeAspect="1"/>
+          </p:cNvPicPr>
+          <p:nvPr/>
+        </p:nvPicPr>
+        <p:blipFill>
+          <a:blip r:embed="rId3"/>
+          <a:stretch>
+            <a:fillRect/>
+          </a:stretch>
+        </p:blipFill>
+        <p:spPr>
+          <a:xfrm>
+            <a:off x="6096001" y="689423"/>
+            <a:ext cx="5965404" cy="5956408"/>
+          </a:xfrm>
+          <a:prstGeom prst="rect">
+            <a:avLst/>
+          </a:prstGeom>
+        </p:spPr>
+      </p:pic>
+      <p:sp>
+        <p:nvSpPr>
+          <p:cNvPr id="13" name="TextBox 12">
+            <a:extLst>
+              <a:ext uri="{FF2B5EF4-FFF2-40B4-BE49-F238E27FC236}">
+                <a16:creationId xmlns:a16="http://schemas.microsoft.com/office/drawing/2014/main" id="{E623D775-F28B-73DE-ED83-ED6F41AFFF94}"/>
+              </a:ext>
+            </a:extLst>
+          </p:cNvPr>
+          <p:cNvSpPr txBox="1"/>
+          <p:nvPr/>
+        </p:nvSpPr>
+        <p:spPr>
+          <a:xfrm>
+            <a:off x="352490" y="1414732"/>
+            <a:ext cx="7504577" cy="2585323"/>
+          </a:xfrm>
+          <a:prstGeom prst="rect">
+            <a:avLst/>
+          </a:prstGeom>
+          <a:noFill/>
+        </p:spPr>
+        <p:txBody>
+          <a:bodyPr wrap="square" rtlCol="0">
+            <a:spAutoFit/>
+          </a:bodyPr>
+          <a:lstStyle/>
+          <a:p>
+            <a:r>
+              <a:rPr lang="en-GB" b="1" dirty="0"/>
+              <a:t>Known Glucocorticoid Targets Are Strongly Upregulated</a:t>
+            </a:r>
+            <a:endParaRPr lang="en-GB" dirty="0"/>
+          </a:p>
+          <a:p>
+            <a:pPr marL="285750" indent="-285750">
+              <a:buFont typeface="Arial" panose="020B0604020202020204" pitchFamily="34" charset="0"/>
+              <a:buChar char="•"/>
+            </a:pPr>
+            <a:r>
+              <a:rPr lang="en-GB" b="1" dirty="0"/>
+              <a:t>FKBP5</a:t>
+            </a:r>
+            <a:r>
+              <a:rPr lang="en-GB" dirty="0"/>
+              <a:t> – classical glucocorticoid receptor target</a:t>
+            </a:r>
+            <a:endParaRPr lang="hu-HU" dirty="0"/>
+          </a:p>
+          <a:p>
+            <a:pPr marL="285750" indent="-285750">
+              <a:buFont typeface="Arial" panose="020B0604020202020204" pitchFamily="34" charset="0"/>
+              <a:buChar char="•"/>
+            </a:pPr>
+            <a:r>
+              <a:rPr lang="en-GB" b="1" dirty="0"/>
+              <a:t>ZBTB16</a:t>
+            </a:r>
+            <a:endParaRPr lang="hu-HU" dirty="0"/>
+          </a:p>
+          <a:p>
+            <a:pPr marL="285750" indent="-285750">
+              <a:buFont typeface="Arial" panose="020B0604020202020204" pitchFamily="34" charset="0"/>
+              <a:buChar char="•"/>
+            </a:pPr>
+            <a:r>
+              <a:rPr lang="en-GB" b="1" dirty="0"/>
+              <a:t>C7</a:t>
+            </a:r>
+            <a:endParaRPr lang="hu-HU" dirty="0"/>
+          </a:p>
+          <a:p>
+            <a:pPr marL="285750" indent="-285750">
+              <a:buFont typeface="Arial" panose="020B0604020202020204" pitchFamily="34" charset="0"/>
+              <a:buChar char="•"/>
+            </a:pPr>
+            <a:r>
+              <a:rPr lang="en-GB" b="1" dirty="0"/>
+              <a:t>GPX3</a:t>
+            </a:r>
+            <a:endParaRPr lang="hu-HU" dirty="0"/>
+          </a:p>
+          <a:p>
+            <a:pPr marL="285750" indent="-285750">
+              <a:buFont typeface="Arial" panose="020B0604020202020204" pitchFamily="34" charset="0"/>
+              <a:buChar char="•"/>
+            </a:pPr>
+            <a:r>
+              <a:rPr lang="en-GB" b="1" dirty="0"/>
+              <a:t>SAMHD1</a:t>
+            </a:r>
+            <a:endParaRPr lang="hu-HU" dirty="0"/>
+          </a:p>
+          <a:p>
+            <a:pPr marL="285750" indent="-285750">
+              <a:buFont typeface="Arial" panose="020B0604020202020204" pitchFamily="34" charset="0"/>
+              <a:buChar char="•"/>
+            </a:pPr>
+            <a:r>
+              <a:rPr lang="en-GB" b="1" dirty="0"/>
+              <a:t>FBN2</a:t>
+            </a:r>
+            <a:endParaRPr lang="hu-HU" dirty="0"/>
+          </a:p>
+          <a:p>
+            <a:pPr marL="285750" indent="-285750">
+              <a:buFont typeface="Arial" panose="020B0604020202020204" pitchFamily="34" charset="0"/>
+              <a:buChar char="•"/>
+            </a:pPr>
+            <a:r>
+              <a:rPr lang="en-GB" b="1" dirty="0"/>
+              <a:t>GLUL</a:t>
+            </a:r>
+            <a:endParaRPr lang="hu-HU" dirty="0"/>
+          </a:p>
+          <a:p>
+            <a:pPr marL="285750" indent="-285750">
+              <a:buFont typeface="Arial" panose="020B0604020202020204" pitchFamily="34" charset="0"/>
+              <a:buChar char="•"/>
+            </a:pPr>
+            <a:r>
+              <a:rPr lang="en-GB" b="1" dirty="0"/>
+              <a:t>CRISPLD2</a:t>
+            </a:r>
+            <a:r>
+              <a:rPr lang="en-GB" dirty="0"/>
+              <a:t> (from original paper)</a:t>
+            </a:r>
+          </a:p>
+        </p:txBody>
+      </p:sp>
+    </p:spTree>
+    <p:extLst>
+      <p:ext uri="{BB962C8B-B14F-4D97-AF65-F5344CB8AC3E}">
+        <p14:creationId xmlns:p14="http://schemas.microsoft.com/office/powerpoint/2010/main" val="3821139701"/>
+      </p:ext>
+    </p:extLst>
+  </p:cSld>
+  <p:clrMapOvr>
+    <a:masterClrMapping/>
+  </p:clrMapOvr>
+</p:sld>
+</file>
+
+<file path=ppt/slides/slide5.xml><?xml version="1.0" encoding="utf-8"?>
+<p:sld xmlns:a="http://schemas.openxmlformats.org/drawingml/2006/main" xmlns:r="http://schemas.openxmlformats.org/officeDocument/2006/relationships" xmlns:p="http://schemas.openxmlformats.org/presentationml/2006/main">
+  <p:cSld>
+    <p:spTree>
+      <p:nvGrpSpPr>
+        <p:cNvPr id="1" name="">
+          <a:extLst>
+            <a:ext uri="{FF2B5EF4-FFF2-40B4-BE49-F238E27FC236}">
+              <a16:creationId xmlns:a16="http://schemas.microsoft.com/office/drawing/2014/main" id="{7C063AEA-CD50-8AEF-570D-3F0EFCCE4ACF}"/>
+            </a:ext>
+          </a:extLst>
+        </p:cNvPr>
+        <p:cNvGrpSpPr/>
+        <p:nvPr/>
+      </p:nvGrpSpPr>
+      <p:grpSpPr>
+        <a:xfrm>
+          <a:off x="0" y="0"/>
+          <a:ext cx="0" cy="0"/>
+          <a:chOff x="0" y="0"/>
+          <a:chExt cx="0" cy="0"/>
+        </a:xfrm>
+      </p:grpSpPr>
+      <p:sp>
+        <p:nvSpPr>
+          <p:cNvPr id="4" name="Marcador de Posição do Número do Diapositivo 3">
+            <a:extLst>
+              <a:ext uri="{FF2B5EF4-FFF2-40B4-BE49-F238E27FC236}">
+                <a16:creationId xmlns:a16="http://schemas.microsoft.com/office/drawing/2014/main" id="{ABD9AA05-03F7-4023-B79E-07C80E227B23}"/>
+              </a:ext>
+            </a:extLst>
+          </p:cNvPr>
+          <p:cNvSpPr>
+            <a:spLocks noGrp="1"/>
+          </p:cNvSpPr>
+          <p:nvPr>
+            <p:ph type="sldNum" sz="quarter" idx="11"/>
+          </p:nvPr>
+        </p:nvSpPr>
+        <p:spPr/>
+        <p:txBody>
+          <a:bodyPr/>
+          <a:lstStyle/>
+          <a:p>
+            <a:fld id="{20B01981-BAC9-448B-9192-9C05FAA59408}" type="slidenum">
+              <a:rPr lang="en-US" noProof="0" smtClean="0"/>
+              <a:pPr/>
+              <a:t>5</a:t>
+            </a:fld>
+            <a:endParaRPr lang="en-US" noProof="0" dirty="0"/>
+          </a:p>
+        </p:txBody>
+      </p:sp>
+      <p:sp>
+        <p:nvSpPr>
+          <p:cNvPr id="7" name="Google Shape;129;p24">
+            <a:extLst>
+              <a:ext uri="{FF2B5EF4-FFF2-40B4-BE49-F238E27FC236}">
+                <a16:creationId xmlns:a16="http://schemas.microsoft.com/office/drawing/2014/main" id="{8D6D1E6B-F9EE-0F42-B77A-3F18FC8FC6E7}"/>
+              </a:ext>
+            </a:extLst>
+          </p:cNvPr>
+          <p:cNvSpPr txBox="1">
+            <a:spLocks/>
+          </p:cNvSpPr>
+          <p:nvPr/>
+        </p:nvSpPr>
+        <p:spPr>
+          <a:xfrm>
+            <a:off x="243484" y="287140"/>
+            <a:ext cx="11361494" cy="954888"/>
+          </a:xfrm>
+          <a:prstGeom prst="rect">
+            <a:avLst/>
+          </a:prstGeom>
+          <a:noFill/>
+          <a:ln>
+            <a:noFill/>
+          </a:ln>
+        </p:spPr>
+        <p:txBody>
+          <a:bodyPr spcFirstLastPara="1" vert="horz" wrap="square" lIns="91433" tIns="45700" rIns="91433" bIns="45700" rtlCol="0" anchor="t" anchorCtr="0">
+            <a:normAutofit/>
+          </a:bodyPr>
+          <a:lstStyle>
+            <a:lvl1pPr marL="228600" indent="-228600" algn="l" defTabSz="914400" rtl="0" eaLnBrk="1" latinLnBrk="0" hangingPunct="1">
+              <a:lnSpc>
+                <a:spcPct val="90000"/>
+              </a:lnSpc>
+              <a:spcBef>
+                <a:spcPts val="1000"/>
+              </a:spcBef>
+              <a:buFont typeface="Arial" panose="020B0604020202020204" pitchFamily="34" charset="0"/>
+              <a:buChar char="•"/>
+              <a:defRPr sz="2800" kern="1200">
+                <a:solidFill>
+                  <a:schemeClr val="tx1"/>
+                </a:solidFill>
+                <a:latin typeface="+mn-lt"/>
+                <a:ea typeface="+mn-ea"/>
+                <a:cs typeface="+mn-cs"/>
+              </a:defRPr>
+            </a:lvl1pPr>
+            <a:lvl2pPr marL="685800" indent="-228600" algn="l" defTabSz="914400" rtl="0" eaLnBrk="1" latinLnBrk="0" hangingPunct="1">
+              <a:lnSpc>
+                <a:spcPct val="90000"/>
+              </a:lnSpc>
+              <a:spcBef>
+                <a:spcPts val="500"/>
+              </a:spcBef>
+              <a:buFont typeface="Arial" panose="020B0604020202020204" pitchFamily="34" charset="0"/>
+              <a:buChar char="•"/>
+              <a:defRPr sz="2400" kern="1200">
+                <a:solidFill>
+                  <a:schemeClr val="tx1"/>
+                </a:solidFill>
+                <a:latin typeface="+mn-lt"/>
+                <a:ea typeface="+mn-ea"/>
+                <a:cs typeface="+mn-cs"/>
+              </a:defRPr>
+            </a:lvl2pPr>
+            <a:lvl3pPr marL="1143000" indent="-228600" algn="l" defTabSz="914400" rtl="0" eaLnBrk="1" latinLnBrk="0" hangingPunct="1">
+              <a:lnSpc>
+                <a:spcPct val="90000"/>
+              </a:lnSpc>
+              <a:spcBef>
+                <a:spcPts val="500"/>
+              </a:spcBef>
+              <a:buFont typeface="Arial" panose="020B0604020202020204" pitchFamily="34" charset="0"/>
+              <a:buChar char="•"/>
+              <a:defRPr sz="2000" kern="1200">
+                <a:solidFill>
+                  <a:schemeClr val="tx1"/>
+                </a:solidFill>
+                <a:latin typeface="+mn-lt"/>
+                <a:ea typeface="+mn-ea"/>
+                <a:cs typeface="+mn-cs"/>
+              </a:defRPr>
+            </a:lvl3pPr>
+            <a:lvl4pPr marL="1600200" indent="-228600" algn="l" defTabSz="914400" rtl="0" eaLnBrk="1" latinLnBrk="0" hangingPunct="1">
+              <a:lnSpc>
+                <a:spcPct val="90000"/>
+              </a:lnSpc>
+              <a:spcBef>
+                <a:spcPts val="500"/>
+              </a:spcBef>
+              <a:buFont typeface="Arial" panose="020B0604020202020204" pitchFamily="34" charset="0"/>
+              <a:buChar char="•"/>
+              <a:defRPr sz="1800" kern="1200">
+                <a:solidFill>
+                  <a:schemeClr val="tx1"/>
+                </a:solidFill>
+                <a:latin typeface="+mn-lt"/>
+                <a:ea typeface="+mn-ea"/>
+                <a:cs typeface="+mn-cs"/>
+              </a:defRPr>
+            </a:lvl4pPr>
+            <a:lvl5pPr marL="2057400" indent="-228600" algn="l" defTabSz="914400" rtl="0" eaLnBrk="1" latinLnBrk="0" hangingPunct="1">
+              <a:lnSpc>
+                <a:spcPct val="90000"/>
+              </a:lnSpc>
+              <a:spcBef>
+                <a:spcPts val="500"/>
+              </a:spcBef>
+              <a:buFont typeface="Arial" panose="020B0604020202020204" pitchFamily="34" charset="0"/>
+              <a:buChar char="•"/>
+              <a:defRPr sz="1800" kern="1200">
+                <a:solidFill>
+                  <a:schemeClr val="tx1"/>
+                </a:solidFill>
+                <a:latin typeface="+mn-lt"/>
+                <a:ea typeface="+mn-ea"/>
+                <a:cs typeface="+mn-cs"/>
+              </a:defRPr>
+            </a:lvl5pPr>
+            <a:lvl6pPr marL="2514600" indent="-228600" algn="l" defTabSz="914400" rtl="0" eaLnBrk="1" latinLnBrk="0" hangingPunct="1">
+              <a:lnSpc>
+                <a:spcPct val="90000"/>
+              </a:lnSpc>
+              <a:spcBef>
+                <a:spcPts val="500"/>
+              </a:spcBef>
+              <a:buFont typeface="Arial" panose="020B0604020202020204" pitchFamily="34" charset="0"/>
+              <a:buChar char="•"/>
+              <a:defRPr sz="1800" kern="1200">
+                <a:solidFill>
+                  <a:schemeClr val="tx1"/>
+                </a:solidFill>
+                <a:latin typeface="+mn-lt"/>
+                <a:ea typeface="+mn-ea"/>
+                <a:cs typeface="+mn-cs"/>
+              </a:defRPr>
+            </a:lvl6pPr>
+            <a:lvl7pPr marL="2971800" indent="-228600" algn="l" defTabSz="914400" rtl="0" eaLnBrk="1" latinLnBrk="0" hangingPunct="1">
+              <a:lnSpc>
+                <a:spcPct val="90000"/>
+              </a:lnSpc>
+              <a:spcBef>
+                <a:spcPts val="500"/>
+              </a:spcBef>
+              <a:buFont typeface="Arial" panose="020B0604020202020204" pitchFamily="34" charset="0"/>
+              <a:buChar char="•"/>
+              <a:defRPr sz="1800" kern="1200">
+                <a:solidFill>
+                  <a:schemeClr val="tx1"/>
+                </a:solidFill>
+                <a:latin typeface="+mn-lt"/>
+                <a:ea typeface="+mn-ea"/>
+                <a:cs typeface="+mn-cs"/>
+              </a:defRPr>
+            </a:lvl7pPr>
+            <a:lvl8pPr marL="3429000" indent="-228600" algn="l" defTabSz="914400" rtl="0" eaLnBrk="1" latinLnBrk="0" hangingPunct="1">
+              <a:lnSpc>
+                <a:spcPct val="90000"/>
+              </a:lnSpc>
+              <a:spcBef>
+                <a:spcPts val="500"/>
+              </a:spcBef>
+              <a:buFont typeface="Arial" panose="020B0604020202020204" pitchFamily="34" charset="0"/>
+              <a:buChar char="•"/>
+              <a:defRPr sz="1800" kern="1200">
+                <a:solidFill>
+                  <a:schemeClr val="tx1"/>
+                </a:solidFill>
+                <a:latin typeface="+mn-lt"/>
+                <a:ea typeface="+mn-ea"/>
+                <a:cs typeface="+mn-cs"/>
+              </a:defRPr>
+            </a:lvl8pPr>
+            <a:lvl9pPr marL="3886200" indent="-228600" algn="l" defTabSz="914400" rtl="0" eaLnBrk="1" latinLnBrk="0" hangingPunct="1">
+              <a:lnSpc>
+                <a:spcPct val="90000"/>
+              </a:lnSpc>
+              <a:spcBef>
+                <a:spcPts val="500"/>
+              </a:spcBef>
+              <a:buFont typeface="Arial" panose="020B0604020202020204" pitchFamily="34" charset="0"/>
+              <a:buChar char="•"/>
+              <a:defRPr sz="1800" kern="1200">
+                <a:solidFill>
+                  <a:schemeClr val="tx1"/>
+                </a:solidFill>
+                <a:latin typeface="+mn-lt"/>
+                <a:ea typeface="+mn-ea"/>
+                <a:cs typeface="+mn-cs"/>
+              </a:defRPr>
+            </a:lvl9pPr>
+          </a:lstStyle>
+          <a:p>
+            <a:pPr marL="0" marR="0" lvl="0" indent="0" algn="l" defTabSz="914400" rtl="0" eaLnBrk="1" fontAlgn="auto" latinLnBrk="0" hangingPunct="1">
+              <a:lnSpc>
+                <a:spcPct val="90000"/>
+              </a:lnSpc>
+              <a:spcBef>
+                <a:spcPts val="0"/>
+              </a:spcBef>
+              <a:spcAft>
+                <a:spcPts val="0"/>
+              </a:spcAft>
+              <a:buClr>
+                <a:srgbClr val="00AAF0"/>
+              </a:buClr>
+              <a:buSzPts val="1800"/>
+              <a:buFont typeface="Arial" panose="020B0604020202020204" pitchFamily="34" charset="0"/>
+              <a:buNone/>
+              <a:tabLst/>
+              <a:defRPr/>
+            </a:pPr>
+            <a:r>
+              <a:rPr kumimoji="0" lang="en-GB" sz="2400" b="1" i="0" u="none" strike="noStrike" kern="1200" cap="none" spc="0" normalizeH="0" baseline="0" noProof="0" dirty="0">
+                <a:ln>
+                  <a:noFill/>
+                </a:ln>
+                <a:solidFill>
+                  <a:srgbClr val="00AAF0"/>
+                </a:solidFill>
+                <a:effectLst/>
+                <a:uLnTx/>
+                <a:uFillTx/>
+                <a:latin typeface="Verdana"/>
+                <a:ea typeface="Verdana"/>
+                <a:sym typeface="Verdana"/>
+              </a:rPr>
+              <a:t>Global Differential Expression</a:t>
+            </a:r>
+            <a:r>
+              <a:rPr kumimoji="0" lang="hu-HU" sz="2400" b="1" i="0" u="none" strike="noStrike" kern="1200" cap="none" spc="0" normalizeH="0" baseline="0" noProof="0" dirty="0">
+                <a:ln>
+                  <a:noFill/>
+                </a:ln>
+                <a:solidFill>
+                  <a:srgbClr val="00AAF0"/>
+                </a:solidFill>
+                <a:effectLst/>
+                <a:uLnTx/>
+                <a:uFillTx/>
+                <a:latin typeface="Verdana"/>
+                <a:ea typeface="Verdana"/>
+                <a:sym typeface="Verdana"/>
+              </a:rPr>
+              <a:t> (DE)</a:t>
+            </a:r>
+            <a:r>
+              <a:rPr kumimoji="0" lang="en-GB" sz="2400" b="1" i="0" u="none" strike="noStrike" kern="1200" cap="none" spc="0" normalizeH="0" baseline="0" noProof="0" dirty="0">
+                <a:ln>
+                  <a:noFill/>
+                </a:ln>
+                <a:solidFill>
+                  <a:srgbClr val="00AAF0"/>
+                </a:solidFill>
+                <a:effectLst/>
+                <a:uLnTx/>
+                <a:uFillTx/>
+                <a:latin typeface="Verdana"/>
+                <a:ea typeface="Verdana"/>
+                <a:sym typeface="Verdana"/>
+              </a:rPr>
+              <a:t> Response to Dexamethasone</a:t>
+            </a:r>
+            <a:endParaRPr kumimoji="0" lang="hu-HU" sz="2400" b="1" i="0" u="none" strike="noStrike" kern="1200" cap="none" spc="0" normalizeH="0" baseline="0" noProof="0" dirty="0">
+              <a:ln>
+                <a:noFill/>
+              </a:ln>
+              <a:solidFill>
+                <a:srgbClr val="00AAF0"/>
+              </a:solidFill>
+              <a:effectLst/>
+              <a:uLnTx/>
+              <a:uFillTx/>
+              <a:latin typeface="Verdana"/>
+              <a:ea typeface="Verdana"/>
+              <a:sym typeface="Verdana"/>
+            </a:endParaRPr>
+          </a:p>
+          <a:p>
+            <a:pPr marL="0" marR="0" lvl="0" indent="0" algn="l" defTabSz="914400" rtl="0" eaLnBrk="1" fontAlgn="auto" latinLnBrk="0" hangingPunct="1">
+              <a:lnSpc>
+                <a:spcPct val="90000"/>
+              </a:lnSpc>
+              <a:spcBef>
+                <a:spcPts val="0"/>
+              </a:spcBef>
+              <a:spcAft>
+                <a:spcPts val="0"/>
+              </a:spcAft>
+              <a:buClr>
+                <a:srgbClr val="00AAF0"/>
+              </a:buClr>
+              <a:buSzPts val="1800"/>
+              <a:buFont typeface="Arial" panose="020B0604020202020204" pitchFamily="34" charset="0"/>
+              <a:buNone/>
+              <a:tabLst/>
+              <a:defRPr/>
+            </a:pPr>
+            <a:endParaRPr kumimoji="0" lang="hu-HU" sz="2400" b="1" i="0" u="none" strike="noStrike" kern="1200" cap="none" spc="0" normalizeH="0" baseline="0" noProof="0" dirty="0">
+              <a:ln>
+                <a:noFill/>
+              </a:ln>
+              <a:solidFill>
+                <a:srgbClr val="00AAF0"/>
+              </a:solidFill>
+              <a:effectLst/>
+              <a:uLnTx/>
+              <a:uFillTx/>
+              <a:latin typeface="Verdana"/>
+              <a:ea typeface="Verdana"/>
+              <a:sym typeface="Verdana"/>
+            </a:endParaRPr>
+          </a:p>
+          <a:p>
+            <a:pPr marL="0" indent="0">
+              <a:spcBef>
+                <a:spcPts val="0"/>
+              </a:spcBef>
+              <a:buNone/>
+            </a:pPr>
+            <a:endParaRPr lang="en-US" dirty="0"/>
+          </a:p>
+        </p:txBody>
+      </p:sp>
+      <p:sp>
+        <p:nvSpPr>
+          <p:cNvPr id="2" name="AutoShape 2" descr="preview url image">
+            <a:extLst>
+              <a:ext uri="{FF2B5EF4-FFF2-40B4-BE49-F238E27FC236}">
+                <a16:creationId xmlns:a16="http://schemas.microsoft.com/office/drawing/2014/main" id="{FC6F1047-7447-9624-351C-CF71213E5D3D}"/>
+              </a:ext>
+            </a:extLst>
+          </p:cNvPr>
+          <p:cNvSpPr>
+            <a:spLocks noChangeAspect="1" noChangeArrowheads="1"/>
+          </p:cNvSpPr>
+          <p:nvPr/>
+        </p:nvSpPr>
+        <p:spPr bwMode="auto">
+          <a:xfrm>
+            <a:off x="5943600" y="3276600"/>
+            <a:ext cx="304800" cy="304800"/>
+          </a:xfrm>
+          <a:prstGeom prst="rect">
+            <a:avLst/>
+          </a:prstGeom>
+          <a:noFill/>
+          <a:extLst>
+            <a:ext uri="{909E8E84-426E-40DD-AFC4-6F175D3DCCD1}">
+              <a14:hiddenFill xmlns:a14="http://schemas.microsoft.com/office/drawing/2010/main">
+                <a:solidFill>
+                  <a:srgbClr val="FFFFFF"/>
+                </a:solidFill>
+              </a14:hiddenFill>
+            </a:ext>
+          </a:extLst>
+        </p:spPr>
+        <p:txBody>
+          <a:bodyPr vert="horz" wrap="square" lIns="91440" tIns="45720" rIns="91440" bIns="45720" numCol="1" anchor="t" anchorCtr="0" compatLnSpc="1">
+            <a:prstTxWarp prst="textNoShape">
+              <a:avLst/>
+            </a:prstTxWarp>
+          </a:bodyPr>
+          <a:lstStyle/>
+          <a:p>
+            <a:endParaRPr lang="pt-PT"/>
+          </a:p>
+        </p:txBody>
+      </p:sp>
+      <p:pic>
+        <p:nvPicPr>
+          <p:cNvPr id="12" name="Picture 11">
+            <a:extLst>
+              <a:ext uri="{FF2B5EF4-FFF2-40B4-BE49-F238E27FC236}">
+                <a16:creationId xmlns:a16="http://schemas.microsoft.com/office/drawing/2014/main" id="{7B9273BB-60A2-5379-F069-779BC5AA6D49}"/>
+              </a:ext>
+            </a:extLst>
+          </p:cNvPr>
+          <p:cNvPicPr>
+            <a:picLocks noChangeAspect="1"/>
+          </p:cNvPicPr>
+          <p:nvPr/>
+        </p:nvPicPr>
+        <p:blipFill>
+          <a:blip r:embed="rId3"/>
+          <a:stretch>
+            <a:fillRect/>
+          </a:stretch>
+        </p:blipFill>
+        <p:spPr>
+          <a:xfrm>
+            <a:off x="5943600" y="889318"/>
+            <a:ext cx="5768091" cy="5079363"/>
+          </a:xfrm>
+          <a:prstGeom prst="rect">
+            <a:avLst/>
+          </a:prstGeom>
+        </p:spPr>
+      </p:pic>
+      <p:sp>
+        <p:nvSpPr>
+          <p:cNvPr id="13" name="TextBox 12">
+            <a:extLst>
+              <a:ext uri="{FF2B5EF4-FFF2-40B4-BE49-F238E27FC236}">
+                <a16:creationId xmlns:a16="http://schemas.microsoft.com/office/drawing/2014/main" id="{E584F348-EB5D-8B6F-4AD9-CD65B139DA2A}"/>
+              </a:ext>
+            </a:extLst>
+          </p:cNvPr>
+          <p:cNvSpPr txBox="1"/>
+          <p:nvPr/>
+        </p:nvSpPr>
+        <p:spPr>
+          <a:xfrm>
+            <a:off x="352490" y="1414732"/>
+            <a:ext cx="7504577" cy="2585323"/>
+          </a:xfrm>
+          <a:prstGeom prst="rect">
+            <a:avLst/>
+          </a:prstGeom>
+          <a:noFill/>
+        </p:spPr>
+        <p:txBody>
+          <a:bodyPr wrap="square" rtlCol="0">
+            <a:spAutoFit/>
+          </a:bodyPr>
+          <a:lstStyle/>
+          <a:p>
+            <a:r>
+              <a:rPr lang="en-GB" b="1" dirty="0"/>
+              <a:t>Known Glucocorticoid Targets Are Strongly Upregulated</a:t>
+            </a:r>
+            <a:endParaRPr lang="en-GB" dirty="0"/>
+          </a:p>
+          <a:p>
+            <a:pPr marL="285750" indent="-285750">
+              <a:buFont typeface="Arial" panose="020B0604020202020204" pitchFamily="34" charset="0"/>
+              <a:buChar char="•"/>
+            </a:pPr>
+            <a:r>
+              <a:rPr lang="en-GB" b="1" dirty="0"/>
+              <a:t>FKBP5</a:t>
+            </a:r>
+            <a:r>
+              <a:rPr lang="en-GB" dirty="0"/>
+              <a:t> – classical glucocorticoid receptor target</a:t>
+            </a:r>
+            <a:endParaRPr lang="hu-HU" dirty="0"/>
+          </a:p>
+          <a:p>
+            <a:pPr marL="285750" indent="-285750">
+              <a:buFont typeface="Arial" panose="020B0604020202020204" pitchFamily="34" charset="0"/>
+              <a:buChar char="•"/>
+            </a:pPr>
+            <a:r>
+              <a:rPr lang="en-GB" b="1" dirty="0"/>
+              <a:t>ZBTB16</a:t>
+            </a:r>
+            <a:endParaRPr lang="hu-HU" dirty="0"/>
+          </a:p>
+          <a:p>
+            <a:pPr marL="285750" indent="-285750">
+              <a:buFont typeface="Arial" panose="020B0604020202020204" pitchFamily="34" charset="0"/>
+              <a:buChar char="•"/>
+            </a:pPr>
+            <a:r>
+              <a:rPr lang="en-GB" b="1" dirty="0"/>
+              <a:t>C7</a:t>
+            </a:r>
+            <a:endParaRPr lang="hu-HU" dirty="0"/>
+          </a:p>
+          <a:p>
+            <a:pPr marL="285750" indent="-285750">
+              <a:buFont typeface="Arial" panose="020B0604020202020204" pitchFamily="34" charset="0"/>
+              <a:buChar char="•"/>
+            </a:pPr>
+            <a:r>
+              <a:rPr lang="en-GB" b="1" dirty="0"/>
+              <a:t>GPX3</a:t>
+            </a:r>
+            <a:endParaRPr lang="hu-HU" dirty="0"/>
+          </a:p>
+          <a:p>
+            <a:pPr marL="285750" indent="-285750">
+              <a:buFont typeface="Arial" panose="020B0604020202020204" pitchFamily="34" charset="0"/>
+              <a:buChar char="•"/>
+            </a:pPr>
+            <a:r>
+              <a:rPr lang="en-GB" b="1" dirty="0"/>
+              <a:t>SAMHD1</a:t>
+            </a:r>
+            <a:endParaRPr lang="hu-HU" dirty="0"/>
+          </a:p>
+          <a:p>
+            <a:pPr marL="285750" indent="-285750">
+              <a:buFont typeface="Arial" panose="020B0604020202020204" pitchFamily="34" charset="0"/>
+              <a:buChar char="•"/>
+            </a:pPr>
+            <a:r>
+              <a:rPr lang="en-GB" b="1" dirty="0"/>
+              <a:t>FBN2</a:t>
+            </a:r>
+            <a:endParaRPr lang="hu-HU" dirty="0"/>
+          </a:p>
+          <a:p>
+            <a:pPr marL="285750" indent="-285750">
+              <a:buFont typeface="Arial" panose="020B0604020202020204" pitchFamily="34" charset="0"/>
+              <a:buChar char="•"/>
+            </a:pPr>
+            <a:r>
+              <a:rPr lang="en-GB" b="1" dirty="0"/>
+              <a:t>GLUL</a:t>
+            </a:r>
+            <a:endParaRPr lang="hu-HU" dirty="0"/>
+          </a:p>
+          <a:p>
+            <a:pPr marL="285750" indent="-285750">
+              <a:buFont typeface="Arial" panose="020B0604020202020204" pitchFamily="34" charset="0"/>
+              <a:buChar char="•"/>
+            </a:pPr>
+            <a:r>
+              <a:rPr lang="en-GB" b="1" dirty="0"/>
+              <a:t>CRISPLD2</a:t>
+            </a:r>
+            <a:r>
+              <a:rPr lang="en-GB" dirty="0"/>
+              <a:t> (from original paper)</a:t>
+            </a:r>
+          </a:p>
+        </p:txBody>
+      </p:sp>
+      <p:sp>
+        <p:nvSpPr>
+          <p:cNvPr id="3" name="Rectangle 2">
+            <a:extLst>
+              <a:ext uri="{FF2B5EF4-FFF2-40B4-BE49-F238E27FC236}">
+                <a16:creationId xmlns:a16="http://schemas.microsoft.com/office/drawing/2014/main" id="{D9643321-DB89-B253-E230-6B0D96ED6A89}"/>
+              </a:ext>
+            </a:extLst>
+          </p:cNvPr>
+          <p:cNvSpPr/>
+          <p:nvPr/>
+        </p:nvSpPr>
+        <p:spPr>
+          <a:xfrm>
+            <a:off x="11056620" y="1414733"/>
+            <a:ext cx="548358" cy="154988"/>
+          </a:xfrm>
+          <a:prstGeom prst="rect">
+            <a:avLst/>
+          </a:prstGeom>
+          <a:noFill/>
+          <a:ln w="28575">
+            <a:solidFill>
+              <a:srgbClr val="FF0000"/>
+            </a:solidFill>
+          </a:ln>
+        </p:spPr>
+        <p:style>
+          <a:lnRef idx="2">
+            <a:schemeClr val="accent1">
+              <a:shade val="15000"/>
+            </a:schemeClr>
+          </a:lnRef>
+          <a:fillRef idx="1">
+            <a:schemeClr val="accent1"/>
+          </a:fillRef>
+          <a:effectRef idx="0">
+            <a:schemeClr val="accent1"/>
+          </a:effectRef>
+          <a:fontRef idx="minor">
+            <a:schemeClr val="lt1"/>
+          </a:fontRef>
+        </p:style>
+        <p:txBody>
+          <a:bodyPr rtlCol="0" anchor="ctr"/>
+          <a:lstStyle/>
+          <a:p>
+            <a:pPr algn="ctr"/>
+            <a:endParaRPr lang="en-GB"/>
+          </a:p>
+        </p:txBody>
+      </p:sp>
+      <p:sp>
+        <p:nvSpPr>
+          <p:cNvPr id="5" name="Rectangle 4">
+            <a:extLst>
+              <a:ext uri="{FF2B5EF4-FFF2-40B4-BE49-F238E27FC236}">
+                <a16:creationId xmlns:a16="http://schemas.microsoft.com/office/drawing/2014/main" id="{166EDB56-8BF3-38C6-4BCC-FAE753EAF7BE}"/>
+              </a:ext>
+            </a:extLst>
+          </p:cNvPr>
+          <p:cNvSpPr/>
+          <p:nvPr/>
+        </p:nvSpPr>
+        <p:spPr>
+          <a:xfrm>
+            <a:off x="11056620" y="3639445"/>
+            <a:ext cx="548358" cy="154988"/>
+          </a:xfrm>
+          <a:prstGeom prst="rect">
+            <a:avLst/>
+          </a:prstGeom>
+          <a:noFill/>
+          <a:ln w="28575">
+            <a:solidFill>
+              <a:srgbClr val="FF0000"/>
+            </a:solidFill>
+          </a:ln>
+        </p:spPr>
+        <p:style>
+          <a:lnRef idx="2">
+            <a:schemeClr val="accent1">
+              <a:shade val="15000"/>
+            </a:schemeClr>
+          </a:lnRef>
+          <a:fillRef idx="1">
+            <a:schemeClr val="accent1"/>
+          </a:fillRef>
+          <a:effectRef idx="0">
+            <a:schemeClr val="accent1"/>
+          </a:effectRef>
+          <a:fontRef idx="minor">
+            <a:schemeClr val="lt1"/>
+          </a:fontRef>
+        </p:style>
+        <p:txBody>
+          <a:bodyPr rtlCol="0" anchor="ctr"/>
+          <a:lstStyle/>
+          <a:p>
+            <a:pPr algn="ctr"/>
+            <a:endParaRPr lang="en-GB"/>
+          </a:p>
+        </p:txBody>
+      </p:sp>
+      <p:sp>
+        <p:nvSpPr>
+          <p:cNvPr id="6" name="Rectangle 5">
+            <a:extLst>
+              <a:ext uri="{FF2B5EF4-FFF2-40B4-BE49-F238E27FC236}">
+                <a16:creationId xmlns:a16="http://schemas.microsoft.com/office/drawing/2014/main" id="{3C1C4BE9-947D-DD12-C10F-0442C26A2B10}"/>
+              </a:ext>
+            </a:extLst>
+          </p:cNvPr>
+          <p:cNvSpPr/>
+          <p:nvPr/>
+        </p:nvSpPr>
+        <p:spPr>
+          <a:xfrm>
+            <a:off x="11056620" y="2067268"/>
+            <a:ext cx="548358" cy="154988"/>
+          </a:xfrm>
+          <a:prstGeom prst="rect">
+            <a:avLst/>
+          </a:prstGeom>
+          <a:noFill/>
+          <a:ln w="28575">
+            <a:solidFill>
+              <a:srgbClr val="FF0000"/>
+            </a:solidFill>
+          </a:ln>
+        </p:spPr>
+        <p:style>
+          <a:lnRef idx="2">
+            <a:schemeClr val="accent1">
+              <a:shade val="15000"/>
+            </a:schemeClr>
+          </a:lnRef>
+          <a:fillRef idx="1">
+            <a:schemeClr val="accent1"/>
+          </a:fillRef>
+          <a:effectRef idx="0">
+            <a:schemeClr val="accent1"/>
+          </a:effectRef>
+          <a:fontRef idx="minor">
+            <a:schemeClr val="lt1"/>
+          </a:fontRef>
+        </p:style>
+        <p:txBody>
+          <a:bodyPr rtlCol="0" anchor="ctr"/>
+          <a:lstStyle/>
+          <a:p>
+            <a:pPr algn="ctr"/>
+            <a:endParaRPr lang="en-GB"/>
+          </a:p>
+        </p:txBody>
+      </p:sp>
+      <p:sp>
+        <p:nvSpPr>
+          <p:cNvPr id="9" name="Rectangle 8">
+            <a:extLst>
+              <a:ext uri="{FF2B5EF4-FFF2-40B4-BE49-F238E27FC236}">
+                <a16:creationId xmlns:a16="http://schemas.microsoft.com/office/drawing/2014/main" id="{5F3CBC9A-F253-21D5-D2CB-E24C068F862E}"/>
+              </a:ext>
+            </a:extLst>
+          </p:cNvPr>
+          <p:cNvSpPr/>
+          <p:nvPr/>
+        </p:nvSpPr>
+        <p:spPr>
+          <a:xfrm>
+            <a:off x="11056620" y="1702900"/>
+            <a:ext cx="548358" cy="154988"/>
+          </a:xfrm>
+          <a:prstGeom prst="rect">
+            <a:avLst/>
+          </a:prstGeom>
+          <a:noFill/>
+          <a:ln w="28575">
+            <a:solidFill>
+              <a:srgbClr val="00AAF0"/>
+            </a:solidFill>
+          </a:ln>
+        </p:spPr>
+        <p:style>
+          <a:lnRef idx="2">
+            <a:schemeClr val="accent1">
+              <a:shade val="15000"/>
+            </a:schemeClr>
+          </a:lnRef>
+          <a:fillRef idx="1">
+            <a:schemeClr val="accent1"/>
+          </a:fillRef>
+          <a:effectRef idx="0">
+            <a:schemeClr val="accent1"/>
+          </a:effectRef>
+          <a:fontRef idx="minor">
+            <a:schemeClr val="lt1"/>
+          </a:fontRef>
+        </p:style>
+        <p:txBody>
+          <a:bodyPr rtlCol="0" anchor="ctr"/>
+          <a:lstStyle/>
+          <a:p>
+            <a:pPr algn="ctr"/>
+            <a:endParaRPr lang="en-GB"/>
+          </a:p>
+        </p:txBody>
+      </p:sp>
+      <p:sp>
+        <p:nvSpPr>
+          <p:cNvPr id="10" name="Rectangle 9">
+            <a:extLst>
+              <a:ext uri="{FF2B5EF4-FFF2-40B4-BE49-F238E27FC236}">
+                <a16:creationId xmlns:a16="http://schemas.microsoft.com/office/drawing/2014/main" id="{E7359CE1-9201-8482-96B8-129F3A73C089}"/>
+              </a:ext>
+            </a:extLst>
+          </p:cNvPr>
+          <p:cNvSpPr/>
+          <p:nvPr/>
+        </p:nvSpPr>
+        <p:spPr>
+          <a:xfrm>
+            <a:off x="11056620" y="2982930"/>
+            <a:ext cx="548358" cy="154988"/>
+          </a:xfrm>
+          <a:prstGeom prst="rect">
+            <a:avLst/>
+          </a:prstGeom>
+          <a:noFill/>
+          <a:ln w="28575">
+            <a:solidFill>
+              <a:srgbClr val="FF0000"/>
+            </a:solidFill>
+          </a:ln>
+        </p:spPr>
+        <p:style>
+          <a:lnRef idx="2">
+            <a:schemeClr val="accent1">
+              <a:shade val="15000"/>
+            </a:schemeClr>
+          </a:lnRef>
+          <a:fillRef idx="1">
+            <a:schemeClr val="accent1"/>
+          </a:fillRef>
+          <a:effectRef idx="0">
+            <a:schemeClr val="accent1"/>
+          </a:effectRef>
+          <a:fontRef idx="minor">
+            <a:schemeClr val="lt1"/>
+          </a:fontRef>
+        </p:style>
+        <p:txBody>
+          <a:bodyPr rtlCol="0" anchor="ctr"/>
+          <a:lstStyle/>
+          <a:p>
+            <a:pPr algn="ctr"/>
+            <a:endParaRPr lang="en-GB"/>
+          </a:p>
+        </p:txBody>
+      </p:sp>
+      <p:sp>
+        <p:nvSpPr>
+          <p:cNvPr id="11" name="TextBox 10">
+            <a:extLst>
+              <a:ext uri="{FF2B5EF4-FFF2-40B4-BE49-F238E27FC236}">
+                <a16:creationId xmlns:a16="http://schemas.microsoft.com/office/drawing/2014/main" id="{296CB6B5-6E4F-B982-C6D7-5DDC26CC9CCE}"/>
+              </a:ext>
+            </a:extLst>
+          </p:cNvPr>
+          <p:cNvSpPr txBox="1"/>
+          <p:nvPr/>
+        </p:nvSpPr>
+        <p:spPr>
+          <a:xfrm>
+            <a:off x="7934325" y="6488668"/>
+            <a:ext cx="1228725" cy="369332"/>
+          </a:xfrm>
+          <a:prstGeom prst="rect">
+            <a:avLst/>
+          </a:prstGeom>
+          <a:noFill/>
+        </p:spPr>
+        <p:txBody>
+          <a:bodyPr wrap="square" rtlCol="0">
+            <a:spAutoFit/>
+          </a:bodyPr>
+          <a:lstStyle/>
+          <a:p>
+            <a:pPr algn="ctr"/>
+            <a:r>
+              <a:rPr lang="hu-HU" b="1" dirty="0" err="1"/>
+              <a:t>Untreated</a:t>
+            </a:r>
+            <a:endParaRPr lang="en-GB" b="1" dirty="0"/>
+          </a:p>
+        </p:txBody>
+      </p:sp>
+      <p:sp>
+        <p:nvSpPr>
+          <p:cNvPr id="14" name="Left Bracket 13">
+            <a:extLst>
+              <a:ext uri="{FF2B5EF4-FFF2-40B4-BE49-F238E27FC236}">
+                <a16:creationId xmlns:a16="http://schemas.microsoft.com/office/drawing/2014/main" id="{EC28DBD6-EF74-B742-498F-30A381B6E000}"/>
+              </a:ext>
+            </a:extLst>
+          </p:cNvPr>
+          <p:cNvSpPr/>
+          <p:nvPr/>
+        </p:nvSpPr>
+        <p:spPr>
+          <a:xfrm rot="16200000">
+            <a:off x="8310915" y="5217433"/>
+            <a:ext cx="519989" cy="2022483"/>
+          </a:xfrm>
+          <a:prstGeom prst="leftBracket">
+            <a:avLst/>
+          </a:prstGeom>
+          <a:ln w="12700">
+            <a:prstDash val="dash"/>
+          </a:ln>
+        </p:spPr>
+        <p:style>
+          <a:lnRef idx="1">
+            <a:schemeClr val="dk1"/>
+          </a:lnRef>
+          <a:fillRef idx="0">
+            <a:schemeClr val="dk1"/>
+          </a:fillRef>
+          <a:effectRef idx="0">
+            <a:schemeClr val="dk1"/>
+          </a:effectRef>
+          <a:fontRef idx="minor">
+            <a:schemeClr val="tx1"/>
+          </a:fontRef>
+        </p:style>
+        <p:txBody>
+          <a:bodyPr rtlCol="0" anchor="ctr"/>
+          <a:lstStyle/>
+          <a:p>
+            <a:pPr algn="ctr"/>
+            <a:endParaRPr lang="en-GB"/>
+          </a:p>
+        </p:txBody>
+      </p:sp>
+      <p:sp>
+        <p:nvSpPr>
+          <p:cNvPr id="15" name="Left Bracket 14">
+            <a:extLst>
+              <a:ext uri="{FF2B5EF4-FFF2-40B4-BE49-F238E27FC236}">
+                <a16:creationId xmlns:a16="http://schemas.microsoft.com/office/drawing/2014/main" id="{4EBC0B1A-332F-DED3-0F9C-B10320701B83}"/>
+              </a:ext>
+            </a:extLst>
+          </p:cNvPr>
+          <p:cNvSpPr/>
+          <p:nvPr/>
+        </p:nvSpPr>
+        <p:spPr>
+          <a:xfrm rot="16200000">
+            <a:off x="9393083" y="5102059"/>
+            <a:ext cx="289247" cy="2022483"/>
+          </a:xfrm>
+          <a:prstGeom prst="leftBracket">
+            <a:avLst/>
+          </a:prstGeom>
+          <a:ln w="12700">
+            <a:prstDash val="dash"/>
+          </a:ln>
+        </p:spPr>
+        <p:style>
+          <a:lnRef idx="1">
+            <a:schemeClr val="dk1"/>
+          </a:lnRef>
+          <a:fillRef idx="0">
+            <a:schemeClr val="dk1"/>
+          </a:fillRef>
+          <a:effectRef idx="0">
+            <a:schemeClr val="dk1"/>
+          </a:effectRef>
+          <a:fontRef idx="minor">
+            <a:schemeClr val="tx1"/>
+          </a:fontRef>
+        </p:style>
+        <p:txBody>
+          <a:bodyPr rtlCol="0" anchor="ctr"/>
+          <a:lstStyle/>
+          <a:p>
+            <a:pPr algn="ctr"/>
+            <a:endParaRPr lang="en-GB"/>
+          </a:p>
+        </p:txBody>
+      </p:sp>
+      <p:sp>
+        <p:nvSpPr>
+          <p:cNvPr id="16" name="TextBox 15">
+            <a:extLst>
+              <a:ext uri="{FF2B5EF4-FFF2-40B4-BE49-F238E27FC236}">
+                <a16:creationId xmlns:a16="http://schemas.microsoft.com/office/drawing/2014/main" id="{5BABC096-5953-B6ED-2B79-FCCA4602E492}"/>
+              </a:ext>
+            </a:extLst>
+          </p:cNvPr>
+          <p:cNvSpPr txBox="1"/>
+          <p:nvPr/>
+        </p:nvSpPr>
+        <p:spPr>
+          <a:xfrm>
+            <a:off x="8967788" y="6201527"/>
+            <a:ext cx="1228725" cy="369332"/>
+          </a:xfrm>
+          <a:prstGeom prst="rect">
+            <a:avLst/>
+          </a:prstGeom>
+          <a:noFill/>
+        </p:spPr>
+        <p:txBody>
+          <a:bodyPr wrap="square" rtlCol="0">
+            <a:spAutoFit/>
+          </a:bodyPr>
+          <a:lstStyle/>
+          <a:p>
+            <a:pPr algn="ctr"/>
+            <a:r>
+              <a:rPr lang="hu-HU" b="1" dirty="0" err="1">
+                <a:solidFill>
+                  <a:srgbClr val="FF0000"/>
+                </a:solidFill>
+              </a:rPr>
+              <a:t>Dex</a:t>
+            </a:r>
+            <a:endParaRPr lang="en-GB" b="1" dirty="0">
+              <a:solidFill>
+                <a:srgbClr val="FF0000"/>
+              </a:solidFill>
+            </a:endParaRPr>
+          </a:p>
+        </p:txBody>
+      </p:sp>
+    </p:spTree>
+    <p:extLst>
+      <p:ext uri="{BB962C8B-B14F-4D97-AF65-F5344CB8AC3E}">
+        <p14:creationId xmlns:p14="http://schemas.microsoft.com/office/powerpoint/2010/main" val="3341664039"/>
+      </p:ext>
+    </p:extLst>
+  </p:cSld>
+  <p:clrMapOvr>
+    <a:masterClrMapping/>
+  </p:clrMapOvr>
+</p:sld>
+</file>
+
+<file path=ppt/slides/slide6.xml><?xml version="1.0" encoding="utf-8"?>
+<p:sld xmlns:a="http://schemas.openxmlformats.org/drawingml/2006/main" xmlns:r="http://schemas.openxmlformats.org/officeDocument/2006/relationships" xmlns:p="http://schemas.openxmlformats.org/presentationml/2006/main">
+  <p:cSld>
+    <p:spTree>
+      <p:nvGrpSpPr>
+        <p:cNvPr id="1" name="">
+          <a:extLst>
+            <a:ext uri="{FF2B5EF4-FFF2-40B4-BE49-F238E27FC236}">
+              <a16:creationId xmlns:a16="http://schemas.microsoft.com/office/drawing/2014/main" id="{4DCE6585-D6D9-3471-3C77-D0A49DC44136}"/>
+            </a:ext>
+          </a:extLst>
+        </p:cNvPr>
+        <p:cNvGrpSpPr/>
+        <p:nvPr/>
+      </p:nvGrpSpPr>
+      <p:grpSpPr>
+        <a:xfrm>
+          <a:off x="0" y="0"/>
+          <a:ext cx="0" cy="0"/>
+          <a:chOff x="0" y="0"/>
+          <a:chExt cx="0" cy="0"/>
+        </a:xfrm>
+      </p:grpSpPr>
+      <p:sp>
+        <p:nvSpPr>
+          <p:cNvPr id="4" name="Marcador de Posição do Número do Diapositivo 3">
+            <a:extLst>
+              <a:ext uri="{FF2B5EF4-FFF2-40B4-BE49-F238E27FC236}">
+                <a16:creationId xmlns:a16="http://schemas.microsoft.com/office/drawing/2014/main" id="{6087D324-F79D-B4D2-0E05-3156B8997704}"/>
+              </a:ext>
+            </a:extLst>
+          </p:cNvPr>
+          <p:cNvSpPr>
+            <a:spLocks noGrp="1"/>
+          </p:cNvSpPr>
+          <p:nvPr>
+            <p:ph type="sldNum" sz="quarter" idx="11"/>
+          </p:nvPr>
+        </p:nvSpPr>
+        <p:spPr/>
+        <p:txBody>
+          <a:bodyPr/>
+          <a:lstStyle/>
+          <a:p>
+            <a:fld id="{20B01981-BAC9-448B-9192-9C05FAA59408}" type="slidenum">
+              <a:rPr lang="en-US" noProof="0" smtClean="0"/>
+              <a:pPr/>
+              <a:t>6</a:t>
+            </a:fld>
+            <a:endParaRPr lang="en-US" noProof="0" dirty="0"/>
+          </a:p>
+        </p:txBody>
+      </p:sp>
+      <p:sp>
+        <p:nvSpPr>
+          <p:cNvPr id="7" name="Google Shape;129;p24">
+            <a:extLst>
+              <a:ext uri="{FF2B5EF4-FFF2-40B4-BE49-F238E27FC236}">
+                <a16:creationId xmlns:a16="http://schemas.microsoft.com/office/drawing/2014/main" id="{E256ABDA-34B5-28C0-4A9A-F7045B6DA73B}"/>
+              </a:ext>
+            </a:extLst>
+          </p:cNvPr>
+          <p:cNvSpPr txBox="1">
+            <a:spLocks/>
+          </p:cNvSpPr>
+          <p:nvPr/>
+        </p:nvSpPr>
+        <p:spPr>
+          <a:xfrm>
+            <a:off x="243484" y="287140"/>
+            <a:ext cx="11361494" cy="954888"/>
+          </a:xfrm>
+          <a:prstGeom prst="rect">
+            <a:avLst/>
+          </a:prstGeom>
+          <a:noFill/>
+          <a:ln>
+            <a:noFill/>
+          </a:ln>
+        </p:spPr>
+        <p:txBody>
+          <a:bodyPr spcFirstLastPara="1" vert="horz" wrap="square" lIns="91433" tIns="45700" rIns="91433" bIns="45700" rtlCol="0" anchor="t" anchorCtr="0">
+            <a:normAutofit/>
+          </a:bodyPr>
+          <a:lstStyle>
+            <a:lvl1pPr marL="228600" indent="-228600" algn="l" defTabSz="914400" rtl="0" eaLnBrk="1" latinLnBrk="0" hangingPunct="1">
+              <a:lnSpc>
+                <a:spcPct val="90000"/>
+              </a:lnSpc>
+              <a:spcBef>
+                <a:spcPts val="1000"/>
+              </a:spcBef>
+              <a:buFont typeface="Arial" panose="020B0604020202020204" pitchFamily="34" charset="0"/>
+              <a:buChar char="•"/>
+              <a:defRPr sz="2800" kern="1200">
+                <a:solidFill>
+                  <a:schemeClr val="tx1"/>
+                </a:solidFill>
+                <a:latin typeface="+mn-lt"/>
+                <a:ea typeface="+mn-ea"/>
+                <a:cs typeface="+mn-cs"/>
+              </a:defRPr>
+            </a:lvl1pPr>
+            <a:lvl2pPr marL="685800" indent="-228600" algn="l" defTabSz="914400" rtl="0" eaLnBrk="1" latinLnBrk="0" hangingPunct="1">
+              <a:lnSpc>
+                <a:spcPct val="90000"/>
+              </a:lnSpc>
+              <a:spcBef>
+                <a:spcPts val="500"/>
+              </a:spcBef>
+              <a:buFont typeface="Arial" panose="020B0604020202020204" pitchFamily="34" charset="0"/>
+              <a:buChar char="•"/>
+              <a:defRPr sz="2400" kern="1200">
+                <a:solidFill>
+                  <a:schemeClr val="tx1"/>
+                </a:solidFill>
+                <a:latin typeface="+mn-lt"/>
+                <a:ea typeface="+mn-ea"/>
+                <a:cs typeface="+mn-cs"/>
+              </a:defRPr>
+            </a:lvl2pPr>
+            <a:lvl3pPr marL="1143000" indent="-228600" algn="l" defTabSz="914400" rtl="0" eaLnBrk="1" latinLnBrk="0" hangingPunct="1">
+              <a:lnSpc>
+                <a:spcPct val="90000"/>
+              </a:lnSpc>
+              <a:spcBef>
+                <a:spcPts val="500"/>
+              </a:spcBef>
+              <a:buFont typeface="Arial" panose="020B0604020202020204" pitchFamily="34" charset="0"/>
+              <a:buChar char="•"/>
+              <a:defRPr sz="2000" kern="1200">
+                <a:solidFill>
+                  <a:schemeClr val="tx1"/>
+                </a:solidFill>
+                <a:latin typeface="+mn-lt"/>
+                <a:ea typeface="+mn-ea"/>
+                <a:cs typeface="+mn-cs"/>
+              </a:defRPr>
+            </a:lvl3pPr>
+            <a:lvl4pPr marL="1600200" indent="-228600" algn="l" defTabSz="914400" rtl="0" eaLnBrk="1" latinLnBrk="0" hangingPunct="1">
+              <a:lnSpc>
+                <a:spcPct val="90000"/>
+              </a:lnSpc>
+              <a:spcBef>
+                <a:spcPts val="500"/>
+              </a:spcBef>
+              <a:buFont typeface="Arial" panose="020B0604020202020204" pitchFamily="34" charset="0"/>
+              <a:buChar char="•"/>
+              <a:defRPr sz="1800" kern="1200">
+                <a:solidFill>
+                  <a:schemeClr val="tx1"/>
+                </a:solidFill>
+                <a:latin typeface="+mn-lt"/>
+                <a:ea typeface="+mn-ea"/>
+                <a:cs typeface="+mn-cs"/>
+              </a:defRPr>
+            </a:lvl4pPr>
+            <a:lvl5pPr marL="2057400" indent="-228600" algn="l" defTabSz="914400" rtl="0" eaLnBrk="1" latinLnBrk="0" hangingPunct="1">
+              <a:lnSpc>
+                <a:spcPct val="90000"/>
+              </a:lnSpc>
+              <a:spcBef>
+                <a:spcPts val="500"/>
+              </a:spcBef>
+              <a:buFont typeface="Arial" panose="020B0604020202020204" pitchFamily="34" charset="0"/>
+              <a:buChar char="•"/>
+              <a:defRPr sz="1800" kern="1200">
+                <a:solidFill>
+                  <a:schemeClr val="tx1"/>
+                </a:solidFill>
+                <a:latin typeface="+mn-lt"/>
+                <a:ea typeface="+mn-ea"/>
+                <a:cs typeface="+mn-cs"/>
+              </a:defRPr>
+            </a:lvl5pPr>
+            <a:lvl6pPr marL="2514600" indent="-228600" algn="l" defTabSz="914400" rtl="0" eaLnBrk="1" latinLnBrk="0" hangingPunct="1">
+              <a:lnSpc>
+                <a:spcPct val="90000"/>
+              </a:lnSpc>
+              <a:spcBef>
+                <a:spcPts val="500"/>
+              </a:spcBef>
+              <a:buFont typeface="Arial" panose="020B0604020202020204" pitchFamily="34" charset="0"/>
+              <a:buChar char="•"/>
+              <a:defRPr sz="1800" kern="1200">
+                <a:solidFill>
+                  <a:schemeClr val="tx1"/>
+                </a:solidFill>
+                <a:latin typeface="+mn-lt"/>
+                <a:ea typeface="+mn-ea"/>
+                <a:cs typeface="+mn-cs"/>
+              </a:defRPr>
+            </a:lvl6pPr>
+            <a:lvl7pPr marL="2971800" indent="-228600" algn="l" defTabSz="914400" rtl="0" eaLnBrk="1" latinLnBrk="0" hangingPunct="1">
+              <a:lnSpc>
+                <a:spcPct val="90000"/>
+              </a:lnSpc>
+              <a:spcBef>
+                <a:spcPts val="500"/>
+              </a:spcBef>
+              <a:buFont typeface="Arial" panose="020B0604020202020204" pitchFamily="34" charset="0"/>
+              <a:buChar char="•"/>
+              <a:defRPr sz="1800" kern="1200">
+                <a:solidFill>
+                  <a:schemeClr val="tx1"/>
+                </a:solidFill>
+                <a:latin typeface="+mn-lt"/>
+                <a:ea typeface="+mn-ea"/>
+                <a:cs typeface="+mn-cs"/>
+              </a:defRPr>
+            </a:lvl7pPr>
+            <a:lvl8pPr marL="3429000" indent="-228600" algn="l" defTabSz="914400" rtl="0" eaLnBrk="1" latinLnBrk="0" hangingPunct="1">
+              <a:lnSpc>
+                <a:spcPct val="90000"/>
+              </a:lnSpc>
+              <a:spcBef>
+                <a:spcPts val="500"/>
+              </a:spcBef>
+              <a:buFont typeface="Arial" panose="020B0604020202020204" pitchFamily="34" charset="0"/>
+              <a:buChar char="•"/>
+              <a:defRPr sz="1800" kern="1200">
+                <a:solidFill>
+                  <a:schemeClr val="tx1"/>
+                </a:solidFill>
+                <a:latin typeface="+mn-lt"/>
+                <a:ea typeface="+mn-ea"/>
+                <a:cs typeface="+mn-cs"/>
+              </a:defRPr>
+            </a:lvl8pPr>
+            <a:lvl9pPr marL="3886200" indent="-228600" algn="l" defTabSz="914400" rtl="0" eaLnBrk="1" latinLnBrk="0" hangingPunct="1">
+              <a:lnSpc>
+                <a:spcPct val="90000"/>
+              </a:lnSpc>
+              <a:spcBef>
+                <a:spcPts val="500"/>
+              </a:spcBef>
+              <a:buFont typeface="Arial" panose="020B0604020202020204" pitchFamily="34" charset="0"/>
+              <a:buChar char="•"/>
+              <a:defRPr sz="1800" kern="1200">
+                <a:solidFill>
+                  <a:schemeClr val="tx1"/>
+                </a:solidFill>
+                <a:latin typeface="+mn-lt"/>
+                <a:ea typeface="+mn-ea"/>
+                <a:cs typeface="+mn-cs"/>
+              </a:defRPr>
+            </a:lvl9pPr>
+          </a:lstStyle>
+          <a:p>
+            <a:pPr marL="0" marR="0" lvl="0" indent="0" algn="l" defTabSz="914400" rtl="0" eaLnBrk="1" fontAlgn="auto" latinLnBrk="0" hangingPunct="1">
+              <a:lnSpc>
+                <a:spcPct val="90000"/>
+              </a:lnSpc>
+              <a:spcBef>
+                <a:spcPts val="0"/>
+              </a:spcBef>
+              <a:spcAft>
+                <a:spcPts val="0"/>
+              </a:spcAft>
+              <a:buClr>
+                <a:srgbClr val="00AAF0"/>
+              </a:buClr>
+              <a:buSzPts val="1800"/>
+              <a:buFont typeface="Arial" panose="020B0604020202020204" pitchFamily="34" charset="0"/>
+              <a:buNone/>
+              <a:tabLst/>
+              <a:defRPr/>
+            </a:pPr>
+            <a:r>
+              <a:rPr kumimoji="0" lang="en-GB" sz="2400" b="1" i="0" u="none" strike="noStrike" kern="1200" cap="none" spc="0" normalizeH="0" baseline="0" noProof="0" dirty="0">
+                <a:ln>
+                  <a:noFill/>
+                </a:ln>
+                <a:solidFill>
+                  <a:srgbClr val="00AAF0"/>
+                </a:solidFill>
+                <a:effectLst/>
+                <a:uLnTx/>
+                <a:uFillTx/>
+                <a:latin typeface="Verdana"/>
+                <a:ea typeface="Verdana"/>
+                <a:sym typeface="Verdana"/>
+              </a:rPr>
+              <a:t>Global Differential Expression</a:t>
+            </a:r>
+            <a:r>
+              <a:rPr kumimoji="0" lang="hu-HU" sz="2400" b="1" i="0" u="none" strike="noStrike" kern="1200" cap="none" spc="0" normalizeH="0" baseline="0" noProof="0" dirty="0">
+                <a:ln>
+                  <a:noFill/>
+                </a:ln>
+                <a:solidFill>
+                  <a:srgbClr val="00AAF0"/>
+                </a:solidFill>
+                <a:effectLst/>
+                <a:uLnTx/>
+                <a:uFillTx/>
+                <a:latin typeface="Verdana"/>
+                <a:ea typeface="Verdana"/>
+                <a:sym typeface="Verdana"/>
+              </a:rPr>
+              <a:t> (DE)</a:t>
+            </a:r>
+            <a:r>
+              <a:rPr kumimoji="0" lang="en-GB" sz="2400" b="1" i="0" u="none" strike="noStrike" kern="1200" cap="none" spc="0" normalizeH="0" baseline="0" noProof="0" dirty="0">
+                <a:ln>
+                  <a:noFill/>
+                </a:ln>
+                <a:solidFill>
+                  <a:srgbClr val="00AAF0"/>
+                </a:solidFill>
+                <a:effectLst/>
+                <a:uLnTx/>
+                <a:uFillTx/>
+                <a:latin typeface="Verdana"/>
+                <a:ea typeface="Verdana"/>
+                <a:sym typeface="Verdana"/>
+              </a:rPr>
+              <a:t> Response to Dexamethasone</a:t>
+            </a:r>
+            <a:endParaRPr kumimoji="0" lang="hu-HU" sz="2400" b="1" i="0" u="none" strike="noStrike" kern="1200" cap="none" spc="0" normalizeH="0" baseline="0" noProof="0" dirty="0">
+              <a:ln>
+                <a:noFill/>
+              </a:ln>
+              <a:solidFill>
+                <a:srgbClr val="00AAF0"/>
+              </a:solidFill>
+              <a:effectLst/>
+              <a:uLnTx/>
+              <a:uFillTx/>
+              <a:latin typeface="Verdana"/>
+              <a:ea typeface="Verdana"/>
+              <a:sym typeface="Verdana"/>
+            </a:endParaRPr>
+          </a:p>
+          <a:p>
+            <a:pPr marL="0" marR="0" lvl="0" indent="0" algn="l" defTabSz="914400" rtl="0" eaLnBrk="1" fontAlgn="auto" latinLnBrk="0" hangingPunct="1">
+              <a:lnSpc>
+                <a:spcPct val="90000"/>
+              </a:lnSpc>
+              <a:spcBef>
+                <a:spcPts val="0"/>
+              </a:spcBef>
+              <a:spcAft>
+                <a:spcPts val="0"/>
+              </a:spcAft>
+              <a:buClr>
+                <a:srgbClr val="00AAF0"/>
+              </a:buClr>
+              <a:buSzPts val="1800"/>
+              <a:buFont typeface="Arial" panose="020B0604020202020204" pitchFamily="34" charset="0"/>
+              <a:buNone/>
+              <a:tabLst/>
+              <a:defRPr/>
+            </a:pPr>
+            <a:endParaRPr kumimoji="0" lang="hu-HU" sz="2400" b="1" i="0" u="none" strike="noStrike" kern="1200" cap="none" spc="0" normalizeH="0" baseline="0" noProof="0" dirty="0">
+              <a:ln>
+                <a:noFill/>
+              </a:ln>
+              <a:solidFill>
+                <a:srgbClr val="00AAF0"/>
+              </a:solidFill>
+              <a:effectLst/>
+              <a:uLnTx/>
+              <a:uFillTx/>
+              <a:latin typeface="Verdana"/>
+              <a:ea typeface="Verdana"/>
+              <a:sym typeface="Verdana"/>
+            </a:endParaRPr>
+          </a:p>
+          <a:p>
+            <a:pPr marL="0" indent="0">
+              <a:spcBef>
+                <a:spcPts val="0"/>
+              </a:spcBef>
+              <a:buNone/>
+            </a:pPr>
+            <a:endParaRPr lang="en-US" dirty="0"/>
+          </a:p>
+        </p:txBody>
+      </p:sp>
+      <p:sp>
+        <p:nvSpPr>
+          <p:cNvPr id="13" name="TextBox 12">
+            <a:extLst>
+              <a:ext uri="{FF2B5EF4-FFF2-40B4-BE49-F238E27FC236}">
+                <a16:creationId xmlns:a16="http://schemas.microsoft.com/office/drawing/2014/main" id="{CC8067D8-4CC7-90FF-533D-5DFDEBC5C018}"/>
+              </a:ext>
+            </a:extLst>
+          </p:cNvPr>
+          <p:cNvSpPr txBox="1"/>
+          <p:nvPr/>
+        </p:nvSpPr>
+        <p:spPr>
+          <a:xfrm>
+            <a:off x="243484" y="959049"/>
+            <a:ext cx="7504577" cy="369332"/>
+          </a:xfrm>
+          <a:prstGeom prst="rect">
+            <a:avLst/>
+          </a:prstGeom>
+          <a:noFill/>
+        </p:spPr>
+        <p:txBody>
+          <a:bodyPr wrap="square" rtlCol="0">
+            <a:spAutoFit/>
+          </a:bodyPr>
+          <a:lstStyle/>
+          <a:p>
+            <a:r>
+              <a:rPr lang="en-GB" b="1" dirty="0"/>
+              <a:t>CRISPLD2 as a Key Glucocorticoid-Responsive Gene</a:t>
+            </a:r>
+            <a:endParaRPr lang="hu-HU" b="1" dirty="0"/>
+          </a:p>
+        </p:txBody>
+      </p:sp>
+      <p:pic>
+        <p:nvPicPr>
+          <p:cNvPr id="17" name="Picture 16">
+            <a:extLst>
+              <a:ext uri="{FF2B5EF4-FFF2-40B4-BE49-F238E27FC236}">
+                <a16:creationId xmlns:a16="http://schemas.microsoft.com/office/drawing/2014/main" id="{1505CDDE-6EA6-8AD0-E33F-3BDBD219D661}"/>
+              </a:ext>
+            </a:extLst>
+          </p:cNvPr>
+          <p:cNvPicPr>
+            <a:picLocks noChangeAspect="1"/>
+          </p:cNvPicPr>
+          <p:nvPr/>
+        </p:nvPicPr>
+        <p:blipFill>
+          <a:blip r:embed="rId3"/>
+          <a:stretch>
+            <a:fillRect/>
+          </a:stretch>
+        </p:blipFill>
+        <p:spPr>
+          <a:xfrm>
+            <a:off x="358135" y="2096656"/>
+            <a:ext cx="3781953" cy="3658111"/>
+          </a:xfrm>
+          <a:prstGeom prst="rect">
+            <a:avLst/>
+          </a:prstGeom>
+          <a:ln>
+            <a:solidFill>
+              <a:srgbClr val="12A0CB"/>
+            </a:solidFill>
+          </a:ln>
+        </p:spPr>
+      </p:pic>
+      <p:pic>
+        <p:nvPicPr>
+          <p:cNvPr id="19" name="Picture 18">
+            <a:extLst>
+              <a:ext uri="{FF2B5EF4-FFF2-40B4-BE49-F238E27FC236}">
+                <a16:creationId xmlns:a16="http://schemas.microsoft.com/office/drawing/2014/main" id="{CFD512D9-1527-E583-39CA-9F80110B984C}"/>
+              </a:ext>
+            </a:extLst>
+          </p:cNvPr>
+          <p:cNvPicPr>
+            <a:picLocks noChangeAspect="1"/>
+          </p:cNvPicPr>
+          <p:nvPr/>
+        </p:nvPicPr>
+        <p:blipFill>
+          <a:blip r:embed="rId4"/>
+          <a:stretch>
+            <a:fillRect/>
+          </a:stretch>
+        </p:blipFill>
+        <p:spPr>
+          <a:xfrm>
+            <a:off x="6528959" y="2096656"/>
+            <a:ext cx="4379869" cy="4314763"/>
+          </a:xfrm>
+          <a:prstGeom prst="rect">
+            <a:avLst/>
+          </a:prstGeom>
+        </p:spPr>
+      </p:pic>
+      <p:sp>
+        <p:nvSpPr>
+          <p:cNvPr id="20" name="TextBox 19">
+            <a:extLst>
+              <a:ext uri="{FF2B5EF4-FFF2-40B4-BE49-F238E27FC236}">
+                <a16:creationId xmlns:a16="http://schemas.microsoft.com/office/drawing/2014/main" id="{59712531-A1AB-28A7-8C8A-E51E3B0D6E9A}"/>
+              </a:ext>
+            </a:extLst>
+          </p:cNvPr>
+          <p:cNvSpPr txBox="1"/>
+          <p:nvPr/>
+        </p:nvSpPr>
+        <p:spPr>
+          <a:xfrm>
+            <a:off x="7172315" y="6416010"/>
+            <a:ext cx="3093156" cy="369332"/>
+          </a:xfrm>
+          <a:prstGeom prst="rect">
+            <a:avLst/>
+          </a:prstGeom>
+          <a:noFill/>
+        </p:spPr>
+        <p:txBody>
+          <a:bodyPr wrap="square" rtlCol="0">
+            <a:spAutoFit/>
+          </a:bodyPr>
+          <a:lstStyle/>
+          <a:p>
+            <a:pPr algn="ctr"/>
+            <a:r>
+              <a:rPr lang="hu-HU" i="1" dirty="0" err="1"/>
+              <a:t>Himes</a:t>
+            </a:r>
+            <a:r>
+              <a:rPr lang="hu-HU" i="1" dirty="0"/>
+              <a:t> </a:t>
+            </a:r>
+            <a:r>
+              <a:rPr lang="hu-HU" i="1" dirty="0" err="1"/>
+              <a:t>et</a:t>
+            </a:r>
+            <a:r>
+              <a:rPr lang="hu-HU" i="1" dirty="0"/>
+              <a:t> </a:t>
+            </a:r>
+            <a:r>
+              <a:rPr lang="hu-HU" i="1" dirty="0" err="1"/>
+              <a:t>al</a:t>
+            </a:r>
+            <a:r>
+              <a:rPr lang="hu-HU" i="1" dirty="0"/>
+              <a:t>., 2014</a:t>
+            </a:r>
+            <a:endParaRPr lang="en-GB" i="1" dirty="0"/>
+          </a:p>
+        </p:txBody>
+      </p:sp>
+      <p:grpSp>
+        <p:nvGrpSpPr>
+          <p:cNvPr id="25" name="Group 24">
+            <a:extLst>
+              <a:ext uri="{FF2B5EF4-FFF2-40B4-BE49-F238E27FC236}">
+                <a16:creationId xmlns:a16="http://schemas.microsoft.com/office/drawing/2014/main" id="{35B61871-60E0-70D4-B714-84848C215810}"/>
+              </a:ext>
+            </a:extLst>
+          </p:cNvPr>
+          <p:cNvGrpSpPr/>
+          <p:nvPr/>
+        </p:nvGrpSpPr>
+        <p:grpSpPr>
+          <a:xfrm>
+            <a:off x="5643662" y="854480"/>
+            <a:ext cx="5961316" cy="1141712"/>
+            <a:chOff x="1737703" y="2307361"/>
+            <a:chExt cx="8716591" cy="1669403"/>
+          </a:xfrm>
+        </p:grpSpPr>
+        <p:pic>
+          <p:nvPicPr>
+            <p:cNvPr id="22" name="Picture 21">
+              <a:extLst>
+                <a:ext uri="{FF2B5EF4-FFF2-40B4-BE49-F238E27FC236}">
+                  <a16:creationId xmlns:a16="http://schemas.microsoft.com/office/drawing/2014/main" id="{127A08CC-ECEB-4547-F070-6D3D0C55C456}"/>
+                </a:ext>
+              </a:extLst>
+            </p:cNvPr>
+            <p:cNvPicPr>
+              <a:picLocks noChangeAspect="1"/>
+            </p:cNvPicPr>
+            <p:nvPr/>
+          </p:nvPicPr>
+          <p:blipFill>
+            <a:blip r:embed="rId5"/>
+            <a:stretch>
+              <a:fillRect/>
+            </a:stretch>
+          </p:blipFill>
+          <p:spPr>
+            <a:xfrm>
+              <a:off x="1766283" y="2881236"/>
+              <a:ext cx="8659433" cy="1095528"/>
+            </a:xfrm>
+            <a:prstGeom prst="rect">
+              <a:avLst/>
+            </a:prstGeom>
+          </p:spPr>
+        </p:pic>
+        <p:pic>
+          <p:nvPicPr>
+            <p:cNvPr id="24" name="Picture 23">
+              <a:extLst>
+                <a:ext uri="{FF2B5EF4-FFF2-40B4-BE49-F238E27FC236}">
+                  <a16:creationId xmlns:a16="http://schemas.microsoft.com/office/drawing/2014/main" id="{86DE4666-5B50-0A05-9F98-B8067D79AA4D}"/>
+                </a:ext>
+              </a:extLst>
+            </p:cNvPr>
+            <p:cNvPicPr>
+              <a:picLocks noChangeAspect="1"/>
+            </p:cNvPicPr>
+            <p:nvPr/>
+          </p:nvPicPr>
+          <p:blipFill>
+            <a:blip r:embed="rId6"/>
+            <a:stretch>
+              <a:fillRect/>
+            </a:stretch>
+          </p:blipFill>
+          <p:spPr>
+            <a:xfrm>
+              <a:off x="1737703" y="2307361"/>
+              <a:ext cx="8716591" cy="571580"/>
+            </a:xfrm>
+            <a:prstGeom prst="rect">
+              <a:avLst/>
+            </a:prstGeom>
+          </p:spPr>
+        </p:pic>
+      </p:grpSp>
+      <p:cxnSp>
+        <p:nvCxnSpPr>
+          <p:cNvPr id="27" name="Straight Arrow Connector 26">
+            <a:extLst>
+              <a:ext uri="{FF2B5EF4-FFF2-40B4-BE49-F238E27FC236}">
+                <a16:creationId xmlns:a16="http://schemas.microsoft.com/office/drawing/2014/main" id="{F007B819-0AEE-BB73-9DD5-29CEA61D0658}"/>
+              </a:ext>
+            </a:extLst>
+          </p:cNvPr>
+          <p:cNvCxnSpPr/>
+          <p:nvPr/>
+        </p:nvCxnSpPr>
+        <p:spPr>
+          <a:xfrm flipV="1">
+            <a:off x="4651022" y="3203222"/>
+            <a:ext cx="0" cy="1444977"/>
+          </a:xfrm>
+          <a:prstGeom prst="straightConnector1">
+            <a:avLst/>
+          </a:prstGeom>
+          <a:ln w="57150">
+            <a:tailEnd type="triangle"/>
+          </a:ln>
+        </p:spPr>
+        <p:style>
+          <a:lnRef idx="1">
+            <a:schemeClr val="accent1"/>
+          </a:lnRef>
+          <a:fillRef idx="0">
+            <a:schemeClr val="accent1"/>
+          </a:fillRef>
+          <a:effectRef idx="0">
+            <a:schemeClr val="accent1"/>
+          </a:effectRef>
+          <a:fontRef idx="minor">
+            <a:schemeClr val="tx1"/>
+          </a:fontRef>
+        </p:style>
+      </p:cxnSp>
+      <p:sp>
+        <p:nvSpPr>
+          <p:cNvPr id="28" name="TextBox 27">
+            <a:extLst>
+              <a:ext uri="{FF2B5EF4-FFF2-40B4-BE49-F238E27FC236}">
+                <a16:creationId xmlns:a16="http://schemas.microsoft.com/office/drawing/2014/main" id="{A229209E-43F9-2FF1-4ACE-2641E2718704}"/>
+              </a:ext>
+            </a:extLst>
+          </p:cNvPr>
+          <p:cNvSpPr txBox="1"/>
+          <p:nvPr/>
+        </p:nvSpPr>
+        <p:spPr>
+          <a:xfrm>
+            <a:off x="4651022" y="3325545"/>
+            <a:ext cx="1761067" cy="1200329"/>
+          </a:xfrm>
+          <a:prstGeom prst="rect">
+            <a:avLst/>
+          </a:prstGeom>
+          <a:noFill/>
+        </p:spPr>
+        <p:txBody>
+          <a:bodyPr wrap="square" rtlCol="0">
+            <a:spAutoFit/>
+          </a:bodyPr>
+          <a:lstStyle/>
+          <a:p>
+            <a:pPr algn="ctr"/>
+            <a:r>
+              <a:rPr lang="hu-HU" b="1" dirty="0">
+                <a:solidFill>
+                  <a:schemeClr val="accent1"/>
+                </a:solidFill>
+              </a:rPr>
+              <a:t>Strong </a:t>
+            </a:r>
+            <a:r>
+              <a:rPr lang="hu-HU" b="1" dirty="0" err="1">
+                <a:solidFill>
+                  <a:schemeClr val="accent1"/>
+                </a:solidFill>
+              </a:rPr>
+              <a:t>upregulation</a:t>
+            </a:r>
+            <a:r>
+              <a:rPr lang="hu-HU" b="1" dirty="0">
+                <a:solidFill>
+                  <a:schemeClr val="accent1"/>
+                </a:solidFill>
+              </a:rPr>
+              <a:t> </a:t>
+            </a:r>
+            <a:r>
+              <a:rPr lang="hu-HU" b="1" dirty="0" err="1">
+                <a:solidFill>
+                  <a:schemeClr val="accent1"/>
+                </a:solidFill>
+              </a:rPr>
+              <a:t>on</a:t>
+            </a:r>
+            <a:r>
+              <a:rPr lang="hu-HU" b="1" dirty="0">
+                <a:solidFill>
+                  <a:schemeClr val="accent1"/>
+                </a:solidFill>
+              </a:rPr>
+              <a:t> </a:t>
+            </a:r>
+            <a:r>
+              <a:rPr lang="hu-HU" b="1" dirty="0" err="1">
+                <a:solidFill>
+                  <a:schemeClr val="accent1"/>
+                </a:solidFill>
+              </a:rPr>
+              <a:t>Dexamethasone</a:t>
+            </a:r>
+            <a:r>
+              <a:rPr lang="hu-HU" b="1" dirty="0">
+                <a:solidFill>
+                  <a:schemeClr val="accent1"/>
+                </a:solidFill>
+              </a:rPr>
+              <a:t> </a:t>
+            </a:r>
+            <a:r>
+              <a:rPr lang="hu-HU" b="1" dirty="0" err="1">
+                <a:solidFill>
+                  <a:schemeClr val="accent1"/>
+                </a:solidFill>
+              </a:rPr>
+              <a:t>treatment</a:t>
+            </a:r>
+            <a:endParaRPr lang="en-GB" b="1" dirty="0">
+              <a:solidFill>
+                <a:schemeClr val="accent1"/>
+              </a:solidFill>
+            </a:endParaRPr>
+          </a:p>
+        </p:txBody>
+      </p:sp>
+    </p:spTree>
+    <p:extLst>
+      <p:ext uri="{BB962C8B-B14F-4D97-AF65-F5344CB8AC3E}">
+        <p14:creationId xmlns:p14="http://schemas.microsoft.com/office/powerpoint/2010/main" val="2743467298"/>
+      </p:ext>
+    </p:extLst>
+  </p:cSld>
+  <p:clrMapOvr>
+    <a:masterClrMapping/>
+  </p:clrMapOvr>
+</p:sld>
+</file>
+
+<file path=ppt/slides/slide7.xml><?xml version="1.0" encoding="utf-8"?>
 <p:sld xmlns:a="http://schemas.openxmlformats.org/drawingml/2006/main" xmlns:r="http://schemas.openxmlformats.org/officeDocument/2006/relationships" xmlns:p="http://schemas.openxmlformats.org/presentationml/2006/main">
   <p:cSld>
     <p:spTree>
@@ -5101,7 +9142,7 @@
             <a:fld id="{20B01981-BAC9-448B-9192-9C05FAA59408}" type="slidenum">
               <a:rPr lang="en-US" noProof="0" smtClean="0"/>
               <a:pPr/>
-              <a:t>3</a:t>
+              <a:t>7</a:t>
             </a:fld>
             <a:endParaRPr lang="en-US" noProof="0" dirty="0"/>
           </a:p>
@@ -6103,7 +10144,7 @@
 </p:sld>
 </file>
 
-<file path=ppt/slides/slide4.xml><?xml version="1.0" encoding="utf-8"?>
+<file path=ppt/slides/slide8.xml><?xml version="1.0" encoding="utf-8"?>
 <p:sld xmlns:a="http://schemas.openxmlformats.org/drawingml/2006/main" xmlns:r="http://schemas.openxmlformats.org/officeDocument/2006/relationships" xmlns:p="http://schemas.openxmlformats.org/presentationml/2006/main">
   <p:cSld>
     <p:spTree>
@@ -6197,7 +10238,7 @@
             <a:fld id="{20B01981-BAC9-448B-9192-9C05FAA59408}" type="slidenum">
               <a:rPr lang="en-US" noProof="0" smtClean="0"/>
               <a:pPr/>
-              <a:t>4</a:t>
+              <a:t>8</a:t>
             </a:fld>
             <a:endParaRPr lang="en-US" noProof="0" dirty="0"/>
           </a:p>
@@ -7688,7 +11729,7 @@
 </p:sld>
 </file>
 
-<file path=ppt/slides/slide5.xml><?xml version="1.0" encoding="utf-8"?>
+<file path=ppt/slides/slide9.xml><?xml version="1.0" encoding="utf-8"?>
 <p:sld xmlns:a="http://schemas.openxmlformats.org/drawingml/2006/main" xmlns:r="http://schemas.openxmlformats.org/officeDocument/2006/relationships" xmlns:p="http://schemas.openxmlformats.org/presentationml/2006/main">
   <p:cSld>
     <p:spTree>
@@ -7834,7 +11875,7 @@
                 <a:latin typeface="+mj-lt"/>
               </a:rPr>
               <a:pPr/>
-              <a:t>5</a:t>
+              <a:t>9</a:t>
             </a:fld>
             <a:endParaRPr lang="en-US" sz="1200" b="1" noProof="0" dirty="0">
               <a:solidFill>
